--- a/examples/showcase/decks/incident-postmortem/inc-2431-장애-회고.pptx
+++ b/examples/showcase/decks/incident-postmortem/inc-2431-장애-회고.pptx
@@ -976,88 +976,6 @@
 
 <file path=ppt/slideLayouts/slideLayout5.xml><?xml version="1.0" encoding="utf-8"?>
 <p:sldLayout xmlns:a="http://schemas.openxmlformats.org/drawingml/2006/main" xmlns:r="http://schemas.openxmlformats.org/officeDocument/2006/relationships" xmlns:p="http://schemas.openxmlformats.org/presentationml/2006/main" type="cust" preserve="1">
-  <p:cSld name="code">
-    <p:spTree>
-      <p:nvGrpSpPr>
-        <p:cNvPr id="1" name=""/>
-        <p:cNvGrpSpPr/>
-        <p:nvPr/>
-      </p:nvGrpSpPr>
-      <p:grpSpPr>
-        <a:xfrm>
-          <a:off x="0" y="0"/>
-          <a:ext cx="0" cy="0"/>
-          <a:chOff x="0" y="0"/>
-          <a:chExt cx="0" cy="0"/>
-        </a:xfrm>
-      </p:grpSpPr>
-      <p:sp>
-        <p:nvSpPr>
-          <p:cNvPr id="2" name="title"/>
-          <p:cNvSpPr>
-            <a:spLocks noGrp="1"/>
-          </p:cNvSpPr>
-          <p:nvPr>
-            <p:ph type="title"/>
-          </p:nvPr>
-        </p:nvSpPr>
-        <p:spPr/>
-        <p:txBody>
-          <a:bodyPr/>
-          <a:lstStyle/>
-          <a:p>
-            <a:endParaRPr/>
-          </a:p>
-        </p:txBody>
-      </p:sp>
-      <p:sp>
-        <p:nvSpPr>
-          <p:cNvPr id="3" name="code"/>
-          <p:cNvSpPr>
-            <a:spLocks noGrp="1"/>
-          </p:cNvSpPr>
-          <p:nvPr>
-            <p:ph type="body" idx="1"/>
-          </p:nvPr>
-        </p:nvSpPr>
-        <p:spPr/>
-        <p:txBody>
-          <a:bodyPr/>
-          <a:lstStyle/>
-          <a:p>
-            <a:endParaRPr/>
-          </a:p>
-        </p:txBody>
-      </p:sp>
-      <p:sp>
-        <p:nvSpPr>
-          <p:cNvPr id="4" name="caption"/>
-          <p:cNvSpPr>
-            <a:spLocks noGrp="1"/>
-          </p:cNvSpPr>
-          <p:nvPr>
-            <p:ph type="body" idx="2"/>
-          </p:nvPr>
-        </p:nvSpPr>
-        <p:spPr/>
-        <p:txBody>
-          <a:bodyPr/>
-          <a:lstStyle/>
-          <a:p>
-            <a:endParaRPr/>
-          </a:p>
-        </p:txBody>
-      </p:sp>
-    </p:spTree>
-  </p:cSld>
-  <p:clrMapOvr>
-    <a:masterClrMapping/>
-  </p:clrMapOvr>
-</p:sldLayout>
-</file>
-
-<file path=ppt/slideLayouts/slideLayout6.xml><?xml version="1.0" encoding="utf-8"?>
-<p:sldLayout xmlns:a="http://schemas.openxmlformats.org/drawingml/2006/main" xmlns:r="http://schemas.openxmlformats.org/officeDocument/2006/relationships" xmlns:p="http://schemas.openxmlformats.org/presentationml/2006/main" type="cust" preserve="1">
   <p:cSld name="end">
     <p:spTree>
       <p:nvGrpSpPr>
@@ -1204,7 +1122,6 @@
     <p:sldLayoutId id="2147483651" r:id="rId4"/>
     <p:sldLayoutId id="2147483652" r:id="rId5"/>
     <p:sldLayoutId id="2147483653" r:id="rId6"/>
-    <p:sldLayoutId id="2147483654" r:id="rId7"/>
   </p:sldLayoutIdLst>
   <p:txStyles>
     <p:titleStyle>
@@ -1294,8 +1211,8 @@
         </p:nvSpPr>
         <p:spPr>
           <a:xfrm>
-            <a:off x="4010620" y="1078111"/>
-            <a:ext cx="4170759" cy="639961"/>
+            <a:off x="3116907" y="1078111"/>
+            <a:ext cx="5958185" cy="914400"/>
           </a:xfrm>
           <a:prstGeom prst="rect">
             <a:avLst/>
@@ -1313,11 +1230,11 @@
           <a:p>
             <a:pPr algn="l">
               <a:lnSpc>
-                <a:spcPts val="5040"/>
-              </a:lnSpc>
-            </a:pPr>
-            <a:r>
-              <a:rPr sz="4200" b="1">
+                <a:spcPts val="7200"/>
+              </a:lnSpc>
+            </a:pPr>
+            <a:r>
+              <a:rPr sz="6000" b="1">
                 <a:solidFill>
                   <a:schemeClr val="tx1"/>
                 </a:solidFill>
@@ -1339,8 +1256,8 @@
         </p:nvSpPr>
         <p:spPr>
           <a:xfrm>
-            <a:off x="3815358" y="1946672"/>
-            <a:ext cx="4561284" cy="342900"/>
+            <a:off x="3245197" y="2221111"/>
+            <a:ext cx="5701605" cy="371475"/>
           </a:xfrm>
           <a:prstGeom prst="rect">
             <a:avLst/>
@@ -1358,16 +1275,16 @@
           <a:p>
             <a:pPr algn="l">
               <a:lnSpc>
-                <a:spcPts val="2700"/>
-              </a:lnSpc>
-            </a:pPr>
-            <a:r>
-              <a:rPr sz="1800" b="0">
+                <a:spcPts val="2925"/>
+              </a:lnSpc>
+            </a:pPr>
+            <a:r>
+              <a:rPr sz="2250" b="1">
                 <a:solidFill>
                   <a:schemeClr val="tx2"/>
                 </a:solidFill>
-                <a:latin typeface="+mn-lt"/>
-                <a:ea typeface="+mn-ea"/>
+                <a:latin typeface="+mj-lt"/>
+                <a:ea typeface="+mj-ea"/>
               </a:rPr>
               <a:t>캐시 스탬피드 — 무슨 일이 있었고 무엇을 바꾸는가</a:t>
             </a:r>
@@ -1384,8 +1301,8 @@
         </p:nvSpPr>
         <p:spPr>
           <a:xfrm>
-            <a:off x="5566172" y="5539978"/>
-            <a:ext cx="1059656" cy="239911"/>
+            <a:off x="5389513" y="5436989"/>
+            <a:ext cx="1412825" cy="342900"/>
           </a:xfrm>
           <a:prstGeom prst="rect">
             <a:avLst/>
@@ -1403,13 +1320,13 @@
           <a:p>
             <a:pPr algn="l">
               <a:lnSpc>
-                <a:spcPts val="1890"/>
-              </a:lnSpc>
-            </a:pPr>
-            <a:r>
-              <a:rPr sz="1350" b="0">
-                <a:solidFill>
-                  <a:schemeClr val="tx2"/>
+                <a:spcPts val="2700"/>
+              </a:lnSpc>
+            </a:pPr>
+            <a:r>
+              <a:rPr sz="1800" b="0">
+                <a:solidFill>
+                  <a:schemeClr val="tx1"/>
                 </a:solidFill>
                 <a:latin typeface="+mn-lt"/>
                 <a:ea typeface="+mn-ea"/>
@@ -1499,8 +1416,8 @@
         </p:nvSpPr>
         <p:spPr>
           <a:xfrm>
-            <a:off x="4872335" y="2823270"/>
-            <a:ext cx="2447330" cy="639961"/>
+            <a:off x="4347865" y="2684115"/>
+            <a:ext cx="3496121" cy="914400"/>
           </a:xfrm>
           <a:prstGeom prst="rect">
             <a:avLst/>
@@ -1518,11 +1435,11 @@
           <a:p>
             <a:pPr algn="ctr">
               <a:lnSpc>
-                <a:spcPts val="5040"/>
-              </a:lnSpc>
-            </a:pPr>
-            <a:r>
-              <a:rPr sz="4200" b="1">
+                <a:spcPts val="7200"/>
+              </a:lnSpc>
+            </a:pPr>
+            <a:r>
+              <a:rPr sz="6000" b="1">
                 <a:solidFill>
                   <a:schemeClr val="tx1"/>
                 </a:solidFill>
@@ -1544,8 +1461,8 @@
         </p:nvSpPr>
         <p:spPr>
           <a:xfrm>
-            <a:off x="4134445" y="3691830"/>
-            <a:ext cx="3922961" cy="342900"/>
+            <a:off x="3764607" y="3827115"/>
+            <a:ext cx="4662636" cy="346621"/>
           </a:xfrm>
           <a:prstGeom prst="rect">
             <a:avLst/>
@@ -1563,37 +1480,37 @@
           <a:p>
             <a:pPr algn="ctr">
               <a:lnSpc>
-                <a:spcPts val="2700"/>
-              </a:lnSpc>
-            </a:pPr>
-            <a:r>
-              <a:rPr sz="1800" b="0">
+                <a:spcPts val="2730"/>
+              </a:lnSpc>
+            </a:pPr>
+            <a:r>
+              <a:rPr sz="2100" b="1">
                 <a:solidFill>
                   <a:schemeClr val="tx2"/>
                 </a:solidFill>
-                <a:latin typeface="+mn-lt"/>
-                <a:ea typeface="+mn-ea"/>
+                <a:latin typeface="+mj-lt"/>
+                <a:ea typeface="+mj-ea"/>
               </a:rPr>
               <a:t>기록: </a:t>
             </a:r>
             <a:r>
-              <a:rPr sz="1800" b="0" i="0" u="sng">
+              <a:rPr sz="2100" b="1" i="0" u="sng">
                 <a:solidFill>
                   <a:schemeClr val="accent1"/>
                 </a:solidFill>
-                <a:latin typeface="+mn-lt"/>
-                <a:ea typeface="+mn-ea"/>
+                <a:latin typeface="+mj-lt"/>
+                <a:ea typeface="+mj-ea"/>
                 <a:hlinkClick r:id="rId3"/>
               </a:rPr>
               <a:t>INC-2431 회고 문서</a:t>
             </a:r>
             <a:r>
-              <a:rPr sz="1800" b="0">
+              <a:rPr sz="2100" b="1">
                 <a:solidFill>
                   <a:schemeClr val="tx2"/>
                 </a:solidFill>
-                <a:latin typeface="+mn-lt"/>
-                <a:ea typeface="+mn-ea"/>
+                <a:latin typeface="+mj-lt"/>
+                <a:ea typeface="+mj-ea"/>
               </a:rPr>
               <a:t> · #incident-2431</a:t>
             </a:r>
@@ -1676,12 +1593,12 @@
         </p:nvSpPr>
         <p:spPr>
           <a:xfrm>
-            <a:off x="609600" y="2594670"/>
-            <a:ext cx="3505200" cy="1428750"/>
+            <a:off x="609600" y="1283940"/>
+            <a:ext cx="3505200" cy="3810149"/>
           </a:xfrm>
           <a:prstGeom prst="roundRect">
             <a:avLst>
-              <a:gd name="adj" fmla="val 16000"/>
+              <a:gd name="adj" fmla="val 6522"/>
             </a:avLst>
           </a:prstGeom>
           <a:solidFill>
@@ -1703,14 +1620,41 @@
             <a:normAutofit/>
           </a:bodyPr>
           <a:lstStyle/>
+          <a:p/>
+        </p:txBody>
+      </p:sp>
+      <p:sp>
+        <p:nvSpPr>
+          <p:cNvPr id="4" name="text s1.1.0.0.0"/>
+          <p:cNvSpPr txBox="1"/>
+          <p:nvPr/>
+        </p:nvSpPr>
+        <p:spPr>
+          <a:xfrm>
+            <a:off x="1019324" y="2429024"/>
+            <a:ext cx="2685752" cy="822871"/>
+          </a:xfrm>
+          <a:prstGeom prst="rect">
+            <a:avLst/>
+          </a:prstGeom>
+          <a:noFill/>
+          <a:ln>
+            <a:noFill/>
+          </a:ln>
+        </p:spPr>
+        <p:txBody>
+          <a:bodyPr wrap="square" lIns="0" tIns="0" rIns="0" bIns="0" anchor="t">
+            <a:normAutofit/>
+          </a:bodyPr>
+          <a:lstStyle/>
           <a:p>
             <a:pPr algn="l">
               <a:lnSpc>
-                <a:spcPts val="3960"/>
-              </a:lnSpc>
-            </a:pPr>
-            <a:r>
-              <a:rPr sz="3300" b="1">
+                <a:spcPts val="6480"/>
+              </a:lnSpc>
+            </a:pPr>
+            <a:r>
+              <a:rPr sz="5400" b="1">
                 <a:solidFill>
                   <a:schemeClr val="accent5"/>
                 </a:solidFill>
@@ -1720,16 +1664,42 @@
               <a:t>47분</a:t>
             </a:r>
           </a:p>
+        </p:txBody>
+      </p:sp>
+      <p:sp>
+        <p:nvSpPr>
+          <p:cNvPr id="5" name="text s1.1.0.0.1"/>
+          <p:cNvSpPr txBox="1"/>
+          <p:nvPr/>
+        </p:nvSpPr>
+        <p:spPr>
+          <a:xfrm>
+            <a:off x="1019324" y="3309045"/>
+            <a:ext cx="2685752" cy="342900"/>
+          </a:xfrm>
+          <a:prstGeom prst="rect">
+            <a:avLst/>
+          </a:prstGeom>
+          <a:noFill/>
+          <a:ln>
+            <a:noFill/>
+          </a:ln>
+        </p:spPr>
+        <p:txBody>
+          <a:bodyPr wrap="square" lIns="0" tIns="0" rIns="0" bIns="0" anchor="t">
+            <a:normAutofit/>
+          </a:bodyPr>
+          <a:lstStyle/>
           <a:p>
             <a:pPr algn="l">
               <a:lnSpc>
-                <a:spcPts val="1890"/>
-              </a:lnSpc>
-            </a:pPr>
-            <a:r>
-              <a:rPr sz="1350" b="0">
-                <a:solidFill>
-                  <a:schemeClr val="tx2"/>
+                <a:spcPts val="2700"/>
+              </a:lnSpc>
+            </a:pPr>
+            <a:r>
+              <a:rPr sz="1800" b="0">
+                <a:solidFill>
+                  <a:schemeClr val="tx1"/>
                 </a:solidFill>
                 <a:latin typeface="+mn-lt"/>
                 <a:ea typeface="+mn-ea"/>
@@ -1741,18 +1711,61 @@
       </p:sp>
       <p:sp>
         <p:nvSpPr>
-          <p:cNvPr id="4" name="shape s1.1.1"/>
+          <p:cNvPr id="6" name="text s1.1.0.0.2"/>
+          <p:cNvSpPr txBox="1"/>
+          <p:nvPr/>
+        </p:nvSpPr>
+        <p:spPr>
+          <a:xfrm>
+            <a:off x="1019324" y="3709095"/>
+            <a:ext cx="2685752" cy="239911"/>
+          </a:xfrm>
+          <a:prstGeom prst="rect">
+            <a:avLst/>
+          </a:prstGeom>
+          <a:noFill/>
+          <a:ln>
+            <a:noFill/>
+          </a:ln>
+        </p:spPr>
+        <p:txBody>
+          <a:bodyPr wrap="square" lIns="0" tIns="0" rIns="0" bIns="0" anchor="t">
+            <a:normAutofit/>
+          </a:bodyPr>
+          <a:lstStyle/>
+          <a:p>
+            <a:pPr algn="l">
+              <a:lnSpc>
+                <a:spcPts val="1890"/>
+              </a:lnSpc>
+            </a:pPr>
+            <a:r>
+              <a:rPr sz="1350" b="0">
+                <a:solidFill>
+                  <a:schemeClr val="tx2"/>
+                </a:solidFill>
+                <a:latin typeface="+mn-lt"/>
+                <a:ea typeface="+mn-ea"/>
+              </a:rPr>
+              <a:t>14:02 – 14:49 KST</a:t>
+            </a:r>
+          </a:p>
+        </p:txBody>
+      </p:sp>
+      <p:sp>
+        <p:nvSpPr>
+          <p:cNvPr id="7" name="shape s1.1.1"/>
           <p:cNvSpPr/>
           <p:nvPr/>
         </p:nvSpPr>
         <p:spPr>
           <a:xfrm>
-            <a:off x="4343400" y="2594670"/>
-            <a:ext cx="3505200" cy="1428750"/>
+            <a:off x="4343400" y="1283940"/>
+            <a:ext cx="3505200" cy="3810149"/>
           </a:xfrm>
           <a:prstGeom prst="roundRect">
             <a:avLst>
-              <a:gd name="adj" fmla="val 16000"/>
+              <a:gd name="adj" fmla="val 6522"/>
             </a:avLst>
           </a:prstGeom>
           <a:solidFill>
@@ -1774,14 +1787,41 @@
             <a:normAutofit/>
           </a:bodyPr>
           <a:lstStyle/>
+          <a:p/>
+        </p:txBody>
+      </p:sp>
+      <p:sp>
+        <p:nvSpPr>
+          <p:cNvPr id="8" name="text s1.1.1.0.0"/>
+          <p:cNvSpPr txBox="1"/>
+          <p:nvPr/>
+        </p:nvSpPr>
+        <p:spPr>
+          <a:xfrm>
+            <a:off x="4753124" y="2429024"/>
+            <a:ext cx="2685752" cy="822871"/>
+          </a:xfrm>
+          <a:prstGeom prst="rect">
+            <a:avLst/>
+          </a:prstGeom>
+          <a:noFill/>
+          <a:ln>
+            <a:noFill/>
+          </a:ln>
+        </p:spPr>
+        <p:txBody>
+          <a:bodyPr wrap="square" lIns="0" tIns="0" rIns="0" bIns="0" anchor="t">
+            <a:normAutofit/>
+          </a:bodyPr>
+          <a:lstStyle/>
           <a:p>
             <a:pPr algn="l">
               <a:lnSpc>
-                <a:spcPts val="3960"/>
-              </a:lnSpc>
-            </a:pPr>
-            <a:r>
-              <a:rPr sz="3300" b="1">
+                <a:spcPts val="6480"/>
+              </a:lnSpc>
+            </a:pPr>
+            <a:r>
+              <a:rPr sz="5400" b="1">
                 <a:solidFill>
                   <a:schemeClr val="accent5"/>
                 </a:solidFill>
@@ -1791,39 +1831,108 @@
               <a:t>8.4%</a:t>
             </a:r>
           </a:p>
+        </p:txBody>
+      </p:sp>
+      <p:sp>
+        <p:nvSpPr>
+          <p:cNvPr id="9" name="text s1.1.1.0.1"/>
+          <p:cNvSpPr txBox="1"/>
+          <p:nvPr/>
+        </p:nvSpPr>
+        <p:spPr>
+          <a:xfrm>
+            <a:off x="4753124" y="3309045"/>
+            <a:ext cx="2685752" cy="342900"/>
+          </a:xfrm>
+          <a:prstGeom prst="rect">
+            <a:avLst/>
+          </a:prstGeom>
+          <a:noFill/>
+          <a:ln>
+            <a:noFill/>
+          </a:ln>
+        </p:spPr>
+        <p:txBody>
+          <a:bodyPr wrap="square" lIns="0" tIns="0" rIns="0" bIns="0" anchor="t">
+            <a:normAutofit/>
+          </a:bodyPr>
+          <a:lstStyle/>
           <a:p>
             <a:pPr algn="l">
               <a:lnSpc>
-                <a:spcPts val="1890"/>
-              </a:lnSpc>
-            </a:pPr>
-            <a:r>
-              <a:rPr sz="1350" b="0">
-                <a:solidFill>
-                  <a:schemeClr val="tx2"/>
+                <a:spcPts val="2700"/>
+              </a:lnSpc>
+            </a:pPr>
+            <a:r>
+              <a:rPr sz="1800" b="0">
+                <a:solidFill>
+                  <a:schemeClr val="tx1"/>
                 </a:solidFill>
                 <a:latin typeface="+mn-lt"/>
                 <a:ea typeface="+mn-ea"/>
               </a:rPr>
-              <a:t>최대 오류율 (평시 0.02%)</a:t>
-            </a:r>
-          </a:p>
-        </p:txBody>
-      </p:sp>
-      <p:sp>
-        <p:nvSpPr>
-          <p:cNvPr id="5" name="shape s1.1.2"/>
+              <a:t>최대 오류율</a:t>
+            </a:r>
+          </a:p>
+        </p:txBody>
+      </p:sp>
+      <p:sp>
+        <p:nvSpPr>
+          <p:cNvPr id="10" name="text s1.1.1.0.2"/>
+          <p:cNvSpPr txBox="1"/>
+          <p:nvPr/>
+        </p:nvSpPr>
+        <p:spPr>
+          <a:xfrm>
+            <a:off x="4753124" y="3709095"/>
+            <a:ext cx="2685752" cy="239911"/>
+          </a:xfrm>
+          <a:prstGeom prst="rect">
+            <a:avLst/>
+          </a:prstGeom>
+          <a:noFill/>
+          <a:ln>
+            <a:noFill/>
+          </a:ln>
+        </p:spPr>
+        <p:txBody>
+          <a:bodyPr wrap="square" lIns="0" tIns="0" rIns="0" bIns="0" anchor="t">
+            <a:normAutofit/>
+          </a:bodyPr>
+          <a:lstStyle/>
+          <a:p>
+            <a:pPr algn="l">
+              <a:lnSpc>
+                <a:spcPts val="1890"/>
+              </a:lnSpc>
+            </a:pPr>
+            <a:r>
+              <a:rPr sz="1350" b="0">
+                <a:solidFill>
+                  <a:schemeClr val="tx2"/>
+                </a:solidFill>
+                <a:latin typeface="+mn-lt"/>
+                <a:ea typeface="+mn-ea"/>
+              </a:rPr>
+              <a:t>평시 0.02%</a:t>
+            </a:r>
+          </a:p>
+        </p:txBody>
+      </p:sp>
+      <p:sp>
+        <p:nvSpPr>
+          <p:cNvPr id="11" name="shape s1.1.2"/>
           <p:cNvSpPr/>
           <p:nvPr/>
         </p:nvSpPr>
         <p:spPr>
           <a:xfrm>
-            <a:off x="8077200" y="2594670"/>
-            <a:ext cx="3505200" cy="1428750"/>
+            <a:off x="8077200" y="1283940"/>
+            <a:ext cx="3505200" cy="3810149"/>
           </a:xfrm>
           <a:prstGeom prst="roundRect">
             <a:avLst>
-              <a:gd name="adj" fmla="val 16000"/>
+              <a:gd name="adj" fmla="val 6522"/>
             </a:avLst>
           </a:prstGeom>
           <a:solidFill>
@@ -1845,14 +1954,41 @@
             <a:normAutofit/>
           </a:bodyPr>
           <a:lstStyle/>
+          <a:p/>
+        </p:txBody>
+      </p:sp>
+      <p:sp>
+        <p:nvSpPr>
+          <p:cNvPr id="12" name="text s1.1.2.0.0"/>
+          <p:cNvSpPr txBox="1"/>
+          <p:nvPr/>
+        </p:nvSpPr>
+        <p:spPr>
+          <a:xfrm>
+            <a:off x="8486924" y="2429024"/>
+            <a:ext cx="2685752" cy="822871"/>
+          </a:xfrm>
+          <a:prstGeom prst="rect">
+            <a:avLst/>
+          </a:prstGeom>
+          <a:noFill/>
+          <a:ln>
+            <a:noFill/>
+          </a:ln>
+        </p:spPr>
+        <p:txBody>
+          <a:bodyPr wrap="square" lIns="0" tIns="0" rIns="0" bIns="0" anchor="t">
+            <a:normAutofit/>
+          </a:bodyPr>
+          <a:lstStyle/>
           <a:p>
             <a:pPr algn="l">
               <a:lnSpc>
-                <a:spcPts val="3960"/>
-              </a:lnSpc>
-            </a:pPr>
-            <a:r>
-              <a:rPr sz="3300" b="1">
+                <a:spcPts val="6480"/>
+              </a:lnSpc>
+            </a:pPr>
+            <a:r>
+              <a:rPr sz="5400" b="1">
                 <a:solidFill>
                   <a:schemeClr val="accent4"/>
                 </a:solidFill>
@@ -1862,16 +1998,42 @@
               <a:t>12분</a:t>
             </a:r>
           </a:p>
+        </p:txBody>
+      </p:sp>
+      <p:sp>
+        <p:nvSpPr>
+          <p:cNvPr id="13" name="text s1.1.2.0.1"/>
+          <p:cNvSpPr txBox="1"/>
+          <p:nvPr/>
+        </p:nvSpPr>
+        <p:spPr>
+          <a:xfrm>
+            <a:off x="8486924" y="3309045"/>
+            <a:ext cx="2685752" cy="342900"/>
+          </a:xfrm>
+          <a:prstGeom prst="rect">
+            <a:avLst/>
+          </a:prstGeom>
+          <a:noFill/>
+          <a:ln>
+            <a:noFill/>
+          </a:ln>
+        </p:spPr>
+        <p:txBody>
+          <a:bodyPr wrap="square" lIns="0" tIns="0" rIns="0" bIns="0" anchor="t">
+            <a:normAutofit/>
+          </a:bodyPr>
+          <a:lstStyle/>
           <a:p>
             <a:pPr algn="l">
               <a:lnSpc>
-                <a:spcPts val="1890"/>
-              </a:lnSpc>
-            </a:pPr>
-            <a:r>
-              <a:rPr sz="1350" b="0">
-                <a:solidFill>
-                  <a:schemeClr val="tx2"/>
+                <a:spcPts val="2700"/>
+              </a:lnSpc>
+            </a:pPr>
+            <a:r>
+              <a:rPr sz="1800" b="0">
+                <a:solidFill>
+                  <a:schemeClr val="tx1"/>
                 </a:solidFill>
                 <a:latin typeface="+mn-lt"/>
                 <a:ea typeface="+mn-ea"/>
@@ -1883,14 +2045,14 @@
       </p:sp>
       <p:sp>
         <p:nvSpPr>
-          <p:cNvPr id="6" name="p s1.2"/>
-          <p:cNvSpPr txBox="1"/>
-          <p:nvPr/>
-        </p:nvSpPr>
-        <p:spPr>
-          <a:xfrm>
-            <a:off x="609600" y="5562600"/>
-            <a:ext cx="10972800" cy="685800"/>
+          <p:cNvPr id="14" name="text s1.1.2.0.2"/>
+          <p:cNvSpPr txBox="1"/>
+          <p:nvPr/>
+        </p:nvSpPr>
+        <p:spPr>
+          <a:xfrm>
+            <a:off x="8486924" y="3709095"/>
+            <a:ext cx="2685752" cy="239911"/>
           </a:xfrm>
           <a:prstGeom prst="rect">
             <a:avLst/>
@@ -1908,38 +2070,210 @@
           <a:p>
             <a:pPr algn="l">
               <a:lnSpc>
-                <a:spcPts val="2700"/>
-              </a:lnSpc>
-            </a:pPr>
-            <a:r>
-              <a:rPr sz="1800" b="0">
-                <a:solidFill>
-                  <a:schemeClr val="tx1"/>
+                <a:spcPts val="1890"/>
+              </a:lnSpc>
+            </a:pPr>
+            <a:r>
+              <a:rPr sz="1350" b="0">
+                <a:solidFill>
+                  <a:schemeClr val="tx2"/>
                 </a:solidFill>
                 <a:latin typeface="+mn-lt"/>
                 <a:ea typeface="+mn-ea"/>
               </a:rPr>
-              <a:t>결제 캐시 키 하나가 동시에 만료되면서 DB로 요청이 쏟아졌다. 읽기 풀이 고갈되고 결제 API가 5xx를 반환했다. 롤백이 아니라 </a:t>
-            </a:r>
-            <a:r>
-              <a:rPr sz="1800" b="1" i="0" u="none">
+              <a:t>경보가 5분 평균이었다</a:t>
+            </a:r>
+          </a:p>
+        </p:txBody>
+      </p:sp>
+      <p:sp>
+        <p:nvSpPr>
+          <p:cNvPr id="15" name="text s1.2.0.0"/>
+          <p:cNvSpPr txBox="1"/>
+          <p:nvPr/>
+        </p:nvSpPr>
+        <p:spPr>
+          <a:xfrm>
+            <a:off x="609600" y="5322689"/>
+            <a:ext cx="5314950" cy="297061"/>
+          </a:xfrm>
+          <a:prstGeom prst="rect">
+            <a:avLst/>
+          </a:prstGeom>
+          <a:noFill/>
+          <a:ln>
+            <a:noFill/>
+          </a:ln>
+        </p:spPr>
+        <p:txBody>
+          <a:bodyPr wrap="square" lIns="0" tIns="0" rIns="0" bIns="0" anchor="t">
+            <a:normAutofit/>
+          </a:bodyPr>
+          <a:lstStyle/>
+          <a:p>
+            <a:pPr algn="l">
+              <a:lnSpc>
+                <a:spcPts val="2340"/>
+              </a:lnSpc>
+            </a:pPr>
+            <a:r>
+              <a:rPr sz="1800" b="1">
+                <a:solidFill>
+                  <a:schemeClr val="tx1"/>
+                </a:solidFill>
+                <a:latin typeface="+mj-lt"/>
+                <a:ea typeface="+mj-ea"/>
+              </a:rPr>
+              <a:t>무슨 일</a:t>
+            </a:r>
+          </a:p>
+        </p:txBody>
+      </p:sp>
+      <p:sp>
+        <p:nvSpPr>
+          <p:cNvPr id="16" name="p s1.2.0.1"/>
+          <p:cNvSpPr txBox="1"/>
+          <p:nvPr/>
+        </p:nvSpPr>
+        <p:spPr>
+          <a:xfrm>
+            <a:off x="609600" y="5676900"/>
+            <a:ext cx="5314950" cy="571500"/>
+          </a:xfrm>
+          <a:prstGeom prst="rect">
+            <a:avLst/>
+          </a:prstGeom>
+          <a:noFill/>
+          <a:ln>
+            <a:noFill/>
+          </a:ln>
+        </p:spPr>
+        <p:txBody>
+          <a:bodyPr wrap="square" lIns="0" tIns="0" rIns="0" bIns="0" anchor="t">
+            <a:normAutofit/>
+          </a:bodyPr>
+          <a:lstStyle/>
+          <a:p>
+            <a:pPr algn="l">
+              <a:lnSpc>
+                <a:spcPts val="2250"/>
+              </a:lnSpc>
+            </a:pPr>
+            <a:r>
+              <a:rPr sz="1500" b="0">
                 <a:solidFill>
                   <a:schemeClr val="tx1"/>
                 </a:solidFill>
                 <a:latin typeface="+mn-lt"/>
                 <a:ea typeface="+mn-ea"/>
               </a:rPr>
-              <a:t>부하 차단</a:t>
-            </a:r>
-            <a:r>
-              <a:rPr sz="1800" b="0">
+              <a:t>결제 캐시 키 12만 개가 같은 초에 만료되면서 DB로 요청이 쏟아졌다. 읽기 풀이 고갈되고 결제 API가 5xx를 반환했다.</a:t>
+            </a:r>
+          </a:p>
+        </p:txBody>
+      </p:sp>
+      <p:sp>
+        <p:nvSpPr>
+          <p:cNvPr id="17" name="text s1.2.1.0"/>
+          <p:cNvSpPr txBox="1"/>
+          <p:nvPr/>
+        </p:nvSpPr>
+        <p:spPr>
+          <a:xfrm>
+            <a:off x="6267450" y="5322689"/>
+            <a:ext cx="5314950" cy="297061"/>
+          </a:xfrm>
+          <a:prstGeom prst="rect">
+            <a:avLst/>
+          </a:prstGeom>
+          <a:noFill/>
+          <a:ln>
+            <a:noFill/>
+          </a:ln>
+        </p:spPr>
+        <p:txBody>
+          <a:bodyPr wrap="square" lIns="0" tIns="0" rIns="0" bIns="0" anchor="t">
+            <a:normAutofit/>
+          </a:bodyPr>
+          <a:lstStyle/>
+          <a:p>
+            <a:pPr algn="l">
+              <a:lnSpc>
+                <a:spcPts val="2340"/>
+              </a:lnSpc>
+            </a:pPr>
+            <a:r>
+              <a:rPr sz="1800" b="1">
+                <a:solidFill>
+                  <a:schemeClr val="accent3"/>
+                </a:solidFill>
+                <a:latin typeface="+mj-lt"/>
+                <a:ea typeface="+mj-ea"/>
+              </a:rPr>
+              <a:t>어떻게 멈췄나</a:t>
+            </a:r>
+          </a:p>
+        </p:txBody>
+      </p:sp>
+      <p:sp>
+        <p:nvSpPr>
+          <p:cNvPr id="18" name="p s1.2.1.1"/>
+          <p:cNvSpPr txBox="1"/>
+          <p:nvPr/>
+        </p:nvSpPr>
+        <p:spPr>
+          <a:xfrm>
+            <a:off x="6267450" y="5676900"/>
+            <a:ext cx="5314950" cy="571500"/>
+          </a:xfrm>
+          <a:prstGeom prst="rect">
+            <a:avLst/>
+          </a:prstGeom>
+          <a:noFill/>
+          <a:ln>
+            <a:noFill/>
+          </a:ln>
+        </p:spPr>
+        <p:txBody>
+          <a:bodyPr wrap="square" lIns="0" tIns="0" rIns="0" bIns="0" anchor="t">
+            <a:normAutofit/>
+          </a:bodyPr>
+          <a:lstStyle/>
+          <a:p>
+            <a:pPr algn="l">
+              <a:lnSpc>
+                <a:spcPts val="2250"/>
+              </a:lnSpc>
+            </a:pPr>
+            <a:r>
+              <a:rPr sz="1500" b="0">
                 <a:solidFill>
                   <a:schemeClr val="tx1"/>
                 </a:solidFill>
                 <a:latin typeface="+mn-lt"/>
                 <a:ea typeface="+mn-ea"/>
               </a:rPr>
-              <a:t>으로 멈췄다.</a:t>
+              <a:t>롤백이 아니라 </a:t>
+            </a:r>
+            <a:r>
+              <a:rPr sz="1500" b="1" i="0" u="none">
+                <a:solidFill>
+                  <a:schemeClr val="tx1"/>
+                </a:solidFill>
+                <a:latin typeface="+mn-lt"/>
+                <a:ea typeface="+mn-ea"/>
+              </a:rPr>
+              <a:t>부하 차단</a:t>
+            </a:r>
+            <a:r>
+              <a:rPr sz="1500" b="0">
+                <a:solidFill>
+                  <a:schemeClr val="tx1"/>
+                </a:solidFill>
+                <a:latin typeface="+mn-lt"/>
+                <a:ea typeface="+mn-ea"/>
+              </a:rPr>
+              <a:t>으로 멈췄다. 캐시가 다시 차자 14:49에 오류율이 평시로 돌아왔다.</a:t>
             </a:r>
           </a:p>
         </p:txBody>
@@ -2020,12 +2354,12 @@
         </p:nvSpPr>
         <p:spPr>
           <a:xfrm>
-            <a:off x="609600" y="2922389"/>
-            <a:ext cx="2103090" cy="533400"/>
+            <a:off x="609600" y="1283940"/>
+            <a:ext cx="2103090" cy="609600"/>
           </a:xfrm>
           <a:prstGeom prst="chevron">
             <a:avLst>
-              <a:gd name="adj" fmla="val 197140"/>
+              <a:gd name="adj" fmla="val 172498"/>
             </a:avLst>
           </a:prstGeom>
           <a:solidFill>
@@ -2048,104 +2382,178 @@
       </p:sp>
       <p:sp>
         <p:nvSpPr>
-          <p:cNvPr id="4" name="text s2.1.0.1"/>
-          <p:cNvSpPr txBox="1"/>
-          <p:nvPr/>
-        </p:nvSpPr>
-        <p:spPr>
-          <a:xfrm>
-            <a:off x="609600" y="3570089"/>
-            <a:ext cx="2103090" cy="242888"/>
-          </a:xfrm>
-          <a:prstGeom prst="rect">
-            <a:avLst/>
-          </a:prstGeom>
-          <a:noFill/>
-          <a:ln>
-            <a:noFill/>
-          </a:ln>
-        </p:spPr>
-        <p:txBody>
-          <a:bodyPr wrap="square" lIns="0" tIns="0" rIns="0" bIns="0" anchor="t">
-            <a:normAutofit/>
-          </a:bodyPr>
-          <a:lstStyle/>
-          <a:p>
-            <a:pPr algn="ctr">
-              <a:lnSpc>
-                <a:spcPts val="1913"/>
-              </a:lnSpc>
-            </a:pPr>
-            <a:r>
-              <a:rPr sz="1275" b="0">
+          <p:cNvPr id="4" name="shape s2.1.0.1"/>
+          <p:cNvSpPr/>
+          <p:nvPr/>
+        </p:nvSpPr>
+        <p:spPr>
+          <a:xfrm>
+            <a:off x="609600" y="2007840"/>
+            <a:ext cx="2103090" cy="3373785"/>
+          </a:xfrm>
+          <a:prstGeom prst="roundRect">
+            <a:avLst>
+              <a:gd name="adj" fmla="val 5435"/>
+            </a:avLst>
+          </a:prstGeom>
+          <a:solidFill>
+            <a:schemeClr val="bg2"/>
+          </a:solidFill>
+          <a:ln>
+            <a:noFill/>
+          </a:ln>
+        </p:spPr>
+        <p:txBody>
+          <a:bodyPr wrap="square" lIns="228600" tIns="228600" rIns="228600" bIns="228600" anchor="t">
+            <a:normAutofit/>
+          </a:bodyPr>
+          <a:lstStyle/>
+          <a:p/>
+        </p:txBody>
+      </p:sp>
+      <p:sp>
+        <p:nvSpPr>
+          <p:cNvPr id="5" name="text s2.1.0.1.0.0.0"/>
+          <p:cNvSpPr txBox="1"/>
+          <p:nvPr/>
+        </p:nvSpPr>
+        <p:spPr>
+          <a:xfrm>
+            <a:off x="871538" y="2269778"/>
+            <a:ext cx="1579215" cy="502890"/>
+          </a:xfrm>
+          <a:prstGeom prst="rect">
+            <a:avLst/>
+          </a:prstGeom>
+          <a:noFill/>
+          <a:ln>
+            <a:noFill/>
+          </a:ln>
+        </p:spPr>
+        <p:txBody>
+          <a:bodyPr wrap="square" lIns="0" tIns="0" rIns="0" bIns="0" anchor="t">
+            <a:normAutofit/>
+          </a:bodyPr>
+          <a:lstStyle/>
+          <a:p>
+            <a:pPr algn="l">
+              <a:lnSpc>
+                <a:spcPts val="3960"/>
+              </a:lnSpc>
+            </a:pPr>
+            <a:r>
+              <a:rPr sz="3300" b="1">
                 <a:solidFill>
                   <a:schemeClr val="tx1"/>
+                </a:solidFill>
+                <a:latin typeface="+mj-lt"/>
+                <a:ea typeface="+mj-ea"/>
+              </a:rPr>
+              <a:t>14:02</a:t>
+            </a:r>
+          </a:p>
+        </p:txBody>
+      </p:sp>
+      <p:sp>
+        <p:nvSpPr>
+          <p:cNvPr id="6" name="text s2.1.0.1.0.0.1"/>
+          <p:cNvSpPr txBox="1"/>
+          <p:nvPr/>
+        </p:nvSpPr>
+        <p:spPr>
+          <a:xfrm>
+            <a:off x="871538" y="2829818"/>
+            <a:ext cx="1579215" cy="297061"/>
+          </a:xfrm>
+          <a:prstGeom prst="rect">
+            <a:avLst/>
+          </a:prstGeom>
+          <a:noFill/>
+          <a:ln>
+            <a:noFill/>
+          </a:ln>
+        </p:spPr>
+        <p:txBody>
+          <a:bodyPr wrap="square" lIns="0" tIns="0" rIns="0" bIns="0" anchor="t">
+            <a:normAutofit/>
+          </a:bodyPr>
+          <a:lstStyle/>
+          <a:p>
+            <a:pPr algn="l">
+              <a:lnSpc>
+                <a:spcPts val="2340"/>
+              </a:lnSpc>
+            </a:pPr>
+            <a:r>
+              <a:rPr sz="1800" b="1">
+                <a:solidFill>
+                  <a:schemeClr val="tx1"/>
+                </a:solidFill>
+                <a:latin typeface="+mj-lt"/>
+                <a:ea typeface="+mj-ea"/>
+              </a:rPr>
+              <a:t>키 동시 만료</a:t>
+            </a:r>
+          </a:p>
+        </p:txBody>
+      </p:sp>
+      <p:sp>
+        <p:nvSpPr>
+          <p:cNvPr id="7" name="text s2.1.0.1.0.1"/>
+          <p:cNvSpPr txBox="1"/>
+          <p:nvPr/>
+        </p:nvSpPr>
+        <p:spPr>
+          <a:xfrm>
+            <a:off x="871538" y="4548188"/>
+            <a:ext cx="1579215" cy="571500"/>
+          </a:xfrm>
+          <a:prstGeom prst="rect">
+            <a:avLst/>
+          </a:prstGeom>
+          <a:noFill/>
+          <a:ln>
+            <a:noFill/>
+          </a:ln>
+        </p:spPr>
+        <p:txBody>
+          <a:bodyPr wrap="square" lIns="0" tIns="0" rIns="0" bIns="0" anchor="t">
+            <a:normAutofit/>
+          </a:bodyPr>
+          <a:lstStyle/>
+          <a:p>
+            <a:pPr algn="l">
+              <a:lnSpc>
+                <a:spcPts val="2250"/>
+              </a:lnSpc>
+            </a:pPr>
+            <a:r>
+              <a:rPr sz="1500" b="0">
+                <a:solidFill>
+                  <a:schemeClr val="tx2"/>
                 </a:solidFill>
                 <a:latin typeface="+mn-lt"/>
                 <a:ea typeface="+mn-ea"/>
               </a:rPr>
-              <a:t>14:02</a:t>
-            </a:r>
-          </a:p>
-        </p:txBody>
-      </p:sp>
-      <p:sp>
-        <p:nvSpPr>
-          <p:cNvPr id="5" name="text s2.1.0.2"/>
-          <p:cNvSpPr txBox="1"/>
-          <p:nvPr/>
-        </p:nvSpPr>
-        <p:spPr>
-          <a:xfrm>
-            <a:off x="609600" y="3927277"/>
-            <a:ext cx="2103090" cy="214313"/>
-          </a:xfrm>
-          <a:prstGeom prst="rect">
-            <a:avLst/>
-          </a:prstGeom>
-          <a:noFill/>
-          <a:ln>
-            <a:noFill/>
-          </a:ln>
-        </p:spPr>
-        <p:txBody>
-          <a:bodyPr wrap="square" lIns="0" tIns="0" rIns="0" bIns="0" anchor="t">
-            <a:normAutofit/>
-          </a:bodyPr>
-          <a:lstStyle/>
-          <a:p>
-            <a:pPr algn="ctr">
-              <a:lnSpc>
-                <a:spcPts val="1688"/>
-              </a:lnSpc>
-            </a:pPr>
-            <a:r>
-              <a:rPr sz="1125" b="0">
-                <a:solidFill>
-                  <a:schemeClr val="tx2"/>
-                </a:solidFill>
-                <a:latin typeface="+mn-lt"/>
-                <a:ea typeface="+mn-ea"/>
-              </a:rPr>
-              <a:t>키 동시 만료</a:t>
-            </a:r>
-          </a:p>
-        </p:txBody>
-      </p:sp>
-      <p:sp>
-        <p:nvSpPr>
-          <p:cNvPr id="6" name="shape s2.1.1.0"/>
+              <a:t>배포 예열 30분 뒤, 12만 키가 같은 초에</a:t>
+            </a:r>
+          </a:p>
+        </p:txBody>
+      </p:sp>
+      <p:sp>
+        <p:nvSpPr>
+          <p:cNvPr id="8" name="shape s2.1.1.0"/>
           <p:cNvSpPr/>
           <p:nvPr/>
         </p:nvSpPr>
         <p:spPr>
           <a:xfrm>
-            <a:off x="2826990" y="2922389"/>
-            <a:ext cx="2103090" cy="533400"/>
+            <a:off x="2826990" y="1283940"/>
+            <a:ext cx="2103090" cy="609600"/>
           </a:xfrm>
           <a:prstGeom prst="chevron">
             <a:avLst>
-              <a:gd name="adj" fmla="val 197140"/>
+              <a:gd name="adj" fmla="val 172498"/>
             </a:avLst>
           </a:prstGeom>
           <a:solidFill>
@@ -2168,104 +2576,178 @@
       </p:sp>
       <p:sp>
         <p:nvSpPr>
-          <p:cNvPr id="7" name="text s2.1.1.1"/>
-          <p:cNvSpPr txBox="1"/>
-          <p:nvPr/>
-        </p:nvSpPr>
-        <p:spPr>
-          <a:xfrm>
-            <a:off x="2826990" y="3570089"/>
-            <a:ext cx="2103090" cy="242888"/>
-          </a:xfrm>
-          <a:prstGeom prst="rect">
-            <a:avLst/>
-          </a:prstGeom>
-          <a:noFill/>
-          <a:ln>
-            <a:noFill/>
-          </a:ln>
-        </p:spPr>
-        <p:txBody>
-          <a:bodyPr wrap="square" lIns="0" tIns="0" rIns="0" bIns="0" anchor="t">
-            <a:normAutofit/>
-          </a:bodyPr>
-          <a:lstStyle/>
-          <a:p>
-            <a:pPr algn="ctr">
-              <a:lnSpc>
-                <a:spcPts val="1913"/>
-              </a:lnSpc>
-            </a:pPr>
-            <a:r>
-              <a:rPr sz="1275" b="0">
+          <p:cNvPr id="9" name="shape s2.1.1.1"/>
+          <p:cNvSpPr/>
+          <p:nvPr/>
+        </p:nvSpPr>
+        <p:spPr>
+          <a:xfrm>
+            <a:off x="2826990" y="2007840"/>
+            <a:ext cx="2103090" cy="3373785"/>
+          </a:xfrm>
+          <a:prstGeom prst="roundRect">
+            <a:avLst>
+              <a:gd name="adj" fmla="val 5435"/>
+            </a:avLst>
+          </a:prstGeom>
+          <a:solidFill>
+            <a:schemeClr val="bg2"/>
+          </a:solidFill>
+          <a:ln>
+            <a:noFill/>
+          </a:ln>
+        </p:spPr>
+        <p:txBody>
+          <a:bodyPr wrap="square" lIns="228600" tIns="228600" rIns="228600" bIns="228600" anchor="t">
+            <a:normAutofit/>
+          </a:bodyPr>
+          <a:lstStyle/>
+          <a:p/>
+        </p:txBody>
+      </p:sp>
+      <p:sp>
+        <p:nvSpPr>
+          <p:cNvPr id="10" name="text s2.1.1.1.0.0.0"/>
+          <p:cNvSpPr txBox="1"/>
+          <p:nvPr/>
+        </p:nvSpPr>
+        <p:spPr>
+          <a:xfrm>
+            <a:off x="3088928" y="2269778"/>
+            <a:ext cx="1579215" cy="502890"/>
+          </a:xfrm>
+          <a:prstGeom prst="rect">
+            <a:avLst/>
+          </a:prstGeom>
+          <a:noFill/>
+          <a:ln>
+            <a:noFill/>
+          </a:ln>
+        </p:spPr>
+        <p:txBody>
+          <a:bodyPr wrap="square" lIns="0" tIns="0" rIns="0" bIns="0" anchor="t">
+            <a:normAutofit/>
+          </a:bodyPr>
+          <a:lstStyle/>
+          <a:p>
+            <a:pPr algn="l">
+              <a:lnSpc>
+                <a:spcPts val="3960"/>
+              </a:lnSpc>
+            </a:pPr>
+            <a:r>
+              <a:rPr sz="3300" b="1">
                 <a:solidFill>
                   <a:schemeClr val="tx1"/>
+                </a:solidFill>
+                <a:latin typeface="+mj-lt"/>
+                <a:ea typeface="+mj-ea"/>
+              </a:rPr>
+              <a:t>14:14</a:t>
+            </a:r>
+          </a:p>
+        </p:txBody>
+      </p:sp>
+      <p:sp>
+        <p:nvSpPr>
+          <p:cNvPr id="11" name="text s2.1.1.1.0.0.1"/>
+          <p:cNvSpPr txBox="1"/>
+          <p:nvPr/>
+        </p:nvSpPr>
+        <p:spPr>
+          <a:xfrm>
+            <a:off x="3088928" y="2829818"/>
+            <a:ext cx="1579215" cy="297061"/>
+          </a:xfrm>
+          <a:prstGeom prst="rect">
+            <a:avLst/>
+          </a:prstGeom>
+          <a:noFill/>
+          <a:ln>
+            <a:noFill/>
+          </a:ln>
+        </p:spPr>
+        <p:txBody>
+          <a:bodyPr wrap="square" lIns="0" tIns="0" rIns="0" bIns="0" anchor="t">
+            <a:normAutofit/>
+          </a:bodyPr>
+          <a:lstStyle/>
+          <a:p>
+            <a:pPr algn="l">
+              <a:lnSpc>
+                <a:spcPts val="2340"/>
+              </a:lnSpc>
+            </a:pPr>
+            <a:r>
+              <a:rPr sz="1800" b="1">
+                <a:solidFill>
+                  <a:schemeClr val="tx1"/>
+                </a:solidFill>
+                <a:latin typeface="+mj-lt"/>
+                <a:ea typeface="+mj-ea"/>
+              </a:rPr>
+              <a:t>5xx 경보</a:t>
+            </a:r>
+          </a:p>
+        </p:txBody>
+      </p:sp>
+      <p:sp>
+        <p:nvSpPr>
+          <p:cNvPr id="12" name="text s2.1.1.1.0.1"/>
+          <p:cNvSpPr txBox="1"/>
+          <p:nvPr/>
+        </p:nvSpPr>
+        <p:spPr>
+          <a:xfrm>
+            <a:off x="3088928" y="4548188"/>
+            <a:ext cx="1579215" cy="571500"/>
+          </a:xfrm>
+          <a:prstGeom prst="rect">
+            <a:avLst/>
+          </a:prstGeom>
+          <a:noFill/>
+          <a:ln>
+            <a:noFill/>
+          </a:ln>
+        </p:spPr>
+        <p:txBody>
+          <a:bodyPr wrap="square" lIns="0" tIns="0" rIns="0" bIns="0" anchor="t">
+            <a:normAutofit/>
+          </a:bodyPr>
+          <a:lstStyle/>
+          <a:p>
+            <a:pPr algn="l">
+              <a:lnSpc>
+                <a:spcPts val="2250"/>
+              </a:lnSpc>
+            </a:pPr>
+            <a:r>
+              <a:rPr sz="1500" b="0">
+                <a:solidFill>
+                  <a:schemeClr val="tx2"/>
                 </a:solidFill>
                 <a:latin typeface="+mn-lt"/>
                 <a:ea typeface="+mn-ea"/>
               </a:rPr>
-              <a:t>14:14</a:t>
-            </a:r>
-          </a:p>
-        </p:txBody>
-      </p:sp>
-      <p:sp>
-        <p:nvSpPr>
-          <p:cNvPr id="8" name="text s2.1.1.2"/>
-          <p:cNvSpPr txBox="1"/>
-          <p:nvPr/>
-        </p:nvSpPr>
-        <p:spPr>
-          <a:xfrm>
-            <a:off x="2826990" y="3927277"/>
-            <a:ext cx="2103090" cy="214313"/>
-          </a:xfrm>
-          <a:prstGeom prst="rect">
-            <a:avLst/>
-          </a:prstGeom>
-          <a:noFill/>
-          <a:ln>
-            <a:noFill/>
-          </a:ln>
-        </p:spPr>
-        <p:txBody>
-          <a:bodyPr wrap="square" lIns="0" tIns="0" rIns="0" bIns="0" anchor="t">
-            <a:normAutofit/>
-          </a:bodyPr>
-          <a:lstStyle/>
-          <a:p>
-            <a:pPr algn="ctr">
-              <a:lnSpc>
-                <a:spcPts val="1688"/>
-              </a:lnSpc>
-            </a:pPr>
-            <a:r>
-              <a:rPr sz="1125" b="0">
-                <a:solidFill>
-                  <a:schemeClr val="tx2"/>
-                </a:solidFill>
-                <a:latin typeface="+mn-lt"/>
-                <a:ea typeface="+mn-ea"/>
-              </a:rPr>
-              <a:t>5xx 경보</a:t>
-            </a:r>
-          </a:p>
-        </p:txBody>
-      </p:sp>
-      <p:sp>
-        <p:nvSpPr>
-          <p:cNvPr id="9" name="shape s2.1.2.0"/>
+              <a:t>5분 평균 임계값이 12분 늦게 울렸다</a:t>
+            </a:r>
+          </a:p>
+        </p:txBody>
+      </p:sp>
+      <p:sp>
+        <p:nvSpPr>
+          <p:cNvPr id="13" name="shape s2.1.2.0"/>
           <p:cNvSpPr/>
           <p:nvPr/>
         </p:nvSpPr>
         <p:spPr>
           <a:xfrm>
-            <a:off x="5044380" y="2922389"/>
-            <a:ext cx="2103090" cy="533400"/>
+            <a:off x="5044380" y="1283940"/>
+            <a:ext cx="2103090" cy="609600"/>
           </a:xfrm>
           <a:prstGeom prst="chevron">
             <a:avLst>
-              <a:gd name="adj" fmla="val 197140"/>
+              <a:gd name="adj" fmla="val 172498"/>
             </a:avLst>
           </a:prstGeom>
           <a:solidFill>
@@ -2288,104 +2770,178 @@
       </p:sp>
       <p:sp>
         <p:nvSpPr>
-          <p:cNvPr id="10" name="text s2.1.2.1"/>
-          <p:cNvSpPr txBox="1"/>
-          <p:nvPr/>
-        </p:nvSpPr>
-        <p:spPr>
-          <a:xfrm>
-            <a:off x="5044380" y="3570089"/>
-            <a:ext cx="2103090" cy="242888"/>
-          </a:xfrm>
-          <a:prstGeom prst="rect">
-            <a:avLst/>
-          </a:prstGeom>
-          <a:noFill/>
-          <a:ln>
-            <a:noFill/>
-          </a:ln>
-        </p:spPr>
-        <p:txBody>
-          <a:bodyPr wrap="square" lIns="0" tIns="0" rIns="0" bIns="0" anchor="t">
-            <a:normAutofit/>
-          </a:bodyPr>
-          <a:lstStyle/>
-          <a:p>
-            <a:pPr algn="ctr">
-              <a:lnSpc>
-                <a:spcPts val="1913"/>
-              </a:lnSpc>
-            </a:pPr>
-            <a:r>
-              <a:rPr sz="1275" b="0">
+          <p:cNvPr id="14" name="shape s2.1.2.1"/>
+          <p:cNvSpPr/>
+          <p:nvPr/>
+        </p:nvSpPr>
+        <p:spPr>
+          <a:xfrm>
+            <a:off x="5044380" y="2007840"/>
+            <a:ext cx="2103090" cy="3373785"/>
+          </a:xfrm>
+          <a:prstGeom prst="roundRect">
+            <a:avLst>
+              <a:gd name="adj" fmla="val 5435"/>
+            </a:avLst>
+          </a:prstGeom>
+          <a:solidFill>
+            <a:schemeClr val="bg2"/>
+          </a:solidFill>
+          <a:ln>
+            <a:noFill/>
+          </a:ln>
+        </p:spPr>
+        <p:txBody>
+          <a:bodyPr wrap="square" lIns="228600" tIns="228600" rIns="228600" bIns="228600" anchor="t">
+            <a:normAutofit/>
+          </a:bodyPr>
+          <a:lstStyle/>
+          <a:p/>
+        </p:txBody>
+      </p:sp>
+      <p:sp>
+        <p:nvSpPr>
+          <p:cNvPr id="15" name="text s2.1.2.1.0.0.0"/>
+          <p:cNvSpPr txBox="1"/>
+          <p:nvPr/>
+        </p:nvSpPr>
+        <p:spPr>
+          <a:xfrm>
+            <a:off x="5306318" y="2269778"/>
+            <a:ext cx="1579215" cy="502890"/>
+          </a:xfrm>
+          <a:prstGeom prst="rect">
+            <a:avLst/>
+          </a:prstGeom>
+          <a:noFill/>
+          <a:ln>
+            <a:noFill/>
+          </a:ln>
+        </p:spPr>
+        <p:txBody>
+          <a:bodyPr wrap="square" lIns="0" tIns="0" rIns="0" bIns="0" anchor="t">
+            <a:normAutofit/>
+          </a:bodyPr>
+          <a:lstStyle/>
+          <a:p>
+            <a:pPr algn="l">
+              <a:lnSpc>
+                <a:spcPts val="3960"/>
+              </a:lnSpc>
+            </a:pPr>
+            <a:r>
+              <a:rPr sz="3300" b="1">
                 <a:solidFill>
                   <a:schemeClr val="tx1"/>
+                </a:solidFill>
+                <a:latin typeface="+mj-lt"/>
+                <a:ea typeface="+mj-ea"/>
+              </a:rPr>
+              <a:t>14:23</a:t>
+            </a:r>
+          </a:p>
+        </p:txBody>
+      </p:sp>
+      <p:sp>
+        <p:nvSpPr>
+          <p:cNvPr id="16" name="text s2.1.2.1.0.0.1"/>
+          <p:cNvSpPr txBox="1"/>
+          <p:nvPr/>
+        </p:nvSpPr>
+        <p:spPr>
+          <a:xfrm>
+            <a:off x="5306318" y="2829818"/>
+            <a:ext cx="1579215" cy="297061"/>
+          </a:xfrm>
+          <a:prstGeom prst="rect">
+            <a:avLst/>
+          </a:prstGeom>
+          <a:noFill/>
+          <a:ln>
+            <a:noFill/>
+          </a:ln>
+        </p:spPr>
+        <p:txBody>
+          <a:bodyPr wrap="square" lIns="0" tIns="0" rIns="0" bIns="0" anchor="t">
+            <a:normAutofit/>
+          </a:bodyPr>
+          <a:lstStyle/>
+          <a:p>
+            <a:pPr algn="l">
+              <a:lnSpc>
+                <a:spcPts val="2340"/>
+              </a:lnSpc>
+            </a:pPr>
+            <a:r>
+              <a:rPr sz="1800" b="1">
+                <a:solidFill>
+                  <a:schemeClr val="tx1"/>
+                </a:solidFill>
+                <a:latin typeface="+mj-lt"/>
+                <a:ea typeface="+mj-ea"/>
+              </a:rPr>
+              <a:t>DB 풀 고갈 확인</a:t>
+            </a:r>
+          </a:p>
+        </p:txBody>
+      </p:sp>
+      <p:sp>
+        <p:nvSpPr>
+          <p:cNvPr id="17" name="text s2.1.2.1.0.1"/>
+          <p:cNvSpPr txBox="1"/>
+          <p:nvPr/>
+        </p:nvSpPr>
+        <p:spPr>
+          <a:xfrm>
+            <a:off x="5306318" y="4548188"/>
+            <a:ext cx="1579215" cy="571500"/>
+          </a:xfrm>
+          <a:prstGeom prst="rect">
+            <a:avLst/>
+          </a:prstGeom>
+          <a:noFill/>
+          <a:ln>
+            <a:noFill/>
+          </a:ln>
+        </p:spPr>
+        <p:txBody>
+          <a:bodyPr wrap="square" lIns="0" tIns="0" rIns="0" bIns="0" anchor="t">
+            <a:normAutofit/>
+          </a:bodyPr>
+          <a:lstStyle/>
+          <a:p>
+            <a:pPr algn="l">
+              <a:lnSpc>
+                <a:spcPts val="2250"/>
+              </a:lnSpc>
+            </a:pPr>
+            <a:r>
+              <a:rPr sz="1500" b="0">
+                <a:solidFill>
+                  <a:schemeClr val="tx2"/>
                 </a:solidFill>
                 <a:latin typeface="+mn-lt"/>
                 <a:ea typeface="+mn-ea"/>
               </a:rPr>
-              <a:t>14:23</a:t>
-            </a:r>
-          </a:p>
-        </p:txBody>
-      </p:sp>
-      <p:sp>
-        <p:nvSpPr>
-          <p:cNvPr id="11" name="text s2.1.2.2"/>
-          <p:cNvSpPr txBox="1"/>
-          <p:nvPr/>
-        </p:nvSpPr>
-        <p:spPr>
-          <a:xfrm>
-            <a:off x="5044380" y="3927277"/>
-            <a:ext cx="2103090" cy="214313"/>
-          </a:xfrm>
-          <a:prstGeom prst="rect">
-            <a:avLst/>
-          </a:prstGeom>
-          <a:noFill/>
-          <a:ln>
-            <a:noFill/>
-          </a:ln>
-        </p:spPr>
-        <p:txBody>
-          <a:bodyPr wrap="square" lIns="0" tIns="0" rIns="0" bIns="0" anchor="t">
-            <a:normAutofit/>
-          </a:bodyPr>
-          <a:lstStyle/>
-          <a:p>
-            <a:pPr algn="ctr">
-              <a:lnSpc>
-                <a:spcPts val="1688"/>
-              </a:lnSpc>
-            </a:pPr>
-            <a:r>
-              <a:rPr sz="1125" b="0">
-                <a:solidFill>
-                  <a:schemeClr val="tx2"/>
-                </a:solidFill>
-                <a:latin typeface="+mn-lt"/>
-                <a:ea typeface="+mn-ea"/>
-              </a:rPr>
-              <a:t>DB 풀 고갈 확인</a:t>
-            </a:r>
-          </a:p>
-        </p:txBody>
-      </p:sp>
-      <p:sp>
-        <p:nvSpPr>
-          <p:cNvPr id="12" name="shape s2.1.3.0"/>
+              <a:t>읽기 풀 40/40, 대기열 1,900</a:t>
+            </a:r>
+          </a:p>
+        </p:txBody>
+      </p:sp>
+      <p:sp>
+        <p:nvSpPr>
+          <p:cNvPr id="18" name="shape s2.1.3.0"/>
           <p:cNvSpPr/>
           <p:nvPr/>
         </p:nvSpPr>
         <p:spPr>
           <a:xfrm>
-            <a:off x="7261771" y="2922389"/>
-            <a:ext cx="2103090" cy="533400"/>
+            <a:off x="7261771" y="1283940"/>
+            <a:ext cx="2103090" cy="609600"/>
           </a:xfrm>
           <a:prstGeom prst="chevron">
             <a:avLst>
-              <a:gd name="adj" fmla="val 197140"/>
+              <a:gd name="adj" fmla="val 172498"/>
             </a:avLst>
           </a:prstGeom>
           <a:solidFill>
@@ -2408,104 +2964,178 @@
       </p:sp>
       <p:sp>
         <p:nvSpPr>
-          <p:cNvPr id="13" name="text s2.1.3.1"/>
-          <p:cNvSpPr txBox="1"/>
-          <p:nvPr/>
-        </p:nvSpPr>
-        <p:spPr>
-          <a:xfrm>
-            <a:off x="7261771" y="3570089"/>
-            <a:ext cx="2103090" cy="242888"/>
-          </a:xfrm>
-          <a:prstGeom prst="rect">
-            <a:avLst/>
-          </a:prstGeom>
-          <a:noFill/>
-          <a:ln>
-            <a:noFill/>
-          </a:ln>
-        </p:spPr>
-        <p:txBody>
-          <a:bodyPr wrap="square" lIns="0" tIns="0" rIns="0" bIns="0" anchor="t">
-            <a:normAutofit/>
-          </a:bodyPr>
-          <a:lstStyle/>
-          <a:p>
-            <a:pPr algn="ctr">
-              <a:lnSpc>
-                <a:spcPts val="1913"/>
-              </a:lnSpc>
-            </a:pPr>
-            <a:r>
-              <a:rPr sz="1275" b="0">
+          <p:cNvPr id="19" name="shape s2.1.3.1"/>
+          <p:cNvSpPr/>
+          <p:nvPr/>
+        </p:nvSpPr>
+        <p:spPr>
+          <a:xfrm>
+            <a:off x="7261771" y="2007840"/>
+            <a:ext cx="2103090" cy="3373785"/>
+          </a:xfrm>
+          <a:prstGeom prst="roundRect">
+            <a:avLst>
+              <a:gd name="adj" fmla="val 5435"/>
+            </a:avLst>
+          </a:prstGeom>
+          <a:solidFill>
+            <a:schemeClr val="bg2"/>
+          </a:solidFill>
+          <a:ln>
+            <a:noFill/>
+          </a:ln>
+        </p:spPr>
+        <p:txBody>
+          <a:bodyPr wrap="square" lIns="228600" tIns="228600" rIns="228600" bIns="228600" anchor="t">
+            <a:normAutofit/>
+          </a:bodyPr>
+          <a:lstStyle/>
+          <a:p/>
+        </p:txBody>
+      </p:sp>
+      <p:sp>
+        <p:nvSpPr>
+          <p:cNvPr id="20" name="text s2.1.3.1.0.0.0"/>
+          <p:cNvSpPr txBox="1"/>
+          <p:nvPr/>
+        </p:nvSpPr>
+        <p:spPr>
+          <a:xfrm>
+            <a:off x="7523708" y="2269778"/>
+            <a:ext cx="1579215" cy="502890"/>
+          </a:xfrm>
+          <a:prstGeom prst="rect">
+            <a:avLst/>
+          </a:prstGeom>
+          <a:noFill/>
+          <a:ln>
+            <a:noFill/>
+          </a:ln>
+        </p:spPr>
+        <p:txBody>
+          <a:bodyPr wrap="square" lIns="0" tIns="0" rIns="0" bIns="0" anchor="t">
+            <a:normAutofit/>
+          </a:bodyPr>
+          <a:lstStyle/>
+          <a:p>
+            <a:pPr algn="l">
+              <a:lnSpc>
+                <a:spcPts val="3960"/>
+              </a:lnSpc>
+            </a:pPr>
+            <a:r>
+              <a:rPr sz="3300" b="1">
                 <a:solidFill>
                   <a:schemeClr val="tx1"/>
+                </a:solidFill>
+                <a:latin typeface="+mj-lt"/>
+                <a:ea typeface="+mj-ea"/>
+              </a:rPr>
+              <a:t>14:31</a:t>
+            </a:r>
+          </a:p>
+        </p:txBody>
+      </p:sp>
+      <p:sp>
+        <p:nvSpPr>
+          <p:cNvPr id="21" name="text s2.1.3.1.0.0.1"/>
+          <p:cNvSpPr txBox="1"/>
+          <p:nvPr/>
+        </p:nvSpPr>
+        <p:spPr>
+          <a:xfrm>
+            <a:off x="7523708" y="2829818"/>
+            <a:ext cx="1579215" cy="297061"/>
+          </a:xfrm>
+          <a:prstGeom prst="rect">
+            <a:avLst/>
+          </a:prstGeom>
+          <a:noFill/>
+          <a:ln>
+            <a:noFill/>
+          </a:ln>
+        </p:spPr>
+        <p:txBody>
+          <a:bodyPr wrap="square" lIns="0" tIns="0" rIns="0" bIns="0" anchor="t">
+            <a:normAutofit/>
+          </a:bodyPr>
+          <a:lstStyle/>
+          <a:p>
+            <a:pPr algn="l">
+              <a:lnSpc>
+                <a:spcPts val="2340"/>
+              </a:lnSpc>
+            </a:pPr>
+            <a:r>
+              <a:rPr sz="1800" b="1">
+                <a:solidFill>
+                  <a:schemeClr val="tx1"/>
+                </a:solidFill>
+                <a:latin typeface="+mj-lt"/>
+                <a:ea typeface="+mj-ea"/>
+              </a:rPr>
+              <a:t>부하 차단 적용</a:t>
+            </a:r>
+          </a:p>
+        </p:txBody>
+      </p:sp>
+      <p:sp>
+        <p:nvSpPr>
+          <p:cNvPr id="22" name="text s2.1.3.1.0.1"/>
+          <p:cNvSpPr txBox="1"/>
+          <p:nvPr/>
+        </p:nvSpPr>
+        <p:spPr>
+          <a:xfrm>
+            <a:off x="7523708" y="4548188"/>
+            <a:ext cx="1579215" cy="571500"/>
+          </a:xfrm>
+          <a:prstGeom prst="rect">
+            <a:avLst/>
+          </a:prstGeom>
+          <a:noFill/>
+          <a:ln>
+            <a:noFill/>
+          </a:ln>
+        </p:spPr>
+        <p:txBody>
+          <a:bodyPr wrap="square" lIns="0" tIns="0" rIns="0" bIns="0" anchor="t">
+            <a:normAutofit/>
+          </a:bodyPr>
+          <a:lstStyle/>
+          <a:p>
+            <a:pPr algn="l">
+              <a:lnSpc>
+                <a:spcPts val="2250"/>
+              </a:lnSpc>
+            </a:pPr>
+            <a:r>
+              <a:rPr sz="1500" b="0">
+                <a:solidFill>
+                  <a:schemeClr val="tx2"/>
                 </a:solidFill>
                 <a:latin typeface="+mn-lt"/>
                 <a:ea typeface="+mn-ea"/>
               </a:rPr>
-              <a:t>14:31</a:t>
-            </a:r>
-          </a:p>
-        </p:txBody>
-      </p:sp>
-      <p:sp>
-        <p:nvSpPr>
-          <p:cNvPr id="14" name="text s2.1.3.2"/>
-          <p:cNvSpPr txBox="1"/>
-          <p:nvPr/>
-        </p:nvSpPr>
-        <p:spPr>
-          <a:xfrm>
-            <a:off x="7261771" y="3927277"/>
-            <a:ext cx="2103090" cy="214313"/>
-          </a:xfrm>
-          <a:prstGeom prst="rect">
-            <a:avLst/>
-          </a:prstGeom>
-          <a:noFill/>
-          <a:ln>
-            <a:noFill/>
-          </a:ln>
-        </p:spPr>
-        <p:txBody>
-          <a:bodyPr wrap="square" lIns="0" tIns="0" rIns="0" bIns="0" anchor="t">
-            <a:normAutofit/>
-          </a:bodyPr>
-          <a:lstStyle/>
-          <a:p>
-            <a:pPr algn="ctr">
-              <a:lnSpc>
-                <a:spcPts val="1688"/>
-              </a:lnSpc>
-            </a:pPr>
-            <a:r>
-              <a:rPr sz="1125" b="0">
-                <a:solidFill>
-                  <a:schemeClr val="tx2"/>
-                </a:solidFill>
-                <a:latin typeface="+mn-lt"/>
-                <a:ea typeface="+mn-ea"/>
-              </a:rPr>
-              <a:t>부하 차단 적용</a:t>
-            </a:r>
-          </a:p>
-        </p:txBody>
-      </p:sp>
-      <p:sp>
-        <p:nvSpPr>
-          <p:cNvPr id="15" name="shape s2.1.4.0"/>
+              <a:t>결제 외 캐시 미스 경로를 끊었다</a:t>
+            </a:r>
+          </a:p>
+        </p:txBody>
+      </p:sp>
+      <p:sp>
+        <p:nvSpPr>
+          <p:cNvPr id="23" name="shape s2.1.4.0"/>
           <p:cNvSpPr/>
           <p:nvPr/>
         </p:nvSpPr>
         <p:spPr>
           <a:xfrm>
-            <a:off x="9479161" y="2922389"/>
-            <a:ext cx="2103239" cy="533400"/>
+            <a:off x="9479161" y="1283940"/>
+            <a:ext cx="2103239" cy="609600"/>
           </a:xfrm>
           <a:prstGeom prst="chevron">
             <a:avLst>
-              <a:gd name="adj" fmla="val 197154"/>
+              <a:gd name="adj" fmla="val 172510"/>
             </a:avLst>
           </a:prstGeom>
           <a:solidFill>
@@ -2528,149 +3158,301 @@
       </p:sp>
       <p:sp>
         <p:nvSpPr>
-          <p:cNvPr id="16" name="text s2.1.4.1"/>
-          <p:cNvSpPr txBox="1"/>
-          <p:nvPr/>
-        </p:nvSpPr>
-        <p:spPr>
-          <a:xfrm>
-            <a:off x="9479161" y="3570089"/>
-            <a:ext cx="2103239" cy="242888"/>
-          </a:xfrm>
-          <a:prstGeom prst="rect">
-            <a:avLst/>
-          </a:prstGeom>
-          <a:noFill/>
-          <a:ln>
-            <a:noFill/>
-          </a:ln>
-        </p:spPr>
-        <p:txBody>
-          <a:bodyPr wrap="square" lIns="0" tIns="0" rIns="0" bIns="0" anchor="t">
-            <a:normAutofit/>
-          </a:bodyPr>
-          <a:lstStyle/>
-          <a:p>
-            <a:pPr algn="ctr">
-              <a:lnSpc>
-                <a:spcPts val="1913"/>
-              </a:lnSpc>
-            </a:pPr>
-            <a:r>
-              <a:rPr sz="1275" b="0">
+          <p:cNvPr id="24" name="shape s2.1.4.1"/>
+          <p:cNvSpPr/>
+          <p:nvPr/>
+        </p:nvSpPr>
+        <p:spPr>
+          <a:xfrm>
+            <a:off x="9479161" y="2007840"/>
+            <a:ext cx="2103239" cy="3373785"/>
+          </a:xfrm>
+          <a:prstGeom prst="roundRect">
+            <a:avLst>
+              <a:gd name="adj" fmla="val 5434"/>
+            </a:avLst>
+          </a:prstGeom>
+          <a:solidFill>
+            <a:schemeClr val="bg2"/>
+          </a:solidFill>
+          <a:ln>
+            <a:noFill/>
+          </a:ln>
+        </p:spPr>
+        <p:txBody>
+          <a:bodyPr wrap="square" lIns="228600" tIns="228600" rIns="228600" bIns="228600" anchor="t">
+            <a:normAutofit/>
+          </a:bodyPr>
+          <a:lstStyle/>
+          <a:p/>
+        </p:txBody>
+      </p:sp>
+      <p:sp>
+        <p:nvSpPr>
+          <p:cNvPr id="25" name="text s2.1.4.1.0.0.0"/>
+          <p:cNvSpPr txBox="1"/>
+          <p:nvPr/>
+        </p:nvSpPr>
+        <p:spPr>
+          <a:xfrm>
+            <a:off x="9741098" y="2269778"/>
+            <a:ext cx="1579364" cy="502890"/>
+          </a:xfrm>
+          <a:prstGeom prst="rect">
+            <a:avLst/>
+          </a:prstGeom>
+          <a:noFill/>
+          <a:ln>
+            <a:noFill/>
+          </a:ln>
+        </p:spPr>
+        <p:txBody>
+          <a:bodyPr wrap="square" lIns="0" tIns="0" rIns="0" bIns="0" anchor="t">
+            <a:normAutofit/>
+          </a:bodyPr>
+          <a:lstStyle/>
+          <a:p>
+            <a:pPr algn="l">
+              <a:lnSpc>
+                <a:spcPts val="3960"/>
+              </a:lnSpc>
+            </a:pPr>
+            <a:r>
+              <a:rPr sz="3300" b="1">
                 <a:solidFill>
                   <a:schemeClr val="tx1"/>
+                </a:solidFill>
+                <a:latin typeface="+mj-lt"/>
+                <a:ea typeface="+mj-ea"/>
+              </a:rPr>
+              <a:t>14:49</a:t>
+            </a:r>
+          </a:p>
+        </p:txBody>
+      </p:sp>
+      <p:sp>
+        <p:nvSpPr>
+          <p:cNvPr id="26" name="text s2.1.4.1.0.0.1"/>
+          <p:cNvSpPr txBox="1"/>
+          <p:nvPr/>
+        </p:nvSpPr>
+        <p:spPr>
+          <a:xfrm>
+            <a:off x="9741098" y="2829818"/>
+            <a:ext cx="1579364" cy="297061"/>
+          </a:xfrm>
+          <a:prstGeom prst="rect">
+            <a:avLst/>
+          </a:prstGeom>
+          <a:noFill/>
+          <a:ln>
+            <a:noFill/>
+          </a:ln>
+        </p:spPr>
+        <p:txBody>
+          <a:bodyPr wrap="square" lIns="0" tIns="0" rIns="0" bIns="0" anchor="t">
+            <a:normAutofit/>
+          </a:bodyPr>
+          <a:lstStyle/>
+          <a:p>
+            <a:pPr algn="l">
+              <a:lnSpc>
+                <a:spcPts val="2340"/>
+              </a:lnSpc>
+            </a:pPr>
+            <a:r>
+              <a:rPr sz="1800" b="1">
+                <a:solidFill>
+                  <a:schemeClr val="tx1"/>
+                </a:solidFill>
+                <a:latin typeface="+mj-lt"/>
+                <a:ea typeface="+mj-ea"/>
+              </a:rPr>
+              <a:t>오류율 정상</a:t>
+            </a:r>
+          </a:p>
+        </p:txBody>
+      </p:sp>
+      <p:sp>
+        <p:nvSpPr>
+          <p:cNvPr id="27" name="text s2.1.4.1.0.1"/>
+          <p:cNvSpPr txBox="1"/>
+          <p:nvPr/>
+        </p:nvSpPr>
+        <p:spPr>
+          <a:xfrm>
+            <a:off x="9741098" y="4548188"/>
+            <a:ext cx="1579364" cy="571500"/>
+          </a:xfrm>
+          <a:prstGeom prst="rect">
+            <a:avLst/>
+          </a:prstGeom>
+          <a:noFill/>
+          <a:ln>
+            <a:noFill/>
+          </a:ln>
+        </p:spPr>
+        <p:txBody>
+          <a:bodyPr wrap="square" lIns="0" tIns="0" rIns="0" bIns="0" anchor="t">
+            <a:normAutofit/>
+          </a:bodyPr>
+          <a:lstStyle/>
+          <a:p>
+            <a:pPr algn="l">
+              <a:lnSpc>
+                <a:spcPts val="2250"/>
+              </a:lnSpc>
+            </a:pPr>
+            <a:r>
+              <a:rPr sz="1500" b="0">
+                <a:solidFill>
+                  <a:schemeClr val="tx2"/>
                 </a:solidFill>
                 <a:latin typeface="+mn-lt"/>
                 <a:ea typeface="+mn-ea"/>
               </a:rPr>
-              <a:t>14:49</a:t>
-            </a:r>
-          </a:p>
-        </p:txBody>
-      </p:sp>
-      <p:sp>
-        <p:nvSpPr>
-          <p:cNvPr id="17" name="text s2.1.4.2"/>
-          <p:cNvSpPr txBox="1"/>
-          <p:nvPr/>
-        </p:nvSpPr>
-        <p:spPr>
-          <a:xfrm>
-            <a:off x="9479161" y="3927277"/>
-            <a:ext cx="2103239" cy="214313"/>
-          </a:xfrm>
-          <a:prstGeom prst="rect">
-            <a:avLst/>
-          </a:prstGeom>
-          <a:noFill/>
-          <a:ln>
-            <a:noFill/>
-          </a:ln>
-        </p:spPr>
-        <p:txBody>
-          <a:bodyPr wrap="square" lIns="0" tIns="0" rIns="0" bIns="0" anchor="t">
+              <a:t>캐시 적중률 97%로 회복</a:t>
+            </a:r>
+          </a:p>
+        </p:txBody>
+      </p:sp>
+      <p:sp>
+        <p:nvSpPr>
+          <p:cNvPr id="28" name="shape s2.2.0"/>
+          <p:cNvSpPr/>
+          <p:nvPr/>
+        </p:nvSpPr>
+        <p:spPr>
+          <a:xfrm>
+            <a:off x="609600" y="5610225"/>
+            <a:ext cx="2743200" cy="638175"/>
+          </a:xfrm>
+          <a:prstGeom prst="roundRect">
+            <a:avLst>
+              <a:gd name="adj" fmla="val 17910"/>
+            </a:avLst>
+          </a:prstGeom>
+          <a:solidFill>
+            <a:schemeClr val="accent4"/>
+          </a:solidFill>
+          <a:ln>
+            <a:noFill/>
+          </a:ln>
+        </p:spPr>
+        <p:txBody>
+          <a:bodyPr wrap="square" lIns="114300" tIns="114300" rIns="114300" bIns="114300" anchor="t">
             <a:normAutofit/>
           </a:bodyPr>
           <a:lstStyle/>
           <a:p>
             <a:pPr algn="ctr">
               <a:lnSpc>
-                <a:spcPts val="1688"/>
-              </a:lnSpc>
-            </a:pPr>
-            <a:r>
-              <a:rPr sz="1125" b="0">
-                <a:solidFill>
-                  <a:schemeClr val="tx2"/>
+                <a:spcPts val="2700"/>
+              </a:lnSpc>
+            </a:pPr>
+            <a:r>
+              <a:rPr sz="1800" b="1" i="0" u="none">
+                <a:solidFill>
+                  <a:schemeClr val="bg1"/>
                 </a:solidFill>
                 <a:latin typeface="+mn-lt"/>
                 <a:ea typeface="+mn-ea"/>
               </a:rPr>
-              <a:t>오류율 정상</a:t>
-            </a:r>
-          </a:p>
-        </p:txBody>
-      </p:sp>
-      <p:sp>
-        <p:nvSpPr>
-          <p:cNvPr id="18" name="text s2.2"/>
-          <p:cNvSpPr txBox="1"/>
-          <p:nvPr/>
-        </p:nvSpPr>
-        <p:spPr>
-          <a:xfrm>
-            <a:off x="609600" y="6008489"/>
-            <a:ext cx="10972800" cy="239911"/>
-          </a:xfrm>
-          <a:prstGeom prst="rect">
-            <a:avLst/>
-          </a:prstGeom>
-          <a:noFill/>
-          <a:ln>
-            <a:noFill/>
-          </a:ln>
-        </p:spPr>
-        <p:txBody>
-          <a:bodyPr wrap="square" lIns="0" tIns="0" rIns="0" bIns="0" anchor="t">
-            <a:normAutofit/>
-          </a:bodyPr>
-          <a:lstStyle/>
-          <a:p>
-            <a:pPr algn="l">
-              <a:lnSpc>
-                <a:spcPts val="1890"/>
-              </a:lnSpc>
-            </a:pPr>
-            <a:r>
-              <a:rPr sz="1350" b="0">
-                <a:solidFill>
-                  <a:schemeClr val="tx2"/>
+              <a:t>탐지 12분</a:t>
+            </a:r>
+          </a:p>
+        </p:txBody>
+      </p:sp>
+      <p:sp>
+        <p:nvSpPr>
+          <p:cNvPr id="29" name="shape s2.2.1"/>
+          <p:cNvSpPr/>
+          <p:nvPr/>
+        </p:nvSpPr>
+        <p:spPr>
+          <a:xfrm>
+            <a:off x="3467100" y="5610225"/>
+            <a:ext cx="3886200" cy="638175"/>
+          </a:xfrm>
+          <a:prstGeom prst="roundRect">
+            <a:avLst>
+              <a:gd name="adj" fmla="val 17910"/>
+            </a:avLst>
+          </a:prstGeom>
+          <a:solidFill>
+            <a:schemeClr val="bg2"/>
+          </a:solidFill>
+          <a:ln>
+            <a:noFill/>
+          </a:ln>
+        </p:spPr>
+        <p:txBody>
+          <a:bodyPr wrap="square" lIns="114300" tIns="114300" rIns="114300" bIns="114300" anchor="t">
+            <a:normAutofit/>
+          </a:bodyPr>
+          <a:lstStyle/>
+          <a:p>
+            <a:pPr algn="ctr">
+              <a:lnSpc>
+                <a:spcPts val="2700"/>
+              </a:lnSpc>
+            </a:pPr>
+            <a:r>
+              <a:rPr sz="1800" b="0">
+                <a:solidFill>
+                  <a:schemeClr val="tx1"/>
                 </a:solidFill>
                 <a:latin typeface="+mn-lt"/>
                 <a:ea typeface="+mn-ea"/>
               </a:rPr>
-              <a:t>탐지 12분, 완화 17분, 복구 18분. 가장 비싼 구간은 </a:t>
-            </a:r>
-            <a:r>
-              <a:rPr sz="1350" b="1" i="0" u="none">
-                <a:solidFill>
-                  <a:schemeClr val="tx2"/>
+              <a:t>완화 17분</a:t>
+            </a:r>
+          </a:p>
+        </p:txBody>
+      </p:sp>
+      <p:sp>
+        <p:nvSpPr>
+          <p:cNvPr id="30" name="shape s2.2.2"/>
+          <p:cNvSpPr/>
+          <p:nvPr/>
+        </p:nvSpPr>
+        <p:spPr>
+          <a:xfrm>
+            <a:off x="7467600" y="5610225"/>
+            <a:ext cx="4114800" cy="638175"/>
+          </a:xfrm>
+          <a:prstGeom prst="roundRect">
+            <a:avLst>
+              <a:gd name="adj" fmla="val 17910"/>
+            </a:avLst>
+          </a:prstGeom>
+          <a:solidFill>
+            <a:schemeClr val="bg2"/>
+          </a:solidFill>
+          <a:ln>
+            <a:noFill/>
+          </a:ln>
+        </p:spPr>
+        <p:txBody>
+          <a:bodyPr wrap="square" lIns="114300" tIns="114300" rIns="114300" bIns="114300" anchor="t">
+            <a:normAutofit/>
+          </a:bodyPr>
+          <a:lstStyle/>
+          <a:p>
+            <a:pPr algn="ctr">
+              <a:lnSpc>
+                <a:spcPts val="2700"/>
+              </a:lnSpc>
+            </a:pPr>
+            <a:r>
+              <a:rPr sz="1800" b="0">
+                <a:solidFill>
+                  <a:schemeClr val="tx1"/>
                 </a:solidFill>
                 <a:latin typeface="+mn-lt"/>
                 <a:ea typeface="+mn-ea"/>
               </a:rPr>
-              <a:t>탐지</a:t>
-            </a:r>
-            <a:r>
-              <a:rPr sz="1350" b="0">
-                <a:solidFill>
-                  <a:schemeClr val="tx2"/>
-                </a:solidFill>
-                <a:latin typeface="+mn-lt"/>
-                <a:ea typeface="+mn-ea"/>
-              </a:rPr>
-              <a:t>였다.</a:t>
+              <a:t>복구 18분</a:t>
             </a:r>
           </a:p>
         </p:txBody>
@@ -2750,8 +3532,8 @@
           <p:nvPr/>
         </p:nvGraphicFramePr>
         <p:xfrm>
-          <a:off x="609600" y="2517577"/>
-          <a:ext cx="10972800" cy="2028825"/>
+          <a:off x="609600" y="1283940"/>
+          <a:ext cx="10972800" cy="2533650"/>
         </p:xfrm>
         <a:graphic>
           <a:graphicData uri="http://schemas.openxmlformats.org/drawingml/2006/table">
@@ -3387,7 +4169,7 @@
                   </a:tcPr>
                 </a:tc>
               </a:tr>
-              <a:tr h="509587">
+              <a:tr h="504825">
                 <a:tc>
                   <a:txBody>
                     <a:bodyPr/>
@@ -3406,7 +4188,7 @@
                           <a:latin typeface="+mn-lt"/>
                           <a:ea typeface="+mn-ea"/>
                         </a:rPr>
-                        <a:t>정산 배치</a:t>
+                        <a:t>장바구니</a:t>
                       </a:r>
                     </a:p>
                   </a:txBody>
@@ -3456,7 +4238,7 @@
                           <a:latin typeface="+mn-lt"/>
                           <a:ea typeface="+mn-ea"/>
                         </a:rPr>
-                        <a:t>0%</a:t>
+                        <a:t>0.3%</a:t>
                       </a:r>
                     </a:p>
                   </a:txBody>
@@ -3506,7 +4288,7 @@
                           <a:latin typeface="+mn-lt"/>
                           <a:ea typeface="+mn-ea"/>
                         </a:rPr>
-                        <a:t>0</a:t>
+                        <a:t>1,450</a:t>
                       </a:r>
                     </a:p>
                   </a:txBody>
@@ -3556,7 +4338,7 @@
                           <a:latin typeface="+mn-lt"/>
                           <a:ea typeface="+mn-ea"/>
                         </a:rPr>
-                        <a:t>없음</a:t>
+                        <a:t>담기 실패 (드묾)</a:t>
                       </a:r>
                     </a:p>
                   </a:txBody>
@@ -3589,20 +4371,304 @@
                   </a:tcPr>
                 </a:tc>
               </a:tr>
+              <a:tr h="509587">
+                <a:tc>
+                  <a:txBody>
+                    <a:bodyPr/>
+                    <a:lstStyle/>
+                    <a:p>
+                      <a:pPr algn="l">
+                        <a:lnSpc>
+                          <a:spcPts val="2700"/>
+                        </a:lnSpc>
+                      </a:pPr>
+                      <a:r>
+                        <a:rPr sz="1800" b="0">
+                          <a:solidFill>
+                            <a:schemeClr val="tx1"/>
+                          </a:solidFill>
+                          <a:latin typeface="+mn-lt"/>
+                          <a:ea typeface="+mn-ea"/>
+                        </a:rPr>
+                        <a:t>정산 배치</a:t>
+                      </a:r>
+                    </a:p>
+                  </a:txBody>
+                  <a:tcPr marL="114300" marR="114300" marT="76200" marB="76200" anchor="t">
+                    <a:lnL w="9525">
+                      <a:solidFill>
+                        <a:schemeClr val="tx2"/>
+                      </a:solidFill>
+                      <a:prstDash val="solid"/>
+                    </a:lnL>
+                    <a:lnR w="9525">
+                      <a:solidFill>
+                        <a:schemeClr val="tx2"/>
+                      </a:solidFill>
+                      <a:prstDash val="solid"/>
+                    </a:lnR>
+                    <a:lnT w="9525">
+                      <a:solidFill>
+                        <a:schemeClr val="tx2"/>
+                      </a:solidFill>
+                      <a:prstDash val="solid"/>
+                    </a:lnT>
+                    <a:lnB w="9525">
+                      <a:solidFill>
+                        <a:schemeClr val="tx2"/>
+                      </a:solidFill>
+                      <a:prstDash val="solid"/>
+                    </a:lnB>
+                    <a:solidFill>
+                      <a:schemeClr val="bg2"/>
+                    </a:solidFill>
+                  </a:tcPr>
+                </a:tc>
+                <a:tc>
+                  <a:txBody>
+                    <a:bodyPr/>
+                    <a:lstStyle/>
+                    <a:p>
+                      <a:pPr algn="r">
+                        <a:lnSpc>
+                          <a:spcPts val="2700"/>
+                        </a:lnSpc>
+                      </a:pPr>
+                      <a:r>
+                        <a:rPr sz="1800" b="0">
+                          <a:solidFill>
+                            <a:schemeClr val="tx1"/>
+                          </a:solidFill>
+                          <a:latin typeface="+mn-lt"/>
+                          <a:ea typeface="+mn-ea"/>
+                        </a:rPr>
+                        <a:t>0%</a:t>
+                      </a:r>
+                    </a:p>
+                  </a:txBody>
+                  <a:tcPr marL="114300" marR="114300" marT="76200" marB="76200" anchor="t">
+                    <a:lnL w="9525">
+                      <a:solidFill>
+                        <a:schemeClr val="tx2"/>
+                      </a:solidFill>
+                      <a:prstDash val="solid"/>
+                    </a:lnL>
+                    <a:lnR w="9525">
+                      <a:solidFill>
+                        <a:schemeClr val="tx2"/>
+                      </a:solidFill>
+                      <a:prstDash val="solid"/>
+                    </a:lnR>
+                    <a:lnT w="9525">
+                      <a:solidFill>
+                        <a:schemeClr val="tx2"/>
+                      </a:solidFill>
+                      <a:prstDash val="solid"/>
+                    </a:lnT>
+                    <a:lnB w="9525">
+                      <a:solidFill>
+                        <a:schemeClr val="tx2"/>
+                      </a:solidFill>
+                      <a:prstDash val="solid"/>
+                    </a:lnB>
+                    <a:solidFill>
+                      <a:schemeClr val="bg2"/>
+                    </a:solidFill>
+                  </a:tcPr>
+                </a:tc>
+                <a:tc>
+                  <a:txBody>
+                    <a:bodyPr/>
+                    <a:lstStyle/>
+                    <a:p>
+                      <a:pPr algn="r">
+                        <a:lnSpc>
+                          <a:spcPts val="2700"/>
+                        </a:lnSpc>
+                      </a:pPr>
+                      <a:r>
+                        <a:rPr sz="1800" b="0">
+                          <a:solidFill>
+                            <a:schemeClr val="tx1"/>
+                          </a:solidFill>
+                          <a:latin typeface="+mn-lt"/>
+                          <a:ea typeface="+mn-ea"/>
+                        </a:rPr>
+                        <a:t>0</a:t>
+                      </a:r>
+                    </a:p>
+                  </a:txBody>
+                  <a:tcPr marL="114300" marR="114300" marT="76200" marB="76200" anchor="t">
+                    <a:lnL w="9525">
+                      <a:solidFill>
+                        <a:schemeClr val="tx2"/>
+                      </a:solidFill>
+                      <a:prstDash val="solid"/>
+                    </a:lnL>
+                    <a:lnR w="9525">
+                      <a:solidFill>
+                        <a:schemeClr val="tx2"/>
+                      </a:solidFill>
+                      <a:prstDash val="solid"/>
+                    </a:lnR>
+                    <a:lnT w="9525">
+                      <a:solidFill>
+                        <a:schemeClr val="tx2"/>
+                      </a:solidFill>
+                      <a:prstDash val="solid"/>
+                    </a:lnT>
+                    <a:lnB w="9525">
+                      <a:solidFill>
+                        <a:schemeClr val="tx2"/>
+                      </a:solidFill>
+                      <a:prstDash val="solid"/>
+                    </a:lnB>
+                    <a:solidFill>
+                      <a:schemeClr val="bg2"/>
+                    </a:solidFill>
+                  </a:tcPr>
+                </a:tc>
+                <a:tc>
+                  <a:txBody>
+                    <a:bodyPr/>
+                    <a:lstStyle/>
+                    <a:p>
+                      <a:pPr algn="l">
+                        <a:lnSpc>
+                          <a:spcPts val="2700"/>
+                        </a:lnSpc>
+                      </a:pPr>
+                      <a:r>
+                        <a:rPr sz="1800" b="0">
+                          <a:solidFill>
+                            <a:schemeClr val="tx1"/>
+                          </a:solidFill>
+                          <a:latin typeface="+mn-lt"/>
+                          <a:ea typeface="+mn-ea"/>
+                        </a:rPr>
+                        <a:t>없음</a:t>
+                      </a:r>
+                    </a:p>
+                  </a:txBody>
+                  <a:tcPr marL="114300" marR="114300" marT="76200" marB="76200" anchor="t">
+                    <a:lnL w="9525">
+                      <a:solidFill>
+                        <a:schemeClr val="tx2"/>
+                      </a:solidFill>
+                      <a:prstDash val="solid"/>
+                    </a:lnL>
+                    <a:lnR w="9525">
+                      <a:solidFill>
+                        <a:schemeClr val="tx2"/>
+                      </a:solidFill>
+                      <a:prstDash val="solid"/>
+                    </a:lnR>
+                    <a:lnT w="9525">
+                      <a:solidFill>
+                        <a:schemeClr val="tx2"/>
+                      </a:solidFill>
+                      <a:prstDash val="solid"/>
+                    </a:lnT>
+                    <a:lnB w="9525">
+                      <a:solidFill>
+                        <a:schemeClr val="tx2"/>
+                      </a:solidFill>
+                      <a:prstDash val="solid"/>
+                    </a:lnB>
+                    <a:solidFill>
+                      <a:schemeClr val="bg2"/>
+                    </a:solidFill>
+                  </a:tcPr>
+                </a:tc>
+              </a:tr>
             </a:tbl>
           </a:graphicData>
         </a:graphic>
       </p:graphicFrame>
       <p:sp>
         <p:nvSpPr>
-          <p:cNvPr id="4" name="text s3.2"/>
-          <p:cNvSpPr txBox="1"/>
-          <p:nvPr/>
-        </p:nvSpPr>
-        <p:spPr>
-          <a:xfrm>
-            <a:off x="609600" y="6008489"/>
-            <a:ext cx="10972800" cy="239911"/>
+          <p:cNvPr id="4" name="shape s3.2.0"/>
+          <p:cNvSpPr/>
+          <p:nvPr/>
+        </p:nvSpPr>
+        <p:spPr>
+          <a:xfrm>
+            <a:off x="609600" y="4046190"/>
+            <a:ext cx="3505200" cy="2202210"/>
+          </a:xfrm>
+          <a:prstGeom prst="roundRect">
+            <a:avLst>
+              <a:gd name="adj" fmla="val 10380"/>
+            </a:avLst>
+          </a:prstGeom>
+          <a:solidFill>
+            <a:schemeClr val="bg2"/>
+          </a:solidFill>
+          <a:ln>
+            <a:noFill/>
+          </a:ln>
+        </p:spPr>
+        <p:txBody>
+          <a:bodyPr wrap="square" lIns="228600" tIns="228600" rIns="228600" bIns="228600" anchor="t">
+            <a:normAutofit/>
+          </a:bodyPr>
+          <a:lstStyle/>
+          <a:p/>
+        </p:txBody>
+      </p:sp>
+      <p:sp>
+        <p:nvSpPr>
+          <p:cNvPr id="5" name="text s3.2.0.0.0"/>
+          <p:cNvSpPr txBox="1"/>
+          <p:nvPr/>
+        </p:nvSpPr>
+        <p:spPr>
+          <a:xfrm>
+            <a:off x="905024" y="4724400"/>
+            <a:ext cx="2914352" cy="548580"/>
+          </a:xfrm>
+          <a:prstGeom prst="rect">
+            <a:avLst/>
+          </a:prstGeom>
+          <a:noFill/>
+          <a:ln>
+            <a:noFill/>
+          </a:ln>
+        </p:spPr>
+        <p:txBody>
+          <a:bodyPr wrap="square" lIns="0" tIns="0" rIns="0" bIns="0" anchor="t">
+            <a:normAutofit/>
+          </a:bodyPr>
+          <a:lstStyle/>
+          <a:p>
+            <a:pPr algn="l">
+              <a:lnSpc>
+                <a:spcPts val="4320"/>
+              </a:lnSpc>
+            </a:pPr>
+            <a:r>
+              <a:rPr sz="3600" b="1">
+                <a:solidFill>
+                  <a:schemeClr val="accent5"/>
+                </a:solidFill>
+                <a:latin typeface="+mj-lt"/>
+                <a:ea typeface="+mj-ea"/>
+              </a:rPr>
+              <a:t>41,200</a:t>
+            </a:r>
+          </a:p>
+        </p:txBody>
+      </p:sp>
+      <p:sp>
+        <p:nvSpPr>
+          <p:cNvPr id="6" name="text s3.2.0.0.1"/>
+          <p:cNvSpPr txBox="1"/>
+          <p:nvPr/>
+        </p:nvSpPr>
+        <p:spPr>
+          <a:xfrm>
+            <a:off x="905024" y="5330130"/>
+            <a:ext cx="2914352" cy="239911"/>
           </a:xfrm>
           <a:prstGeom prst="rect">
             <a:avLst/>
@@ -3631,7 +4697,241 @@
                 <a:latin typeface="+mn-lt"/>
                 <a:ea typeface="+mn-ea"/>
               </a:rPr>
-              <a:t>결제 실패 41,200건 중 재시도로 성공한 것이 39,900건이다.</a:t>
+              <a:t>결제 실패 요청</a:t>
+            </a:r>
+          </a:p>
+        </p:txBody>
+      </p:sp>
+      <p:sp>
+        <p:nvSpPr>
+          <p:cNvPr id="7" name="shape s3.2.1"/>
+          <p:cNvSpPr/>
+          <p:nvPr/>
+        </p:nvSpPr>
+        <p:spPr>
+          <a:xfrm>
+            <a:off x="4343400" y="4046190"/>
+            <a:ext cx="3505200" cy="2202210"/>
+          </a:xfrm>
+          <a:prstGeom prst="roundRect">
+            <a:avLst>
+              <a:gd name="adj" fmla="val 10380"/>
+            </a:avLst>
+          </a:prstGeom>
+          <a:solidFill>
+            <a:schemeClr val="bg2"/>
+          </a:solidFill>
+          <a:ln>
+            <a:noFill/>
+          </a:ln>
+        </p:spPr>
+        <p:txBody>
+          <a:bodyPr wrap="square" lIns="228600" tIns="228600" rIns="228600" bIns="228600" anchor="t">
+            <a:normAutofit/>
+          </a:bodyPr>
+          <a:lstStyle/>
+          <a:p/>
+        </p:txBody>
+      </p:sp>
+      <p:sp>
+        <p:nvSpPr>
+          <p:cNvPr id="8" name="text s3.2.1.0.0"/>
+          <p:cNvSpPr txBox="1"/>
+          <p:nvPr/>
+        </p:nvSpPr>
+        <p:spPr>
+          <a:xfrm>
+            <a:off x="4638824" y="4724400"/>
+            <a:ext cx="2914352" cy="548580"/>
+          </a:xfrm>
+          <a:prstGeom prst="rect">
+            <a:avLst/>
+          </a:prstGeom>
+          <a:noFill/>
+          <a:ln>
+            <a:noFill/>
+          </a:ln>
+        </p:spPr>
+        <p:txBody>
+          <a:bodyPr wrap="square" lIns="0" tIns="0" rIns="0" bIns="0" anchor="t">
+            <a:normAutofit/>
+          </a:bodyPr>
+          <a:lstStyle/>
+          <a:p>
+            <a:pPr algn="l">
+              <a:lnSpc>
+                <a:spcPts val="4320"/>
+              </a:lnSpc>
+            </a:pPr>
+            <a:r>
+              <a:rPr sz="3600" b="1">
+                <a:solidFill>
+                  <a:schemeClr val="accent3"/>
+                </a:solidFill>
+                <a:latin typeface="+mj-lt"/>
+                <a:ea typeface="+mj-ea"/>
+              </a:rPr>
+              <a:t>39,900</a:t>
+            </a:r>
+          </a:p>
+        </p:txBody>
+      </p:sp>
+      <p:sp>
+        <p:nvSpPr>
+          <p:cNvPr id="9" name="text s3.2.1.0.1"/>
+          <p:cNvSpPr txBox="1"/>
+          <p:nvPr/>
+        </p:nvSpPr>
+        <p:spPr>
+          <a:xfrm>
+            <a:off x="4638824" y="5330130"/>
+            <a:ext cx="2914352" cy="239911"/>
+          </a:xfrm>
+          <a:prstGeom prst="rect">
+            <a:avLst/>
+          </a:prstGeom>
+          <a:noFill/>
+          <a:ln>
+            <a:noFill/>
+          </a:ln>
+        </p:spPr>
+        <p:txBody>
+          <a:bodyPr wrap="square" lIns="0" tIns="0" rIns="0" bIns="0" anchor="t">
+            <a:normAutofit/>
+          </a:bodyPr>
+          <a:lstStyle/>
+          <a:p>
+            <a:pPr algn="l">
+              <a:lnSpc>
+                <a:spcPts val="1890"/>
+              </a:lnSpc>
+            </a:pPr>
+            <a:r>
+              <a:rPr sz="1350" b="0">
+                <a:solidFill>
+                  <a:schemeClr val="tx2"/>
+                </a:solidFill>
+                <a:latin typeface="+mn-lt"/>
+                <a:ea typeface="+mn-ea"/>
+              </a:rPr>
+              <a:t>재시도로 성공 (96.8%)</a:t>
+            </a:r>
+          </a:p>
+        </p:txBody>
+      </p:sp>
+      <p:sp>
+        <p:nvSpPr>
+          <p:cNvPr id="10" name="shape s3.2.2"/>
+          <p:cNvSpPr/>
+          <p:nvPr/>
+        </p:nvSpPr>
+        <p:spPr>
+          <a:xfrm>
+            <a:off x="8077200" y="4046190"/>
+            <a:ext cx="3505200" cy="2202210"/>
+          </a:xfrm>
+          <a:prstGeom prst="roundRect">
+            <a:avLst>
+              <a:gd name="adj" fmla="val 10380"/>
+            </a:avLst>
+          </a:prstGeom>
+          <a:solidFill>
+            <a:schemeClr val="bg2"/>
+          </a:solidFill>
+          <a:ln>
+            <a:noFill/>
+          </a:ln>
+        </p:spPr>
+        <p:txBody>
+          <a:bodyPr wrap="square" lIns="228600" tIns="228600" rIns="228600" bIns="228600" anchor="t">
+            <a:normAutofit/>
+          </a:bodyPr>
+          <a:lstStyle/>
+          <a:p/>
+        </p:txBody>
+      </p:sp>
+      <p:sp>
+        <p:nvSpPr>
+          <p:cNvPr id="11" name="text s3.2.2.0.0"/>
+          <p:cNvSpPr txBox="1"/>
+          <p:nvPr/>
+        </p:nvSpPr>
+        <p:spPr>
+          <a:xfrm>
+            <a:off x="8372624" y="4724400"/>
+            <a:ext cx="2914352" cy="548580"/>
+          </a:xfrm>
+          <a:prstGeom prst="rect">
+            <a:avLst/>
+          </a:prstGeom>
+          <a:noFill/>
+          <a:ln>
+            <a:noFill/>
+          </a:ln>
+        </p:spPr>
+        <p:txBody>
+          <a:bodyPr wrap="square" lIns="0" tIns="0" rIns="0" bIns="0" anchor="t">
+            <a:normAutofit/>
+          </a:bodyPr>
+          <a:lstStyle/>
+          <a:p>
+            <a:pPr algn="l">
+              <a:lnSpc>
+                <a:spcPts val="4320"/>
+              </a:lnSpc>
+            </a:pPr>
+            <a:r>
+              <a:rPr sz="3600" b="1">
+                <a:solidFill>
+                  <a:schemeClr val="accent5"/>
+                </a:solidFill>
+                <a:latin typeface="+mj-lt"/>
+                <a:ea typeface="+mj-ea"/>
+              </a:rPr>
+              <a:t>34건</a:t>
+            </a:r>
+          </a:p>
+        </p:txBody>
+      </p:sp>
+      <p:sp>
+        <p:nvSpPr>
+          <p:cNvPr id="12" name="text s3.2.2.0.1"/>
+          <p:cNvSpPr txBox="1"/>
+          <p:nvPr/>
+        </p:nvSpPr>
+        <p:spPr>
+          <a:xfrm>
+            <a:off x="8372624" y="5330130"/>
+            <a:ext cx="2914352" cy="239911"/>
+          </a:xfrm>
+          <a:prstGeom prst="rect">
+            <a:avLst/>
+          </a:prstGeom>
+          <a:noFill/>
+          <a:ln>
+            <a:noFill/>
+          </a:ln>
+        </p:spPr>
+        <p:txBody>
+          <a:bodyPr wrap="square" lIns="0" tIns="0" rIns="0" bIns="0" anchor="t">
+            <a:normAutofit/>
+          </a:bodyPr>
+          <a:lstStyle/>
+          <a:p>
+            <a:pPr algn="l">
+              <a:lnSpc>
+                <a:spcPts val="1890"/>
+              </a:lnSpc>
+            </a:pPr>
+            <a:r>
+              <a:rPr sz="1350" b="0">
+                <a:solidFill>
+                  <a:schemeClr val="tx2"/>
+                </a:solidFill>
+                <a:latin typeface="+mn-lt"/>
+                <a:ea typeface="+mn-ea"/>
+              </a:rPr>
+              <a:t>CS 문의 · 이중 결제 0건</a:t>
             </a:r>
           </a:p>
         </p:txBody>
@@ -3663,11 +4963,9 @@
       </p:grpSpPr>
       <p:sp>
         <p:nvSpPr>
-          <p:cNvPr id="2" name="text s4.0"/>
-          <p:cNvSpPr txBox="1"/>
-          <p:nvPr>
-            <p:ph type="title"/>
-          </p:nvPr>
+          <p:cNvPr id="2" name="h2 s4.0"/>
+          <p:cNvSpPr txBox="1"/>
+          <p:nvPr/>
         </p:nvSpPr>
         <p:spPr>
           <a:xfrm>
@@ -3708,16 +5006,45 @@
       </p:sp>
       <p:sp>
         <p:nvSpPr>
-          <p:cNvPr id="3" name="pre s4.1"/>
-          <p:cNvSpPr txBox="1"/>
-          <p:nvPr>
-            <p:ph type="body" idx="1"/>
-          </p:nvPr>
+          <p:cNvPr id="3" name="shape s4.1"/>
+          <p:cNvSpPr/>
+          <p:nvPr/>
         </p:nvSpPr>
         <p:spPr>
           <a:xfrm>
             <a:off x="609600" y="1283940"/>
-            <a:ext cx="10972800" cy="4495949"/>
+            <a:ext cx="10972800" cy="3810149"/>
+          </a:xfrm>
+          <a:prstGeom prst="roundRect">
+            <a:avLst>
+              <a:gd name="adj" fmla="val 6000"/>
+            </a:avLst>
+          </a:prstGeom>
+          <a:solidFill>
+            <a:schemeClr val="bg2"/>
+          </a:solidFill>
+          <a:ln>
+            <a:noFill/>
+          </a:ln>
+        </p:spPr>
+        <p:txBody>
+          <a:bodyPr wrap="square" lIns="342900" tIns="228600" rIns="342900" bIns="228600" anchor="t">
+            <a:normAutofit/>
+          </a:bodyPr>
+          <a:lstStyle/>
+          <a:p/>
+        </p:txBody>
+      </p:sp>
+      <p:sp>
+        <p:nvSpPr>
+          <p:cNvPr id="4" name="pre s4.1.0.0"/>
+          <p:cNvSpPr txBox="1"/>
+          <p:nvPr/>
+        </p:nvSpPr>
+        <p:spPr>
+          <a:xfrm>
+            <a:off x="1019324" y="1579364"/>
+            <a:ext cx="10153352" cy="2571750"/>
           </a:xfrm>
           <a:prstGeom prst="rect">
             <a:avLst/>
@@ -4121,16 +5448,14 @@
       </p:sp>
       <p:sp>
         <p:nvSpPr>
-          <p:cNvPr id="4" name="text s4.2"/>
-          <p:cNvSpPr txBox="1"/>
-          <p:nvPr>
-            <p:ph type="body" idx="2"/>
-          </p:nvPr>
-        </p:nvSpPr>
-        <p:spPr>
-          <a:xfrm>
-            <a:off x="609600" y="6008489"/>
-            <a:ext cx="10972800" cy="239911"/>
+          <p:cNvPr id="5" name="text s4.1.0.1"/>
+          <p:cNvSpPr txBox="1"/>
+          <p:nvPr/>
+        </p:nvSpPr>
+        <p:spPr>
+          <a:xfrm>
+            <a:off x="1019324" y="4558754"/>
+            <a:ext cx="10153352" cy="239911"/>
           </a:xfrm>
           <a:prstGeom prst="rect">
             <a:avLst/>
@@ -4159,7 +5484,265 @@
                 <a:latin typeface="+mn-lt"/>
                 <a:ea typeface="+mn-ea"/>
               </a:rPr>
-              <a:t>TTL에 지터가 없다. 30분 뒤 같은 초에 12만 키가 만료됐다.</a:t>
+              <a:t>payments/cache/warm.go — 배포 훅이 부른다</a:t>
+            </a:r>
+          </a:p>
+        </p:txBody>
+      </p:sp>
+      <p:sp>
+        <p:nvSpPr>
+          <p:cNvPr id="6" name="text s4.2.0.0"/>
+          <p:cNvSpPr txBox="1"/>
+          <p:nvPr/>
+        </p:nvSpPr>
+        <p:spPr>
+          <a:xfrm>
+            <a:off x="609600" y="5322689"/>
+            <a:ext cx="3505200" cy="297061"/>
+          </a:xfrm>
+          <a:prstGeom prst="rect">
+            <a:avLst/>
+          </a:prstGeom>
+          <a:noFill/>
+          <a:ln>
+            <a:noFill/>
+          </a:ln>
+        </p:spPr>
+        <p:txBody>
+          <a:bodyPr wrap="square" lIns="0" tIns="0" rIns="0" bIns="0" anchor="t">
+            <a:normAutofit/>
+          </a:bodyPr>
+          <a:lstStyle/>
+          <a:p>
+            <a:pPr algn="l">
+              <a:lnSpc>
+                <a:spcPts val="2340"/>
+              </a:lnSpc>
+            </a:pPr>
+            <a:r>
+              <a:rPr sz="1800" b="1">
+                <a:solidFill>
+                  <a:schemeClr val="tx1"/>
+                </a:solidFill>
+                <a:latin typeface="+mj-lt"/>
+                <a:ea typeface="+mj-ea"/>
+              </a:rPr>
+              <a:t>① 일괄 예열</a:t>
+            </a:r>
+          </a:p>
+        </p:txBody>
+      </p:sp>
+      <p:sp>
+        <p:nvSpPr>
+          <p:cNvPr id="7" name="text s4.2.0.1"/>
+          <p:cNvSpPr txBox="1"/>
+          <p:nvPr/>
+        </p:nvSpPr>
+        <p:spPr>
+          <a:xfrm>
+            <a:off x="609600" y="5676900"/>
+            <a:ext cx="3505200" cy="285750"/>
+          </a:xfrm>
+          <a:prstGeom prst="rect">
+            <a:avLst/>
+          </a:prstGeom>
+          <a:noFill/>
+          <a:ln>
+            <a:noFill/>
+          </a:ln>
+        </p:spPr>
+        <p:txBody>
+          <a:bodyPr wrap="square" lIns="0" tIns="0" rIns="0" bIns="0" anchor="t">
+            <a:normAutofit/>
+          </a:bodyPr>
+          <a:lstStyle/>
+          <a:p>
+            <a:pPr algn="l">
+              <a:lnSpc>
+                <a:spcPts val="2250"/>
+              </a:lnSpc>
+            </a:pPr>
+            <a:r>
+              <a:rPr sz="1500" b="0">
+                <a:solidFill>
+                  <a:schemeClr val="tx1"/>
+                </a:solidFill>
+                <a:latin typeface="+mn-lt"/>
+                <a:ea typeface="+mn-ea"/>
+              </a:rPr>
+              <a:t>배포가 12만 키를 몇 초 안에 채운다.</a:t>
+            </a:r>
+          </a:p>
+        </p:txBody>
+      </p:sp>
+      <p:sp>
+        <p:nvSpPr>
+          <p:cNvPr id="8" name="text s4.2.1.0"/>
+          <p:cNvSpPr txBox="1"/>
+          <p:nvPr/>
+        </p:nvSpPr>
+        <p:spPr>
+          <a:xfrm>
+            <a:off x="4343400" y="5322689"/>
+            <a:ext cx="3505200" cy="297061"/>
+          </a:xfrm>
+          <a:prstGeom prst="rect">
+            <a:avLst/>
+          </a:prstGeom>
+          <a:noFill/>
+          <a:ln>
+            <a:noFill/>
+          </a:ln>
+        </p:spPr>
+        <p:txBody>
+          <a:bodyPr wrap="square" lIns="0" tIns="0" rIns="0" bIns="0" anchor="t">
+            <a:normAutofit/>
+          </a:bodyPr>
+          <a:lstStyle/>
+          <a:p>
+            <a:pPr algn="l">
+              <a:lnSpc>
+                <a:spcPts val="2340"/>
+              </a:lnSpc>
+            </a:pPr>
+            <a:r>
+              <a:rPr sz="1800" b="1">
+                <a:solidFill>
+                  <a:schemeClr val="tx1"/>
+                </a:solidFill>
+                <a:latin typeface="+mj-lt"/>
+                <a:ea typeface="+mj-ea"/>
+              </a:rPr>
+              <a:t>② 고정 TTL 30분</a:t>
+            </a:r>
+          </a:p>
+        </p:txBody>
+      </p:sp>
+      <p:sp>
+        <p:nvSpPr>
+          <p:cNvPr id="9" name="text s4.2.1.1"/>
+          <p:cNvSpPr txBox="1"/>
+          <p:nvPr/>
+        </p:nvSpPr>
+        <p:spPr>
+          <a:xfrm>
+            <a:off x="4343400" y="5676900"/>
+            <a:ext cx="3505200" cy="285750"/>
+          </a:xfrm>
+          <a:prstGeom prst="rect">
+            <a:avLst/>
+          </a:prstGeom>
+          <a:noFill/>
+          <a:ln>
+            <a:noFill/>
+          </a:ln>
+        </p:spPr>
+        <p:txBody>
+          <a:bodyPr wrap="square" lIns="0" tIns="0" rIns="0" bIns="0" anchor="t">
+            <a:normAutofit/>
+          </a:bodyPr>
+          <a:lstStyle/>
+          <a:p>
+            <a:pPr algn="l">
+              <a:lnSpc>
+                <a:spcPts val="2250"/>
+              </a:lnSpc>
+            </a:pPr>
+            <a:r>
+              <a:rPr sz="1500" b="0">
+                <a:solidFill>
+                  <a:schemeClr val="tx1"/>
+                </a:solidFill>
+                <a:latin typeface="+mn-lt"/>
+                <a:ea typeface="+mn-ea"/>
+              </a:rPr>
+              <a:t>지터가 없어 만료 시각이 하나로 모인다.</a:t>
+            </a:r>
+          </a:p>
+        </p:txBody>
+      </p:sp>
+      <p:sp>
+        <p:nvSpPr>
+          <p:cNvPr id="10" name="text s4.2.2.0"/>
+          <p:cNvSpPr txBox="1"/>
+          <p:nvPr/>
+        </p:nvSpPr>
+        <p:spPr>
+          <a:xfrm>
+            <a:off x="8077200" y="5322689"/>
+            <a:ext cx="3505200" cy="297061"/>
+          </a:xfrm>
+          <a:prstGeom prst="rect">
+            <a:avLst/>
+          </a:prstGeom>
+          <a:noFill/>
+          <a:ln>
+            <a:noFill/>
+          </a:ln>
+        </p:spPr>
+        <p:txBody>
+          <a:bodyPr wrap="square" lIns="0" tIns="0" rIns="0" bIns="0" anchor="t">
+            <a:normAutofit/>
+          </a:bodyPr>
+          <a:lstStyle/>
+          <a:p>
+            <a:pPr algn="l">
+              <a:lnSpc>
+                <a:spcPts val="2340"/>
+              </a:lnSpc>
+            </a:pPr>
+            <a:r>
+              <a:rPr sz="1800" b="1">
+                <a:solidFill>
+                  <a:schemeClr val="accent5"/>
+                </a:solidFill>
+                <a:latin typeface="+mj-lt"/>
+                <a:ea typeface="+mj-ea"/>
+              </a:rPr>
+              <a:t>③ 같은 초에 전부 미스</a:t>
+            </a:r>
+          </a:p>
+        </p:txBody>
+      </p:sp>
+      <p:sp>
+        <p:nvSpPr>
+          <p:cNvPr id="11" name="text s4.2.2.1"/>
+          <p:cNvSpPr txBox="1"/>
+          <p:nvPr/>
+        </p:nvSpPr>
+        <p:spPr>
+          <a:xfrm>
+            <a:off x="8077200" y="5676900"/>
+            <a:ext cx="3505200" cy="571500"/>
+          </a:xfrm>
+          <a:prstGeom prst="rect">
+            <a:avLst/>
+          </a:prstGeom>
+          <a:noFill/>
+          <a:ln>
+            <a:noFill/>
+          </a:ln>
+        </p:spPr>
+        <p:txBody>
+          <a:bodyPr wrap="square" lIns="0" tIns="0" rIns="0" bIns="0" anchor="t">
+            <a:normAutofit/>
+          </a:bodyPr>
+          <a:lstStyle/>
+          <a:p>
+            <a:pPr algn="l">
+              <a:lnSpc>
+                <a:spcPts val="2250"/>
+              </a:lnSpc>
+            </a:pPr>
+            <a:r>
+              <a:rPr sz="1500" b="0">
+                <a:solidFill>
+                  <a:schemeClr val="tx1"/>
+                </a:solidFill>
+                <a:latin typeface="+mn-lt"/>
+                <a:ea typeface="+mn-ea"/>
+              </a:rPr>
+              <a:t>단일 비행이 없어 미스 하나가 DB 질의 하나가 된다.</a:t>
             </a:r>
           </a:p>
         </p:txBody>
@@ -4234,74 +5817,287 @@
       </p:sp>
       <p:sp>
         <p:nvSpPr>
-          <p:cNvPr id="3" name="ul s5.1"/>
-          <p:cNvSpPr txBox="1"/>
+          <p:cNvPr id="3" name="shape s5.1.0"/>
+          <p:cNvSpPr/>
           <p:nvPr/>
         </p:nvSpPr>
         <p:spPr>
           <a:xfrm>
             <a:off x="609600" y="1283940"/>
-            <a:ext cx="10972800" cy="1152525"/>
-          </a:xfrm>
-          <a:prstGeom prst="rect">
-            <a:avLst/>
-          </a:prstGeom>
-          <a:noFill/>
-          <a:ln>
-            <a:noFill/>
-          </a:ln>
-        </p:spPr>
-        <p:txBody>
-          <a:bodyPr wrap="square" lIns="0" tIns="0" rIns="0" bIns="0" anchor="t">
-            <a:normAutofit/>
-          </a:bodyPr>
-          <a:lstStyle/>
-          <a:p>
-            <a:pPr marL="342900" indent="-342900" algn="l">
+            <a:ext cx="5372100" cy="2281238"/>
+          </a:xfrm>
+          <a:prstGeom prst="roundRect">
+            <a:avLst>
+              <a:gd name="adj" fmla="val 10021"/>
+            </a:avLst>
+          </a:prstGeom>
+          <a:solidFill>
+            <a:schemeClr val="bg2"/>
+          </a:solidFill>
+          <a:ln>
+            <a:noFill/>
+          </a:ln>
+        </p:spPr>
+        <p:txBody>
+          <a:bodyPr wrap="square" lIns="228600" tIns="228600" rIns="228600" bIns="228600" anchor="t">
+            <a:normAutofit/>
+          </a:bodyPr>
+          <a:lstStyle/>
+          <a:p/>
+        </p:txBody>
+      </p:sp>
+      <p:sp>
+        <p:nvSpPr>
+          <p:cNvPr id="4" name="text s5.1.0.0.0.0"/>
+          <p:cNvSpPr txBox="1"/>
+          <p:nvPr/>
+        </p:nvSpPr>
+        <p:spPr>
+          <a:xfrm>
+            <a:off x="905024" y="1579364"/>
+            <a:ext cx="4781252" cy="321915"/>
+          </a:xfrm>
+          <a:prstGeom prst="rect">
+            <a:avLst/>
+          </a:prstGeom>
+          <a:noFill/>
+          <a:ln>
+            <a:noFill/>
+          </a:ln>
+        </p:spPr>
+        <p:txBody>
+          <a:bodyPr wrap="square" lIns="0" tIns="0" rIns="0" bIns="0" anchor="t">
+            <a:normAutofit/>
+          </a:bodyPr>
+          <a:lstStyle/>
+          <a:p>
+            <a:pPr algn="l">
+              <a:lnSpc>
+                <a:spcPts val="2535"/>
+              </a:lnSpc>
+            </a:pPr>
+            <a:r>
+              <a:rPr sz="1950" b="1">
+                <a:solidFill>
+                  <a:schemeClr val="tx1"/>
+                </a:solidFill>
+                <a:latin typeface="+mj-lt"/>
+                <a:ea typeface="+mj-ea"/>
+              </a:rPr>
+              <a:t>고정 TTL</a:t>
+            </a:r>
+          </a:p>
+        </p:txBody>
+      </p:sp>
+      <p:sp>
+        <p:nvSpPr>
+          <p:cNvPr id="5" name="text s5.1.0.0.0.1"/>
+          <p:cNvSpPr txBox="1"/>
+          <p:nvPr/>
+        </p:nvSpPr>
+        <p:spPr>
+          <a:xfrm>
+            <a:off x="905024" y="1958429"/>
+            <a:ext cx="4781252" cy="285750"/>
+          </a:xfrm>
+          <a:prstGeom prst="rect">
+            <a:avLst/>
+          </a:prstGeom>
+          <a:noFill/>
+          <a:ln>
+            <a:noFill/>
+          </a:ln>
+        </p:spPr>
+        <p:txBody>
+          <a:bodyPr wrap="square" lIns="0" tIns="0" rIns="0" bIns="0" anchor="t">
+            <a:normAutofit/>
+          </a:bodyPr>
+          <a:lstStyle/>
+          <a:p>
+            <a:pPr algn="l">
               <a:lnSpc>
                 <a:spcPts val="2250"/>
               </a:lnSpc>
-              <a:buFont typeface="+mn-lt"/>
-              <a:buChar char="•"/>
-            </a:pPr>
-            <a:r>
-              <a:rPr sz="1500" b="1" i="0" u="none">
+            </a:pPr>
+            <a:r>
+              <a:rPr sz="1500" b="0">
                 <a:solidFill>
                   <a:schemeClr val="tx1"/>
                 </a:solidFill>
                 <a:latin typeface="+mn-lt"/>
                 <a:ea typeface="+mn-ea"/>
               </a:rPr>
-              <a:t>고정 TTL</a:t>
-            </a:r>
-            <a:r>
-              <a:rPr sz="1500" b="0">
-                <a:solidFill>
-                  <a:schemeClr val="tx1"/>
+              <a:t>예열이 모든 키에 같은 만료 시각을 준다.</a:t>
+            </a:r>
+          </a:p>
+        </p:txBody>
+      </p:sp>
+      <p:sp>
+        <p:nvSpPr>
+          <p:cNvPr id="6" name="text s5.1.0.0.1"/>
+          <p:cNvSpPr txBox="1"/>
+          <p:nvPr/>
+        </p:nvSpPr>
+        <p:spPr>
+          <a:xfrm>
+            <a:off x="905024" y="3029843"/>
+            <a:ext cx="4781252" cy="239911"/>
+          </a:xfrm>
+          <a:prstGeom prst="rect">
+            <a:avLst/>
+          </a:prstGeom>
+          <a:noFill/>
+          <a:ln>
+            <a:noFill/>
+          </a:ln>
+        </p:spPr>
+        <p:txBody>
+          <a:bodyPr wrap="square" lIns="0" tIns="0" rIns="0" bIns="0" anchor="t">
+            <a:normAutofit/>
+          </a:bodyPr>
+          <a:lstStyle/>
+          <a:p>
+            <a:pPr algn="l">
+              <a:lnSpc>
+                <a:spcPts val="1890"/>
+              </a:lnSpc>
+            </a:pPr>
+            <a:r>
+              <a:rPr sz="1350" b="0">
+                <a:solidFill>
+                  <a:schemeClr val="accent3"/>
                 </a:solidFill>
                 <a:latin typeface="+mn-lt"/>
                 <a:ea typeface="+mn-ea"/>
               </a:rPr>
-              <a:t> — 예열이 모든 키에 같은 만료 시각을 준다.</a:t>
-            </a:r>
-          </a:p>
-          <a:p>
-            <a:pPr marL="342900" indent="-342900" algn="l">
+              <a:t>→ TTL에 ±10% 지터</a:t>
+            </a:r>
+          </a:p>
+        </p:txBody>
+      </p:sp>
+      <p:sp>
+        <p:nvSpPr>
+          <p:cNvPr id="7" name="shape s5.1.1"/>
+          <p:cNvSpPr/>
+          <p:nvPr/>
+        </p:nvSpPr>
+        <p:spPr>
+          <a:xfrm>
+            <a:off x="6210300" y="1283940"/>
+            <a:ext cx="5372100" cy="2281238"/>
+          </a:xfrm>
+          <a:prstGeom prst="roundRect">
+            <a:avLst>
+              <a:gd name="adj" fmla="val 10021"/>
+            </a:avLst>
+          </a:prstGeom>
+          <a:solidFill>
+            <a:schemeClr val="bg2"/>
+          </a:solidFill>
+          <a:ln>
+            <a:noFill/>
+          </a:ln>
+        </p:spPr>
+        <p:txBody>
+          <a:bodyPr wrap="square" lIns="228600" tIns="228600" rIns="228600" bIns="228600" anchor="t">
+            <a:normAutofit/>
+          </a:bodyPr>
+          <a:lstStyle/>
+          <a:p/>
+        </p:txBody>
+      </p:sp>
+      <p:sp>
+        <p:nvSpPr>
+          <p:cNvPr id="8" name="text s5.1.1.0.0.0"/>
+          <p:cNvSpPr txBox="1"/>
+          <p:nvPr/>
+        </p:nvSpPr>
+        <p:spPr>
+          <a:xfrm>
+            <a:off x="6505724" y="1579364"/>
+            <a:ext cx="4781252" cy="321915"/>
+          </a:xfrm>
+          <a:prstGeom prst="rect">
+            <a:avLst/>
+          </a:prstGeom>
+          <a:noFill/>
+          <a:ln>
+            <a:noFill/>
+          </a:ln>
+        </p:spPr>
+        <p:txBody>
+          <a:bodyPr wrap="square" lIns="0" tIns="0" rIns="0" bIns="0" anchor="t">
+            <a:normAutofit/>
+          </a:bodyPr>
+          <a:lstStyle/>
+          <a:p>
+            <a:pPr algn="l">
+              <a:lnSpc>
+                <a:spcPts val="2535"/>
+              </a:lnSpc>
+            </a:pPr>
+            <a:r>
+              <a:rPr sz="1950" b="1">
+                <a:solidFill>
+                  <a:schemeClr val="tx1"/>
+                </a:solidFill>
+                <a:latin typeface="+mj-lt"/>
+                <a:ea typeface="+mj-ea"/>
+              </a:rPr>
+              <a:t>단일 비행 없음</a:t>
+            </a:r>
+          </a:p>
+        </p:txBody>
+      </p:sp>
+      <p:sp>
+        <p:nvSpPr>
+          <p:cNvPr id="9" name="text s5.1.1.0.0.1"/>
+          <p:cNvSpPr txBox="1"/>
+          <p:nvPr/>
+        </p:nvSpPr>
+        <p:spPr>
+          <a:xfrm>
+            <a:off x="6505724" y="1958429"/>
+            <a:ext cx="4781252" cy="581025"/>
+          </a:xfrm>
+          <a:prstGeom prst="rect">
+            <a:avLst/>
+          </a:prstGeom>
+          <a:noFill/>
+          <a:ln>
+            <a:noFill/>
+          </a:ln>
+        </p:spPr>
+        <p:txBody>
+          <a:bodyPr wrap="square" lIns="0" tIns="0" rIns="0" bIns="0" anchor="t">
+            <a:normAutofit/>
+          </a:bodyPr>
+          <a:lstStyle/>
+          <a:p>
+            <a:pPr algn="l">
               <a:lnSpc>
                 <a:spcPts val="2250"/>
               </a:lnSpc>
-              <a:buFont typeface="+mn-lt"/>
-              <a:buChar char="•"/>
-            </a:pPr>
-            <a:r>
-              <a:rPr sz="1500" b="1" i="0" u="none">
+            </a:pPr>
+            <a:r>
+              <a:rPr sz="1500" b="0">
                 <a:solidFill>
                   <a:schemeClr val="tx1"/>
                 </a:solidFill>
                 <a:latin typeface="+mn-lt"/>
                 <a:ea typeface="+mn-ea"/>
               </a:rPr>
-              <a:t>단일 비행 없음</a:t>
+              <a:t>캐시 미스가 그대로 DB 질의가 된다 (</a:t>
+            </a:r>
+            <a:r>
+              <a:rPr sz="1500" b="0" i="0" u="none">
+                <a:solidFill>
+                  <a:schemeClr val="tx1"/>
+                </a:solidFill>
+                <a:latin typeface="Noto Sans Mono"/>
+                <a:ea typeface="Noto Sans Mono CJK KR"/>
+              </a:rPr>
+              <a:t>cache.Get</a:t>
             </a:r>
             <a:r>
               <a:rPr sz="1500" b="0">
@@ -4311,98 +6107,383 @@
                 <a:latin typeface="+mn-lt"/>
                 <a:ea typeface="+mn-ea"/>
               </a:rPr>
-              <a:t> — 캐시 미스가 그대로 DB 질의가 된다 (</a:t>
-            </a:r>
-            <a:r>
-              <a:rPr sz="1500" b="0" i="0" u="none">
-                <a:solidFill>
-                  <a:schemeClr val="tx1"/>
-                </a:solidFill>
-                <a:latin typeface="Noto Sans Mono"/>
-                <a:ea typeface="Noto Sans Mono CJK KR"/>
-              </a:rPr>
-              <a:t>cache.Get</a:t>
-            </a:r>
-            <a:r>
-              <a:rPr sz="1500" b="0">
-                <a:solidFill>
-                  <a:schemeClr val="tx1"/>
+              <a:t> 실패 경로에 잠금이 없다).</a:t>
+            </a:r>
+          </a:p>
+        </p:txBody>
+      </p:sp>
+      <p:sp>
+        <p:nvSpPr>
+          <p:cNvPr id="10" name="text s5.1.1.0.1"/>
+          <p:cNvSpPr txBox="1"/>
+          <p:nvPr/>
+        </p:nvSpPr>
+        <p:spPr>
+          <a:xfrm>
+            <a:off x="6505724" y="3029843"/>
+            <a:ext cx="4781252" cy="239911"/>
+          </a:xfrm>
+          <a:prstGeom prst="rect">
+            <a:avLst/>
+          </a:prstGeom>
+          <a:noFill/>
+          <a:ln>
+            <a:noFill/>
+          </a:ln>
+        </p:spPr>
+        <p:txBody>
+          <a:bodyPr wrap="square" lIns="0" tIns="0" rIns="0" bIns="0" anchor="t">
+            <a:normAutofit/>
+          </a:bodyPr>
+          <a:lstStyle/>
+          <a:p>
+            <a:pPr algn="l">
+              <a:lnSpc>
+                <a:spcPts val="1890"/>
+              </a:lnSpc>
+            </a:pPr>
+            <a:r>
+              <a:rPr sz="1350" b="0">
+                <a:solidFill>
+                  <a:schemeClr val="accent3"/>
                 </a:solidFill>
                 <a:latin typeface="+mn-lt"/>
                 <a:ea typeface="+mn-ea"/>
               </a:rPr>
-              <a:t> 실패 경로에 잠금이 없다).</a:t>
-            </a:r>
-          </a:p>
-          <a:p>
-            <a:pPr marL="342900" indent="-342900" algn="l">
+              <a:t>→ 캐시 미스에 단일 비행 잠금</a:t>
+            </a:r>
+          </a:p>
+        </p:txBody>
+      </p:sp>
+      <p:sp>
+        <p:nvSpPr>
+          <p:cNvPr id="11" name="shape s5.1.2"/>
+          <p:cNvSpPr/>
+          <p:nvPr/>
+        </p:nvSpPr>
+        <p:spPr>
+          <a:xfrm>
+            <a:off x="609600" y="3793778"/>
+            <a:ext cx="5372100" cy="1986111"/>
+          </a:xfrm>
+          <a:prstGeom prst="roundRect">
+            <a:avLst>
+              <a:gd name="adj" fmla="val 11510"/>
+            </a:avLst>
+          </a:prstGeom>
+          <a:solidFill>
+            <a:schemeClr val="bg2"/>
+          </a:solidFill>
+          <a:ln>
+            <a:noFill/>
+          </a:ln>
+        </p:spPr>
+        <p:txBody>
+          <a:bodyPr wrap="square" lIns="228600" tIns="228600" rIns="228600" bIns="228600" anchor="t">
+            <a:normAutofit/>
+          </a:bodyPr>
+          <a:lstStyle/>
+          <a:p/>
+        </p:txBody>
+      </p:sp>
+      <p:sp>
+        <p:nvSpPr>
+          <p:cNvPr id="12" name="text s5.1.2.0.0.0"/>
+          <p:cNvSpPr txBox="1"/>
+          <p:nvPr/>
+        </p:nvSpPr>
+        <p:spPr>
+          <a:xfrm>
+            <a:off x="905024" y="4089202"/>
+            <a:ext cx="4781252" cy="321915"/>
+          </a:xfrm>
+          <a:prstGeom prst="rect">
+            <a:avLst/>
+          </a:prstGeom>
+          <a:noFill/>
+          <a:ln>
+            <a:noFill/>
+          </a:ln>
+        </p:spPr>
+        <p:txBody>
+          <a:bodyPr wrap="square" lIns="0" tIns="0" rIns="0" bIns="0" anchor="t">
+            <a:normAutofit/>
+          </a:bodyPr>
+          <a:lstStyle/>
+          <a:p>
+            <a:pPr algn="l">
+              <a:lnSpc>
+                <a:spcPts val="2535"/>
+              </a:lnSpc>
+            </a:pPr>
+            <a:r>
+              <a:rPr sz="1950" b="1">
+                <a:solidFill>
+                  <a:schemeClr val="tx1"/>
+                </a:solidFill>
+                <a:latin typeface="+mj-lt"/>
+                <a:ea typeface="+mj-ea"/>
+              </a:rPr>
+              <a:t>읽기 풀이 작다</a:t>
+            </a:r>
+          </a:p>
+        </p:txBody>
+      </p:sp>
+      <p:sp>
+        <p:nvSpPr>
+          <p:cNvPr id="13" name="text s5.1.2.0.0.1"/>
+          <p:cNvSpPr txBox="1"/>
+          <p:nvPr/>
+        </p:nvSpPr>
+        <p:spPr>
+          <a:xfrm>
+            <a:off x="905024" y="4468267"/>
+            <a:ext cx="4781252" cy="285750"/>
+          </a:xfrm>
+          <a:prstGeom prst="rect">
+            <a:avLst/>
+          </a:prstGeom>
+          <a:noFill/>
+          <a:ln>
+            <a:noFill/>
+          </a:ln>
+        </p:spPr>
+        <p:txBody>
+          <a:bodyPr wrap="square" lIns="0" tIns="0" rIns="0" bIns="0" anchor="t">
+            <a:normAutofit/>
+          </a:bodyPr>
+          <a:lstStyle/>
+          <a:p>
+            <a:pPr algn="l">
               <a:lnSpc>
                 <a:spcPts val="2250"/>
               </a:lnSpc>
-              <a:buFont typeface="+mn-lt"/>
-              <a:buChar char="•"/>
-            </a:pPr>
-            <a:r>
-              <a:rPr sz="1500" b="1" i="0" u="none">
+            </a:pPr>
+            <a:r>
+              <a:rPr sz="1500" b="0">
                 <a:solidFill>
                   <a:schemeClr val="tx1"/>
                 </a:solidFill>
                 <a:latin typeface="+mn-lt"/>
                 <a:ea typeface="+mn-ea"/>
               </a:rPr>
-              <a:t>읽기 풀이 작다</a:t>
-            </a:r>
-            <a:r>
-              <a:rPr sz="1500" b="0">
-                <a:solidFill>
-                  <a:schemeClr val="tx1"/>
+              <a:t>풀 상한 40, 평시 피크 26. 여유가 14개뿐이었다.</a:t>
+            </a:r>
+          </a:p>
+        </p:txBody>
+      </p:sp>
+      <p:sp>
+        <p:nvSpPr>
+          <p:cNvPr id="14" name="text s5.1.2.0.1"/>
+          <p:cNvSpPr txBox="1"/>
+          <p:nvPr/>
+        </p:nvSpPr>
+        <p:spPr>
+          <a:xfrm>
+            <a:off x="905024" y="5244554"/>
+            <a:ext cx="4781252" cy="239911"/>
+          </a:xfrm>
+          <a:prstGeom prst="rect">
+            <a:avLst/>
+          </a:prstGeom>
+          <a:noFill/>
+          <a:ln>
+            <a:noFill/>
+          </a:ln>
+        </p:spPr>
+        <p:txBody>
+          <a:bodyPr wrap="square" lIns="0" tIns="0" rIns="0" bIns="0" anchor="t">
+            <a:normAutofit/>
+          </a:bodyPr>
+          <a:lstStyle/>
+          <a:p>
+            <a:pPr algn="l">
+              <a:lnSpc>
+                <a:spcPts val="1890"/>
+              </a:lnSpc>
+            </a:pPr>
+            <a:r>
+              <a:rPr sz="1350" b="0">
+                <a:solidFill>
+                  <a:schemeClr val="accent3"/>
                 </a:solidFill>
                 <a:latin typeface="+mn-lt"/>
                 <a:ea typeface="+mn-ea"/>
               </a:rPr>
-              <a:t> — 풀 상한 40, 평시 피크 26. 여유가 14개뿐이었다.</a:t>
-            </a:r>
-          </a:p>
-          <a:p>
-            <a:pPr marL="342900" indent="-342900" algn="l">
+              <a:t>→ 풀 상한 96, 사용률 80%에 경보</a:t>
+            </a:r>
+          </a:p>
+        </p:txBody>
+      </p:sp>
+      <p:sp>
+        <p:nvSpPr>
+          <p:cNvPr id="15" name="shape s5.1.3"/>
+          <p:cNvSpPr/>
+          <p:nvPr/>
+        </p:nvSpPr>
+        <p:spPr>
+          <a:xfrm>
+            <a:off x="6210300" y="3793778"/>
+            <a:ext cx="5372100" cy="1986111"/>
+          </a:xfrm>
+          <a:prstGeom prst="roundRect">
+            <a:avLst>
+              <a:gd name="adj" fmla="val 11510"/>
+            </a:avLst>
+          </a:prstGeom>
+          <a:solidFill>
+            <a:schemeClr val="bg2"/>
+          </a:solidFill>
+          <a:ln>
+            <a:noFill/>
+          </a:ln>
+        </p:spPr>
+        <p:txBody>
+          <a:bodyPr wrap="square" lIns="228600" tIns="228600" rIns="228600" bIns="228600" anchor="t">
+            <a:normAutofit/>
+          </a:bodyPr>
+          <a:lstStyle/>
+          <a:p/>
+        </p:txBody>
+      </p:sp>
+      <p:sp>
+        <p:nvSpPr>
+          <p:cNvPr id="16" name="text s5.1.3.0.0.0"/>
+          <p:cNvSpPr txBox="1"/>
+          <p:nvPr/>
+        </p:nvSpPr>
+        <p:spPr>
+          <a:xfrm>
+            <a:off x="6505724" y="4089202"/>
+            <a:ext cx="4781252" cy="321915"/>
+          </a:xfrm>
+          <a:prstGeom prst="rect">
+            <a:avLst/>
+          </a:prstGeom>
+          <a:noFill/>
+          <a:ln>
+            <a:noFill/>
+          </a:ln>
+        </p:spPr>
+        <p:txBody>
+          <a:bodyPr wrap="square" lIns="0" tIns="0" rIns="0" bIns="0" anchor="t">
+            <a:normAutofit/>
+          </a:bodyPr>
+          <a:lstStyle/>
+          <a:p>
+            <a:pPr algn="l">
+              <a:lnSpc>
+                <a:spcPts val="2535"/>
+              </a:lnSpc>
+            </a:pPr>
+            <a:r>
+              <a:rPr sz="1950" b="1">
+                <a:solidFill>
+                  <a:schemeClr val="tx1"/>
+                </a:solidFill>
+                <a:latin typeface="+mj-lt"/>
+                <a:ea typeface="+mj-ea"/>
+              </a:rPr>
+              <a:t>경보가 5분 평균</a:t>
+            </a:r>
+          </a:p>
+        </p:txBody>
+      </p:sp>
+      <p:sp>
+        <p:nvSpPr>
+          <p:cNvPr id="17" name="text s5.1.3.0.0.1"/>
+          <p:cNvSpPr txBox="1"/>
+          <p:nvPr/>
+        </p:nvSpPr>
+        <p:spPr>
+          <a:xfrm>
+            <a:off x="6505724" y="4468267"/>
+            <a:ext cx="4781252" cy="285750"/>
+          </a:xfrm>
+          <a:prstGeom prst="rect">
+            <a:avLst/>
+          </a:prstGeom>
+          <a:noFill/>
+          <a:ln>
+            <a:noFill/>
+          </a:ln>
+        </p:spPr>
+        <p:txBody>
+          <a:bodyPr wrap="square" lIns="0" tIns="0" rIns="0" bIns="0" anchor="t">
+            <a:normAutofit/>
+          </a:bodyPr>
+          <a:lstStyle/>
+          <a:p>
+            <a:pPr algn="l">
               <a:lnSpc>
                 <a:spcPts val="2250"/>
               </a:lnSpc>
-              <a:buFont typeface="+mn-lt"/>
-              <a:buChar char="•"/>
-            </a:pPr>
-            <a:r>
-              <a:rPr sz="1500" b="1" i="0" u="none">
+            </a:pPr>
+            <a:r>
+              <a:rPr sz="1500" b="0">
                 <a:solidFill>
                   <a:schemeClr val="tx1"/>
                 </a:solidFill>
                 <a:latin typeface="+mn-lt"/>
                 <a:ea typeface="+mn-ea"/>
               </a:rPr>
-              <a:t>경보가 5분 평균</a:t>
-            </a:r>
-            <a:r>
-              <a:rPr sz="1500" b="0">
-                <a:solidFill>
-                  <a:schemeClr val="tx1"/>
+              <a:t>임계값이 평균이라 급한 스파이크를 늦게 본다.</a:t>
+            </a:r>
+          </a:p>
+        </p:txBody>
+      </p:sp>
+      <p:sp>
+        <p:nvSpPr>
+          <p:cNvPr id="18" name="text s5.1.3.0.1"/>
+          <p:cNvSpPr txBox="1"/>
+          <p:nvPr/>
+        </p:nvSpPr>
+        <p:spPr>
+          <a:xfrm>
+            <a:off x="6505724" y="5244554"/>
+            <a:ext cx="4781252" cy="239911"/>
+          </a:xfrm>
+          <a:prstGeom prst="rect">
+            <a:avLst/>
+          </a:prstGeom>
+          <a:noFill/>
+          <a:ln>
+            <a:noFill/>
+          </a:ln>
+        </p:spPr>
+        <p:txBody>
+          <a:bodyPr wrap="square" lIns="0" tIns="0" rIns="0" bIns="0" anchor="t">
+            <a:normAutofit/>
+          </a:bodyPr>
+          <a:lstStyle/>
+          <a:p>
+            <a:pPr algn="l">
+              <a:lnSpc>
+                <a:spcPts val="1890"/>
+              </a:lnSpc>
+            </a:pPr>
+            <a:r>
+              <a:rPr sz="1350" b="0">
+                <a:solidFill>
+                  <a:schemeClr val="accent3"/>
                 </a:solidFill>
                 <a:latin typeface="+mn-lt"/>
                 <a:ea typeface="+mn-ea"/>
               </a:rPr>
-              <a:t> — 임계값이 평균이라 급한 스파이크를 늦게 본다.</a:t>
-            </a:r>
-          </a:p>
-        </p:txBody>
-      </p:sp>
-      <p:sp>
-        <p:nvSpPr>
-          <p:cNvPr id="4" name="text s5.2"/>
-          <p:cNvSpPr txBox="1"/>
-          <p:nvPr/>
-        </p:nvSpPr>
-        <p:spPr>
-          <a:xfrm>
-            <a:off x="609600" y="2665065"/>
+              <a:t>→ 1분 p99 경보로 교체</a:t>
+            </a:r>
+          </a:p>
+        </p:txBody>
+      </p:sp>
+      <p:sp>
+        <p:nvSpPr>
+          <p:cNvPr id="19" name="text s5.2"/>
+          <p:cNvSpPr txBox="1"/>
+          <p:nvPr/>
+        </p:nvSpPr>
+        <p:spPr>
+          <a:xfrm>
+            <a:off x="609600" y="6008489"/>
             <a:ext cx="10972800" cy="239911"/>
           </a:xfrm>
           <a:prstGeom prst="rect">
@@ -4509,14 +6590,45 @@
       </p:sp>
       <p:sp>
         <p:nvSpPr>
-          <p:cNvPr id="3" name="text s6.1.0"/>
-          <p:cNvSpPr txBox="1"/>
+          <p:cNvPr id="3" name="shape s6.1.0"/>
+          <p:cNvSpPr/>
           <p:nvPr/>
         </p:nvSpPr>
         <p:spPr>
           <a:xfrm>
             <a:off x="609600" y="1283940"/>
-            <a:ext cx="5372100" cy="297061"/>
+            <a:ext cx="5372100" cy="4964460"/>
+          </a:xfrm>
+          <a:prstGeom prst="roundRect">
+            <a:avLst>
+              <a:gd name="adj" fmla="val 4605"/>
+            </a:avLst>
+          </a:prstGeom>
+          <a:solidFill>
+            <a:schemeClr val="bg2"/>
+          </a:solidFill>
+          <a:ln>
+            <a:noFill/>
+          </a:ln>
+        </p:spPr>
+        <p:txBody>
+          <a:bodyPr wrap="square" lIns="342900" tIns="342900" rIns="342900" bIns="342900" anchor="t">
+            <a:normAutofit/>
+          </a:bodyPr>
+          <a:lstStyle/>
+          <a:p/>
+        </p:txBody>
+      </p:sp>
+      <p:sp>
+        <p:nvSpPr>
+          <p:cNvPr id="4" name="text s6.1.0.0.0"/>
+          <p:cNvSpPr txBox="1"/>
+          <p:nvPr/>
+        </p:nvSpPr>
+        <p:spPr>
+          <a:xfrm>
+            <a:off x="1019324" y="1693664"/>
+            <a:ext cx="4552652" cy="346621"/>
           </a:xfrm>
           <a:prstGeom prst="rect">
             <a:avLst/>
@@ -4534,11 +6646,11 @@
           <a:p>
             <a:pPr algn="l">
               <a:lnSpc>
-                <a:spcPts val="2340"/>
-              </a:lnSpc>
-            </a:pPr>
-            <a:r>
-              <a:rPr sz="1800" b="1">
+                <a:spcPts val="2730"/>
+              </a:lnSpc>
+            </a:pPr>
+            <a:r>
+              <a:rPr sz="2100" b="1">
                 <a:solidFill>
                   <a:schemeClr val="accent3"/>
                 </a:solidFill>
@@ -4552,97 +6664,333 @@
       </p:sp>
       <p:sp>
         <p:nvSpPr>
-          <p:cNvPr id="4" name="ol s6.1.1"/>
-          <p:cNvSpPr txBox="1"/>
-          <p:nvPr/>
-        </p:nvSpPr>
-        <p:spPr>
-          <a:xfrm>
-            <a:off x="609600" y="1695301"/>
-            <a:ext cx="5372100" cy="771525"/>
-          </a:xfrm>
-          <a:prstGeom prst="rect">
-            <a:avLst/>
-          </a:prstGeom>
-          <a:noFill/>
-          <a:ln>
-            <a:noFill/>
-          </a:ln>
-        </p:spPr>
-        <p:txBody>
-          <a:bodyPr wrap="square" lIns="0" tIns="0" rIns="0" bIns="0" anchor="t">
-            <a:normAutofit/>
-          </a:bodyPr>
-          <a:lstStyle/>
-          <a:p>
-            <a:pPr marL="342900" indent="-342900" algn="l">
-              <a:lnSpc>
-                <a:spcPts val="2025"/>
-              </a:lnSpc>
-              <a:buFont typeface="+mn-lt"/>
-              <a:buAutoNum type="arabicPeriod"/>
-            </a:pPr>
-            <a:r>
-              <a:rPr sz="1350" b="0">
+          <p:cNvPr id="5" name="text s6.1.0.0.1.0"/>
+          <p:cNvSpPr txBox="1"/>
+          <p:nvPr/>
+        </p:nvSpPr>
+        <p:spPr>
+          <a:xfrm>
+            <a:off x="1019324" y="2666405"/>
+            <a:ext cx="4552652" cy="342900"/>
+          </a:xfrm>
+          <a:prstGeom prst="rect">
+            <a:avLst/>
+          </a:prstGeom>
+          <a:noFill/>
+          <a:ln>
+            <a:noFill/>
+          </a:ln>
+        </p:spPr>
+        <p:txBody>
+          <a:bodyPr wrap="square" lIns="0" tIns="0" rIns="0" bIns="0" anchor="t">
+            <a:normAutofit/>
+          </a:bodyPr>
+          <a:lstStyle/>
+          <a:p>
+            <a:pPr algn="l">
+              <a:lnSpc>
+                <a:spcPts val="2700"/>
+              </a:lnSpc>
+            </a:pPr>
+            <a:r>
+              <a:rPr sz="1800" b="1" i="0" u="none">
                 <a:solidFill>
                   <a:schemeClr val="tx1"/>
                 </a:solidFill>
                 <a:latin typeface="+mn-lt"/>
                 <a:ea typeface="+mn-ea"/>
               </a:rPr>
-              <a:t>TTL에 ±10% 지터 (결제 캐시 전부)</a:t>
-            </a:r>
-          </a:p>
-          <a:p>
-            <a:pPr marL="342900" indent="-342900" algn="l">
-              <a:lnSpc>
-                <a:spcPts val="2025"/>
-              </a:lnSpc>
-              <a:buFont typeface="+mn-lt"/>
-              <a:buAutoNum type="arabicPeriod"/>
-            </a:pPr>
-            <a:r>
-              <a:rPr sz="1350" b="0">
+              <a:t>1.</a:t>
+            </a:r>
+            <a:r>
+              <a:rPr sz="1800" b="0">
                 <a:solidFill>
                   <a:schemeClr val="tx1"/>
                 </a:solidFill>
                 <a:latin typeface="+mn-lt"/>
                 <a:ea typeface="+mn-ea"/>
               </a:rPr>
-              <a:t>5xx 경보를 1분 p99로 교체</a:t>
-            </a:r>
-          </a:p>
-          <a:p>
-            <a:pPr marL="342900" indent="-342900" algn="l">
-              <a:lnSpc>
-                <a:spcPts val="2025"/>
-              </a:lnSpc>
-              <a:buFont typeface="+mn-lt"/>
-              <a:buAutoNum type="arabicPeriod"/>
+              <a:t> TTL에 ±10% 지터 (결제 캐시 전부)</a:t>
+            </a:r>
+          </a:p>
+        </p:txBody>
+      </p:sp>
+      <p:sp>
+        <p:nvSpPr>
+          <p:cNvPr id="6" name="text s6.1.0.0.1.1"/>
+          <p:cNvSpPr txBox="1"/>
+          <p:nvPr/>
+        </p:nvSpPr>
+        <p:spPr>
+          <a:xfrm>
+            <a:off x="1019324" y="3066455"/>
+            <a:ext cx="4552652" cy="239911"/>
+          </a:xfrm>
+          <a:prstGeom prst="rect">
+            <a:avLst/>
+          </a:prstGeom>
+          <a:noFill/>
+          <a:ln>
+            <a:noFill/>
+          </a:ln>
+        </p:spPr>
+        <p:txBody>
+          <a:bodyPr wrap="square" lIns="0" tIns="0" rIns="0" bIns="0" anchor="t">
+            <a:normAutofit/>
+          </a:bodyPr>
+          <a:lstStyle/>
+          <a:p>
+            <a:pPr algn="l">
+              <a:lnSpc>
+                <a:spcPts val="1890"/>
+              </a:lnSpc>
             </a:pPr>
             <a:r>
               <a:rPr sz="1350" b="0">
                 <a:solidFill>
-                  <a:schemeClr val="tx1"/>
+                  <a:schemeClr val="tx2"/>
                 </a:solidFill>
                 <a:latin typeface="+mn-lt"/>
                 <a:ea typeface="+mn-ea"/>
               </a:rPr>
-              <a:t>읽기 풀 상한 40 → 96, 경보 80%</a:t>
-            </a:r>
-          </a:p>
-        </p:txBody>
-      </p:sp>
-      <p:sp>
-        <p:nvSpPr>
-          <p:cNvPr id="5" name="text s6.2.0"/>
-          <p:cNvSpPr txBox="1"/>
+              <a:t>고정 TTL을 막는다</a:t>
+            </a:r>
+          </a:p>
+        </p:txBody>
+      </p:sp>
+      <p:sp>
+        <p:nvSpPr>
+          <p:cNvPr id="7" name="text s6.1.0.0.2.0"/>
+          <p:cNvSpPr txBox="1"/>
+          <p:nvPr/>
+        </p:nvSpPr>
+        <p:spPr>
+          <a:xfrm>
+            <a:off x="1019324" y="3932634"/>
+            <a:ext cx="4552652" cy="342900"/>
+          </a:xfrm>
+          <a:prstGeom prst="rect">
+            <a:avLst/>
+          </a:prstGeom>
+          <a:noFill/>
+          <a:ln>
+            <a:noFill/>
+          </a:ln>
+        </p:spPr>
+        <p:txBody>
+          <a:bodyPr wrap="square" lIns="0" tIns="0" rIns="0" bIns="0" anchor="t">
+            <a:normAutofit/>
+          </a:bodyPr>
+          <a:lstStyle/>
+          <a:p>
+            <a:pPr algn="l">
+              <a:lnSpc>
+                <a:spcPts val="2700"/>
+              </a:lnSpc>
+            </a:pPr>
+            <a:r>
+              <a:rPr sz="1800" b="1" i="0" u="none">
+                <a:solidFill>
+                  <a:schemeClr val="tx1"/>
+                </a:solidFill>
+                <a:latin typeface="+mn-lt"/>
+                <a:ea typeface="+mn-ea"/>
+              </a:rPr>
+              <a:t>2.</a:t>
+            </a:r>
+            <a:r>
+              <a:rPr sz="1800" b="0">
+                <a:solidFill>
+                  <a:schemeClr val="tx1"/>
+                </a:solidFill>
+                <a:latin typeface="+mn-lt"/>
+                <a:ea typeface="+mn-ea"/>
+              </a:rPr>
+              <a:t> 5xx 경보를 1분 p99로 교체</a:t>
+            </a:r>
+          </a:p>
+        </p:txBody>
+      </p:sp>
+      <p:sp>
+        <p:nvSpPr>
+          <p:cNvPr id="8" name="text s6.1.0.0.2.1"/>
+          <p:cNvSpPr txBox="1"/>
+          <p:nvPr/>
+        </p:nvSpPr>
+        <p:spPr>
+          <a:xfrm>
+            <a:off x="1019324" y="4332684"/>
+            <a:ext cx="4552652" cy="239911"/>
+          </a:xfrm>
+          <a:prstGeom prst="rect">
+            <a:avLst/>
+          </a:prstGeom>
+          <a:noFill/>
+          <a:ln>
+            <a:noFill/>
+          </a:ln>
+        </p:spPr>
+        <p:txBody>
+          <a:bodyPr wrap="square" lIns="0" tIns="0" rIns="0" bIns="0" anchor="t">
+            <a:normAutofit/>
+          </a:bodyPr>
+          <a:lstStyle/>
+          <a:p>
+            <a:pPr algn="l">
+              <a:lnSpc>
+                <a:spcPts val="1890"/>
+              </a:lnSpc>
+            </a:pPr>
+            <a:r>
+              <a:rPr sz="1350" b="0">
+                <a:solidFill>
+                  <a:schemeClr val="tx2"/>
+                </a:solidFill>
+                <a:latin typeface="+mn-lt"/>
+                <a:ea typeface="+mn-ea"/>
+              </a:rPr>
+              <a:t>탐지 12분 → 목표 3분</a:t>
+            </a:r>
+          </a:p>
+        </p:txBody>
+      </p:sp>
+      <p:sp>
+        <p:nvSpPr>
+          <p:cNvPr id="9" name="text s6.1.0.0.3.0"/>
+          <p:cNvSpPr txBox="1"/>
+          <p:nvPr/>
+        </p:nvSpPr>
+        <p:spPr>
+          <a:xfrm>
+            <a:off x="1019324" y="5198715"/>
+            <a:ext cx="4552652" cy="342900"/>
+          </a:xfrm>
+          <a:prstGeom prst="rect">
+            <a:avLst/>
+          </a:prstGeom>
+          <a:noFill/>
+          <a:ln>
+            <a:noFill/>
+          </a:ln>
+        </p:spPr>
+        <p:txBody>
+          <a:bodyPr wrap="square" lIns="0" tIns="0" rIns="0" bIns="0" anchor="t">
+            <a:normAutofit/>
+          </a:bodyPr>
+          <a:lstStyle/>
+          <a:p>
+            <a:pPr algn="l">
+              <a:lnSpc>
+                <a:spcPts val="2700"/>
+              </a:lnSpc>
+            </a:pPr>
+            <a:r>
+              <a:rPr sz="1800" b="1" i="0" u="none">
+                <a:solidFill>
+                  <a:schemeClr val="tx1"/>
+                </a:solidFill>
+                <a:latin typeface="+mn-lt"/>
+                <a:ea typeface="+mn-ea"/>
+              </a:rPr>
+              <a:t>3.</a:t>
+            </a:r>
+            <a:r>
+              <a:rPr sz="1800" b="0">
+                <a:solidFill>
+                  <a:schemeClr val="tx1"/>
+                </a:solidFill>
+                <a:latin typeface="+mn-lt"/>
+                <a:ea typeface="+mn-ea"/>
+              </a:rPr>
+              <a:t> 읽기 풀 상한 40 → 96, 경보 80%</a:t>
+            </a:r>
+          </a:p>
+        </p:txBody>
+      </p:sp>
+      <p:sp>
+        <p:nvSpPr>
+          <p:cNvPr id="10" name="text s6.1.0.0.3.1"/>
+          <p:cNvSpPr txBox="1"/>
+          <p:nvPr/>
+        </p:nvSpPr>
+        <p:spPr>
+          <a:xfrm>
+            <a:off x="1019324" y="5598765"/>
+            <a:ext cx="4552652" cy="239911"/>
+          </a:xfrm>
+          <a:prstGeom prst="rect">
+            <a:avLst/>
+          </a:prstGeom>
+          <a:noFill/>
+          <a:ln>
+            <a:noFill/>
+          </a:ln>
+        </p:spPr>
+        <p:txBody>
+          <a:bodyPr wrap="square" lIns="0" tIns="0" rIns="0" bIns="0" anchor="t">
+            <a:normAutofit/>
+          </a:bodyPr>
+          <a:lstStyle/>
+          <a:p>
+            <a:pPr algn="l">
+              <a:lnSpc>
+                <a:spcPts val="1890"/>
+              </a:lnSpc>
+            </a:pPr>
+            <a:r>
+              <a:rPr sz="1350" b="0">
+                <a:solidFill>
+                  <a:schemeClr val="tx2"/>
+                </a:solidFill>
+                <a:latin typeface="+mn-lt"/>
+                <a:ea typeface="+mn-ea"/>
+              </a:rPr>
+              <a:t>여유 14개 → 70개</a:t>
+            </a:r>
+          </a:p>
+        </p:txBody>
+      </p:sp>
+      <p:sp>
+        <p:nvSpPr>
+          <p:cNvPr id="11" name="shape s6.2.0"/>
+          <p:cNvSpPr/>
           <p:nvPr/>
         </p:nvSpPr>
         <p:spPr>
           <a:xfrm>
             <a:off x="6210300" y="1283940"/>
-            <a:ext cx="5372100" cy="297061"/>
+            <a:ext cx="5372100" cy="4964460"/>
+          </a:xfrm>
+          <a:prstGeom prst="roundRect">
+            <a:avLst>
+              <a:gd name="adj" fmla="val 4605"/>
+            </a:avLst>
+          </a:prstGeom>
+          <a:solidFill>
+            <a:schemeClr val="bg2"/>
+          </a:solidFill>
+          <a:ln>
+            <a:noFill/>
+          </a:ln>
+        </p:spPr>
+        <p:txBody>
+          <a:bodyPr wrap="square" lIns="342900" tIns="342900" rIns="342900" bIns="342900" anchor="t">
+            <a:normAutofit/>
+          </a:bodyPr>
+          <a:lstStyle/>
+          <a:p/>
+        </p:txBody>
+      </p:sp>
+      <p:sp>
+        <p:nvSpPr>
+          <p:cNvPr id="12" name="text s6.2.0.0.0"/>
+          <p:cNvSpPr txBox="1"/>
+          <p:nvPr/>
+        </p:nvSpPr>
+        <p:spPr>
+          <a:xfrm>
+            <a:off x="6620024" y="1693664"/>
+            <a:ext cx="4552652" cy="346621"/>
           </a:xfrm>
           <a:prstGeom prst="rect">
             <a:avLst/>
@@ -4660,11 +7008,11 @@
           <a:p>
             <a:pPr algn="l">
               <a:lnSpc>
-                <a:spcPts val="2340"/>
-              </a:lnSpc>
-            </a:pPr>
-            <a:r>
-              <a:rPr sz="1800" b="1">
+                <a:spcPts val="2730"/>
+              </a:lnSpc>
+            </a:pPr>
+            <a:r>
+              <a:rPr sz="2100" b="1">
                 <a:solidFill>
                   <a:schemeClr val="accent3"/>
                 </a:solidFill>
@@ -4678,83 +7026,288 @@
       </p:sp>
       <p:sp>
         <p:nvSpPr>
-          <p:cNvPr id="6" name="ol s6.2.1"/>
-          <p:cNvSpPr txBox="1"/>
-          <p:nvPr/>
-        </p:nvSpPr>
-        <p:spPr>
-          <a:xfrm>
-            <a:off x="6210300" y="1695301"/>
-            <a:ext cx="5372100" cy="771525"/>
-          </a:xfrm>
-          <a:prstGeom prst="rect">
-            <a:avLst/>
-          </a:prstGeom>
-          <a:noFill/>
-          <a:ln>
-            <a:noFill/>
-          </a:ln>
-        </p:spPr>
-        <p:txBody>
-          <a:bodyPr wrap="square" lIns="0" tIns="0" rIns="0" bIns="0" anchor="t">
-            <a:normAutofit/>
-          </a:bodyPr>
-          <a:lstStyle/>
-          <a:p>
-            <a:pPr marL="342900" indent="-342900" algn="l">
-              <a:lnSpc>
-                <a:spcPts val="2025"/>
-              </a:lnSpc>
-              <a:buFont typeface="+mn-lt"/>
-              <a:buAutoNum type="arabicPeriod"/>
-            </a:pPr>
-            <a:r>
-              <a:rPr sz="1350" b="0">
+          <p:cNvPr id="13" name="text s6.2.0.0.1.0"/>
+          <p:cNvSpPr txBox="1"/>
+          <p:nvPr/>
+        </p:nvSpPr>
+        <p:spPr>
+          <a:xfrm>
+            <a:off x="6620024" y="2666405"/>
+            <a:ext cx="4552652" cy="342900"/>
+          </a:xfrm>
+          <a:prstGeom prst="rect">
+            <a:avLst/>
+          </a:prstGeom>
+          <a:noFill/>
+          <a:ln>
+            <a:noFill/>
+          </a:ln>
+        </p:spPr>
+        <p:txBody>
+          <a:bodyPr wrap="square" lIns="0" tIns="0" rIns="0" bIns="0" anchor="t">
+            <a:normAutofit/>
+          </a:bodyPr>
+          <a:lstStyle/>
+          <a:p>
+            <a:pPr algn="l">
+              <a:lnSpc>
+                <a:spcPts val="2700"/>
+              </a:lnSpc>
+            </a:pPr>
+            <a:r>
+              <a:rPr sz="1800" b="1" i="0" u="none">
                 <a:solidFill>
                   <a:schemeClr val="tx1"/>
                 </a:solidFill>
                 <a:latin typeface="+mn-lt"/>
                 <a:ea typeface="+mn-ea"/>
               </a:rPr>
-              <a:t>캐시 미스에 단일 비행 잠금</a:t>
-            </a:r>
-          </a:p>
-          <a:p>
-            <a:pPr marL="342900" indent="-342900" algn="l">
-              <a:lnSpc>
-                <a:spcPts val="2025"/>
-              </a:lnSpc>
-              <a:buFont typeface="+mn-lt"/>
-              <a:buAutoNum type="arabicPeriod"/>
-            </a:pPr>
-            <a:r>
-              <a:rPr sz="1350" b="0">
+              <a:t>4.</a:t>
+            </a:r>
+            <a:r>
+              <a:rPr sz="1800" b="0">
                 <a:solidFill>
                   <a:schemeClr val="tx1"/>
                 </a:solidFill>
                 <a:latin typeface="+mn-lt"/>
                 <a:ea typeface="+mn-ea"/>
               </a:rPr>
-              <a:t>부하 차단을 수동 → 자동 (오류율 2%)</a:t>
-            </a:r>
-          </a:p>
-          <a:p>
-            <a:pPr marL="342900" indent="-342900" algn="l">
-              <a:lnSpc>
-                <a:spcPts val="2025"/>
-              </a:lnSpc>
-              <a:buFont typeface="+mn-lt"/>
-              <a:buAutoNum type="arabicPeriod"/>
+              <a:t> 캐시 미스에 단일 비행 잠금</a:t>
+            </a:r>
+          </a:p>
+        </p:txBody>
+      </p:sp>
+      <p:sp>
+        <p:nvSpPr>
+          <p:cNvPr id="14" name="text s6.2.0.0.1.1"/>
+          <p:cNvSpPr txBox="1"/>
+          <p:nvPr/>
+        </p:nvSpPr>
+        <p:spPr>
+          <a:xfrm>
+            <a:off x="6620024" y="3066455"/>
+            <a:ext cx="4552652" cy="239911"/>
+          </a:xfrm>
+          <a:prstGeom prst="rect">
+            <a:avLst/>
+          </a:prstGeom>
+          <a:noFill/>
+          <a:ln>
+            <a:noFill/>
+          </a:ln>
+        </p:spPr>
+        <p:txBody>
+          <a:bodyPr wrap="square" lIns="0" tIns="0" rIns="0" bIns="0" anchor="t">
+            <a:normAutofit/>
+          </a:bodyPr>
+          <a:lstStyle/>
+          <a:p>
+            <a:pPr algn="l">
+              <a:lnSpc>
+                <a:spcPts val="1890"/>
+              </a:lnSpc>
             </a:pPr>
             <a:r>
               <a:rPr sz="1350" b="0">
                 <a:solidFill>
-                  <a:schemeClr val="tx1"/>
+                  <a:schemeClr val="tx2"/>
                 </a:solidFill>
                 <a:latin typeface="+mn-lt"/>
                 <a:ea typeface="+mn-ea"/>
               </a:rPr>
-              <a:t>스탬피드 부하 시험을 배포 게이트에</a:t>
+              <a:t>미스 하나가 질의 하나가 되는 경로를 끊는다</a:t>
+            </a:r>
+          </a:p>
+        </p:txBody>
+      </p:sp>
+      <p:sp>
+        <p:nvSpPr>
+          <p:cNvPr id="15" name="text s6.2.0.0.2.0"/>
+          <p:cNvSpPr txBox="1"/>
+          <p:nvPr/>
+        </p:nvSpPr>
+        <p:spPr>
+          <a:xfrm>
+            <a:off x="6620024" y="3932634"/>
+            <a:ext cx="4552652" cy="342900"/>
+          </a:xfrm>
+          <a:prstGeom prst="rect">
+            <a:avLst/>
+          </a:prstGeom>
+          <a:noFill/>
+          <a:ln>
+            <a:noFill/>
+          </a:ln>
+        </p:spPr>
+        <p:txBody>
+          <a:bodyPr wrap="square" lIns="0" tIns="0" rIns="0" bIns="0" anchor="t">
+            <a:normAutofit/>
+          </a:bodyPr>
+          <a:lstStyle/>
+          <a:p>
+            <a:pPr algn="l">
+              <a:lnSpc>
+                <a:spcPts val="2700"/>
+              </a:lnSpc>
+            </a:pPr>
+            <a:r>
+              <a:rPr sz="1800" b="1" i="0" u="none">
+                <a:solidFill>
+                  <a:schemeClr val="tx1"/>
+                </a:solidFill>
+                <a:latin typeface="+mn-lt"/>
+                <a:ea typeface="+mn-ea"/>
+              </a:rPr>
+              <a:t>5.</a:t>
+            </a:r>
+            <a:r>
+              <a:rPr sz="1800" b="0">
+                <a:solidFill>
+                  <a:schemeClr val="tx1"/>
+                </a:solidFill>
+                <a:latin typeface="+mn-lt"/>
+                <a:ea typeface="+mn-ea"/>
+              </a:rPr>
+              <a:t> 부하 차단을 수동 → 자동 (오류율 2%)</a:t>
+            </a:r>
+          </a:p>
+        </p:txBody>
+      </p:sp>
+      <p:sp>
+        <p:nvSpPr>
+          <p:cNvPr id="16" name="text s6.2.0.0.2.1"/>
+          <p:cNvSpPr txBox="1"/>
+          <p:nvPr/>
+        </p:nvSpPr>
+        <p:spPr>
+          <a:xfrm>
+            <a:off x="6620024" y="4332684"/>
+            <a:ext cx="4552652" cy="239911"/>
+          </a:xfrm>
+          <a:prstGeom prst="rect">
+            <a:avLst/>
+          </a:prstGeom>
+          <a:noFill/>
+          <a:ln>
+            <a:noFill/>
+          </a:ln>
+        </p:spPr>
+        <p:txBody>
+          <a:bodyPr wrap="square" lIns="0" tIns="0" rIns="0" bIns="0" anchor="t">
+            <a:normAutofit/>
+          </a:bodyPr>
+          <a:lstStyle/>
+          <a:p>
+            <a:pPr algn="l">
+              <a:lnSpc>
+                <a:spcPts val="1890"/>
+              </a:lnSpc>
+            </a:pPr>
+            <a:r>
+              <a:rPr sz="1350" b="0">
+                <a:solidFill>
+                  <a:schemeClr val="tx2"/>
+                </a:solidFill>
+                <a:latin typeface="+mn-lt"/>
+                <a:ea typeface="+mn-ea"/>
+              </a:rPr>
+              <a:t>이번에 사람이 17분 걸린 일을 기계가 한다</a:t>
+            </a:r>
+          </a:p>
+        </p:txBody>
+      </p:sp>
+      <p:sp>
+        <p:nvSpPr>
+          <p:cNvPr id="17" name="text s6.2.0.0.3.0"/>
+          <p:cNvSpPr txBox="1"/>
+          <p:nvPr/>
+        </p:nvSpPr>
+        <p:spPr>
+          <a:xfrm>
+            <a:off x="6620024" y="5198715"/>
+            <a:ext cx="4552652" cy="342900"/>
+          </a:xfrm>
+          <a:prstGeom prst="rect">
+            <a:avLst/>
+          </a:prstGeom>
+          <a:noFill/>
+          <a:ln>
+            <a:noFill/>
+          </a:ln>
+        </p:spPr>
+        <p:txBody>
+          <a:bodyPr wrap="square" lIns="0" tIns="0" rIns="0" bIns="0" anchor="t">
+            <a:normAutofit/>
+          </a:bodyPr>
+          <a:lstStyle/>
+          <a:p>
+            <a:pPr algn="l">
+              <a:lnSpc>
+                <a:spcPts val="2700"/>
+              </a:lnSpc>
+            </a:pPr>
+            <a:r>
+              <a:rPr sz="1800" b="1" i="0" u="none">
+                <a:solidFill>
+                  <a:schemeClr val="tx1"/>
+                </a:solidFill>
+                <a:latin typeface="+mn-lt"/>
+                <a:ea typeface="+mn-ea"/>
+              </a:rPr>
+              <a:t>6.</a:t>
+            </a:r>
+            <a:r>
+              <a:rPr sz="1800" b="0">
+                <a:solidFill>
+                  <a:schemeClr val="tx1"/>
+                </a:solidFill>
+                <a:latin typeface="+mn-lt"/>
+                <a:ea typeface="+mn-ea"/>
+              </a:rPr>
+              <a:t> 스탬피드 부하 시험을 배포 게이트에</a:t>
+            </a:r>
+          </a:p>
+        </p:txBody>
+      </p:sp>
+      <p:sp>
+        <p:nvSpPr>
+          <p:cNvPr id="18" name="text s6.2.0.0.3.1"/>
+          <p:cNvSpPr txBox="1"/>
+          <p:nvPr/>
+        </p:nvSpPr>
+        <p:spPr>
+          <a:xfrm>
+            <a:off x="6620024" y="5598765"/>
+            <a:ext cx="4552652" cy="239911"/>
+          </a:xfrm>
+          <a:prstGeom prst="rect">
+            <a:avLst/>
+          </a:prstGeom>
+          <a:noFill/>
+          <a:ln>
+            <a:noFill/>
+          </a:ln>
+        </p:spPr>
+        <p:txBody>
+          <a:bodyPr wrap="square" lIns="0" tIns="0" rIns="0" bIns="0" anchor="t">
+            <a:normAutofit/>
+          </a:bodyPr>
+          <a:lstStyle/>
+          <a:p>
+            <a:pPr algn="l">
+              <a:lnSpc>
+                <a:spcPts val="1890"/>
+              </a:lnSpc>
+            </a:pPr>
+            <a:r>
+              <a:rPr sz="1350" b="0">
+                <a:solidFill>
+                  <a:schemeClr val="tx2"/>
+                </a:solidFill>
+                <a:latin typeface="+mn-lt"/>
+                <a:ea typeface="+mn-ea"/>
+              </a:rPr>
+              <a:t>예열 직후 30분 뒤를 재현한다</a:t>
             </a:r>
           </a:p>
         </p:txBody>
@@ -5652,8 +8205,8 @@
         </p:nvSpPr>
         <p:spPr>
           <a:xfrm>
-            <a:off x="609600" y="2951857"/>
-            <a:ext cx="10972800" cy="485775"/>
+            <a:off x="609600" y="2508945"/>
+            <a:ext cx="10972800" cy="1371600"/>
           </a:xfrm>
           <a:prstGeom prst="rect">
             <a:avLst/>
@@ -5671,13 +8224,13 @@
           <a:p>
             <a:pPr algn="l">
               <a:lnSpc>
-                <a:spcPts val="3825"/>
-              </a:lnSpc>
-            </a:pPr>
-            <a:r>
-              <a:rPr sz="2550" b="0">
-                <a:solidFill>
-                  <a:schemeClr val="tx2"/>
+                <a:spcPts val="5400"/>
+              </a:lnSpc>
+            </a:pPr>
+            <a:r>
+              <a:rPr sz="3600" b="0">
+                <a:solidFill>
+                  <a:schemeClr val="tx1"/>
                 </a:solidFill>
                 <a:latin typeface="+mn-lt"/>
                 <a:ea typeface="+mn-ea"/>
@@ -5697,7 +8250,7 @@
         </p:nvSpPr>
         <p:spPr>
           <a:xfrm>
-            <a:off x="609600" y="3666232"/>
+            <a:off x="609600" y="4109145"/>
             <a:ext cx="10972800" cy="239911"/>
           </a:xfrm>
           <a:prstGeom prst="rect">

--- a/examples/showcase/decks/incident-postmortem/inc-2431-장애-회고.pptx
+++ b/examples/showcase/decks/incident-postmortem/inc-2431-장애-회고.pptx
@@ -1166,19 +1166,19 @@
         </p:nvSpPr>
         <p:spPr>
           <a:xfrm>
-            <a:off x="5025628" y="609600"/>
-            <a:ext cx="2140744" cy="239911"/>
-          </a:xfrm>
-          <a:prstGeom prst="rect">
-            <a:avLst/>
-          </a:prstGeom>
-          <a:noFill/>
-          <a:ln>
-            <a:noFill/>
-          </a:ln>
-        </p:spPr>
-        <p:txBody>
-          <a:bodyPr wrap="square" lIns="0" tIns="0" rIns="0" bIns="0" anchor="t">
+            <a:off x="4924574" y="609600"/>
+            <a:ext cx="2342704" cy="239911"/>
+          </a:xfrm>
+          <a:prstGeom prst="rect">
+            <a:avLst/>
+          </a:prstGeom>
+          <a:noFill/>
+          <a:ln>
+            <a:noFill/>
+          </a:ln>
+        </p:spPr>
+        <p:txBody>
+          <a:bodyPr wrap="none" lIns="0" tIns="0" rIns="0" bIns="0" anchor="t">
             <a:normAutofit/>
           </a:bodyPr>
           <a:lstStyle/>
@@ -1211,19 +1211,19 @@
         </p:nvSpPr>
         <p:spPr>
           <a:xfrm>
-            <a:off x="3116907" y="1078111"/>
-            <a:ext cx="5958185" cy="914400"/>
-          </a:xfrm>
-          <a:prstGeom prst="rect">
-            <a:avLst/>
-          </a:prstGeom>
-          <a:noFill/>
-          <a:ln>
-            <a:noFill/>
-          </a:ln>
-        </p:spPr>
-        <p:txBody>
-          <a:bodyPr wrap="square" lIns="0" tIns="0" rIns="0" bIns="0" anchor="t">
+            <a:off x="2893963" y="1078111"/>
+            <a:ext cx="6403925" cy="914400"/>
+          </a:xfrm>
+          <a:prstGeom prst="rect">
+            <a:avLst/>
+          </a:prstGeom>
+          <a:noFill/>
+          <a:ln>
+            <a:noFill/>
+          </a:ln>
+        </p:spPr>
+        <p:txBody>
+          <a:bodyPr wrap="none" lIns="0" tIns="0" rIns="0" bIns="0" anchor="t">
             <a:normAutofit/>
           </a:bodyPr>
           <a:lstStyle/>
@@ -1256,19 +1256,19 @@
         </p:nvSpPr>
         <p:spPr>
           <a:xfrm>
-            <a:off x="3245197" y="2221111"/>
-            <a:ext cx="5701605" cy="371475"/>
-          </a:xfrm>
-          <a:prstGeom prst="rect">
-            <a:avLst/>
-          </a:prstGeom>
-          <a:noFill/>
-          <a:ln>
-            <a:noFill/>
-          </a:ln>
-        </p:spPr>
-        <p:txBody>
-          <a:bodyPr wrap="square" lIns="0" tIns="0" rIns="0" bIns="0" anchor="t">
+            <a:off x="3064073" y="2221111"/>
+            <a:ext cx="6063704" cy="371475"/>
+          </a:xfrm>
+          <a:prstGeom prst="rect">
+            <a:avLst/>
+          </a:prstGeom>
+          <a:noFill/>
+          <a:ln>
+            <a:noFill/>
+          </a:ln>
+        </p:spPr>
+        <p:txBody>
+          <a:bodyPr wrap="none" lIns="0" tIns="0" rIns="0" bIns="0" anchor="t">
             <a:normAutofit/>
           </a:bodyPr>
           <a:lstStyle/>
@@ -1301,19 +1301,19 @@
         </p:nvSpPr>
         <p:spPr>
           <a:xfrm>
-            <a:off x="5389513" y="5436989"/>
-            <a:ext cx="1412825" cy="342900"/>
-          </a:xfrm>
-          <a:prstGeom prst="rect">
-            <a:avLst/>
-          </a:prstGeom>
-          <a:noFill/>
-          <a:ln>
-            <a:noFill/>
-          </a:ln>
-        </p:spPr>
-        <p:txBody>
-          <a:bodyPr wrap="square" lIns="0" tIns="0" rIns="0" bIns="0" anchor="t">
+            <a:off x="5308699" y="5436989"/>
+            <a:ext cx="1574602" cy="342900"/>
+          </a:xfrm>
+          <a:prstGeom prst="rect">
+            <a:avLst/>
+          </a:prstGeom>
+          <a:noFill/>
+          <a:ln>
+            <a:noFill/>
+          </a:ln>
+        </p:spPr>
+        <p:txBody>
+          <a:bodyPr wrap="none" lIns="0" tIns="0" rIns="0" bIns="0" anchor="t">
             <a:normAutofit/>
           </a:bodyPr>
           <a:lstStyle/>
@@ -1346,19 +1346,19 @@
         </p:nvSpPr>
         <p:spPr>
           <a:xfrm>
-            <a:off x="5655618" y="6008489"/>
-            <a:ext cx="880616" cy="239911"/>
-          </a:xfrm>
-          <a:prstGeom prst="rect">
-            <a:avLst/>
-          </a:prstGeom>
-          <a:noFill/>
-          <a:ln>
-            <a:noFill/>
-          </a:ln>
-        </p:spPr>
-        <p:txBody>
-          <a:bodyPr wrap="square" lIns="0" tIns="0" rIns="0" bIns="0" anchor="t">
+            <a:off x="5648474" y="6008489"/>
+            <a:ext cx="895052" cy="239911"/>
+          </a:xfrm>
+          <a:prstGeom prst="rect">
+            <a:avLst/>
+          </a:prstGeom>
+          <a:noFill/>
+          <a:ln>
+            <a:noFill/>
+          </a:ln>
+        </p:spPr>
+        <p:txBody>
+          <a:bodyPr wrap="none" lIns="0" tIns="0" rIns="0" bIns="0" anchor="t">
             <a:normAutofit/>
           </a:bodyPr>
           <a:lstStyle/>
@@ -1416,19 +1416,19 @@
         </p:nvSpPr>
         <p:spPr>
           <a:xfrm>
-            <a:off x="4347865" y="2684115"/>
-            <a:ext cx="3496121" cy="914400"/>
-          </a:xfrm>
-          <a:prstGeom prst="rect">
-            <a:avLst/>
-          </a:prstGeom>
-          <a:noFill/>
-          <a:ln>
-            <a:noFill/>
-          </a:ln>
-        </p:spPr>
-        <p:txBody>
-          <a:bodyPr wrap="square" lIns="0" tIns="0" rIns="0" bIns="0" anchor="t">
+            <a:off x="4244280" y="2684115"/>
+            <a:ext cx="3703439" cy="914400"/>
+          </a:xfrm>
+          <a:prstGeom prst="rect">
+            <a:avLst/>
+          </a:prstGeom>
+          <a:noFill/>
+          <a:ln>
+            <a:noFill/>
+          </a:ln>
+        </p:spPr>
+        <p:txBody>
+          <a:bodyPr wrap="none" lIns="0" tIns="0" rIns="0" bIns="0" anchor="t">
             <a:normAutofit/>
           </a:bodyPr>
           <a:lstStyle/>
@@ -1461,19 +1461,19 @@
         </p:nvSpPr>
         <p:spPr>
           <a:xfrm>
-            <a:off x="3764607" y="3827115"/>
-            <a:ext cx="4662636" cy="346621"/>
-          </a:xfrm>
-          <a:prstGeom prst="rect">
-            <a:avLst/>
-          </a:prstGeom>
-          <a:noFill/>
-          <a:ln>
-            <a:noFill/>
-          </a:ln>
-        </p:spPr>
-        <p:txBody>
-          <a:bodyPr wrap="square" lIns="0" tIns="0" rIns="0" bIns="0" anchor="t">
+            <a:off x="3536752" y="3827115"/>
+            <a:ext cx="5118497" cy="346621"/>
+          </a:xfrm>
+          <a:prstGeom prst="rect">
+            <a:avLst/>
+          </a:prstGeom>
+          <a:noFill/>
+          <a:ln>
+            <a:noFill/>
+          </a:ln>
+        </p:spPr>
+        <p:txBody>
+          <a:bodyPr wrap="none" lIns="0" tIns="0" rIns="0" bIns="0" anchor="t">
             <a:normAutofit/>
           </a:bodyPr>
           <a:lstStyle/>
@@ -2359,7 +2359,7 @@
           </a:xfrm>
           <a:prstGeom prst="chevron">
             <a:avLst>
-              <a:gd name="adj" fmla="val 172498"/>
+              <a:gd name="adj" fmla="val 172499"/>
             </a:avLst>
           </a:prstGeom>
           <a:solidFill>
@@ -2373,7 +2373,7 @@
           </a:ln>
         </p:spPr>
         <p:txBody>
-          <a:bodyPr wrap="square" lIns="-1051545" tIns="0" rIns="-1051545" bIns="0" anchor="t">
+          <a:bodyPr wrap="square" lIns="0" tIns="0" rIns="0" bIns="0" anchor="t">
             <a:normAutofit/>
           </a:bodyPr>
           <a:lstStyle/>
@@ -2505,8 +2505,8 @@
         </p:nvSpPr>
         <p:spPr>
           <a:xfrm>
-            <a:off x="871538" y="4548188"/>
-            <a:ext cx="1579215" cy="571500"/>
+            <a:off x="871538" y="4262438"/>
+            <a:ext cx="1579215" cy="857250"/>
           </a:xfrm>
           <a:prstGeom prst="rect">
             <a:avLst/>
@@ -2553,7 +2553,7 @@
           </a:xfrm>
           <a:prstGeom prst="chevron">
             <a:avLst>
-              <a:gd name="adj" fmla="val 172498"/>
+              <a:gd name="adj" fmla="val 172499"/>
             </a:avLst>
           </a:prstGeom>
           <a:solidFill>
@@ -2567,7 +2567,7 @@
           </a:ln>
         </p:spPr>
         <p:txBody>
-          <a:bodyPr wrap="square" lIns="-1051545" tIns="0" rIns="-1051545" bIns="0" anchor="t">
+          <a:bodyPr wrap="square" lIns="0" tIns="0" rIns="0" bIns="0" anchor="t">
             <a:normAutofit/>
           </a:bodyPr>
           <a:lstStyle/>
@@ -2747,7 +2747,7 @@
           </a:xfrm>
           <a:prstGeom prst="chevron">
             <a:avLst>
-              <a:gd name="adj" fmla="val 172498"/>
+              <a:gd name="adj" fmla="val 172499"/>
             </a:avLst>
           </a:prstGeom>
           <a:solidFill>
@@ -2761,7 +2761,7 @@
           </a:ln>
         </p:spPr>
         <p:txBody>
-          <a:bodyPr wrap="square" lIns="-1051545" tIns="0" rIns="-1051545" bIns="0" anchor="t">
+          <a:bodyPr wrap="square" lIns="0" tIns="0" rIns="0" bIns="0" anchor="t">
             <a:normAutofit/>
           </a:bodyPr>
           <a:lstStyle/>
@@ -2862,7 +2862,7 @@
           </a:ln>
         </p:spPr>
         <p:txBody>
-          <a:bodyPr wrap="square" lIns="0" tIns="0" rIns="0" bIns="0" anchor="t">
+          <a:bodyPr wrap="none" lIns="0" tIns="0" rIns="0" bIns="0" anchor="t">
             <a:normAutofit/>
           </a:bodyPr>
           <a:lstStyle/>
@@ -2941,7 +2941,7 @@
           </a:xfrm>
           <a:prstGeom prst="chevron">
             <a:avLst>
-              <a:gd name="adj" fmla="val 172498"/>
+              <a:gd name="adj" fmla="val 172499"/>
             </a:avLst>
           </a:prstGeom>
           <a:solidFill>
@@ -2955,7 +2955,7 @@
           </a:ln>
         </p:spPr>
         <p:txBody>
-          <a:bodyPr wrap="square" lIns="-1051545" tIns="0" rIns="-1051545" bIns="0" anchor="t">
+          <a:bodyPr wrap="square" lIns="0" tIns="0" rIns="0" bIns="0" anchor="t">
             <a:normAutofit/>
           </a:bodyPr>
           <a:lstStyle/>
@@ -3135,7 +3135,7 @@
           </a:xfrm>
           <a:prstGeom prst="chevron">
             <a:avLst>
-              <a:gd name="adj" fmla="val 172510"/>
+              <a:gd name="adj" fmla="val 172511"/>
             </a:avLst>
           </a:prstGeom>
           <a:solidFill>
@@ -3149,7 +3149,7 @@
           </a:ln>
         </p:spPr>
         <p:txBody>
-          <a:bodyPr wrap="square" lIns="-1051620" tIns="0" rIns="-1051620" bIns="0" anchor="t">
+          <a:bodyPr wrap="square" lIns="0" tIns="0" rIns="0" bIns="0" anchor="t">
             <a:normAutofit/>
           </a:bodyPr>
           <a:lstStyle/>
@@ -3542,10 +3542,10 @@
                 <a:tableStyleId>{5940675A-B579-460E-94D1-54222C63F5DA}</a:tableStyleId>
               </a:tblPr>
               <a:tblGrid>
-                <a:gridCol w="2189411"/>
-                <a:gridCol w="2581275"/>
-                <a:gridCol w="2184648"/>
-                <a:gridCol w="4017466"/>
+                <a:gridCol w="2185243"/>
+                <a:gridCol w="2583061"/>
+                <a:gridCol w="2180481"/>
+                <a:gridCol w="4024015"/>
               </a:tblGrid>
               <a:tr h="509588">
                 <a:tc>
@@ -5824,11 +5824,11 @@
         <p:spPr>
           <a:xfrm>
             <a:off x="609600" y="1283940"/>
-            <a:ext cx="5372100" cy="2281238"/>
+            <a:ext cx="5372100" cy="2276475"/>
           </a:xfrm>
           <a:prstGeom prst="roundRect">
             <a:avLst>
-              <a:gd name="adj" fmla="val 10021"/>
+              <a:gd name="adj" fmla="val 10042"/>
             </a:avLst>
           </a:prstGeom>
           <a:solidFill>
@@ -5940,7 +5940,7 @@
         </p:nvSpPr>
         <p:spPr>
           <a:xfrm>
-            <a:off x="905024" y="3029843"/>
+            <a:off x="905024" y="3025080"/>
             <a:ext cx="4781252" cy="239911"/>
           </a:xfrm>
           <a:prstGeom prst="rect">
@@ -5984,11 +5984,11 @@
         <p:spPr>
           <a:xfrm>
             <a:off x="6210300" y="1283940"/>
-            <a:ext cx="5372100" cy="2281238"/>
+            <a:ext cx="5372100" cy="2276475"/>
           </a:xfrm>
           <a:prstGeom prst="roundRect">
             <a:avLst>
-              <a:gd name="adj" fmla="val 10021"/>
+              <a:gd name="adj" fmla="val 10042"/>
             </a:avLst>
           </a:prstGeom>
           <a:solidFill>
@@ -6058,7 +6058,7 @@
         <p:spPr>
           <a:xfrm>
             <a:off x="6505724" y="1958429"/>
-            <a:ext cx="4781252" cy="581025"/>
+            <a:ext cx="4781252" cy="571500"/>
           </a:xfrm>
           <a:prstGeom prst="rect">
             <a:avLst/>
@@ -6120,7 +6120,7 @@
         </p:nvSpPr>
         <p:spPr>
           <a:xfrm>
-            <a:off x="6505724" y="3029843"/>
+            <a:off x="6505724" y="3025080"/>
             <a:ext cx="4781252" cy="239911"/>
           </a:xfrm>
           <a:prstGeom prst="rect">
@@ -6163,12 +6163,12 @@
         </p:nvSpPr>
         <p:spPr>
           <a:xfrm>
-            <a:off x="609600" y="3793778"/>
-            <a:ext cx="5372100" cy="1986111"/>
+            <a:off x="609600" y="3789015"/>
+            <a:ext cx="5372100" cy="1990874"/>
           </a:xfrm>
           <a:prstGeom prst="roundRect">
             <a:avLst>
-              <a:gd name="adj" fmla="val 11510"/>
+              <a:gd name="adj" fmla="val 11482"/>
             </a:avLst>
           </a:prstGeom>
           <a:solidFill>
@@ -6194,7 +6194,7 @@
         </p:nvSpPr>
         <p:spPr>
           <a:xfrm>
-            <a:off x="905024" y="4089202"/>
+            <a:off x="905024" y="4084439"/>
             <a:ext cx="4781252" cy="321915"/>
           </a:xfrm>
           <a:prstGeom prst="rect">
@@ -6237,7 +6237,7 @@
         </p:nvSpPr>
         <p:spPr>
           <a:xfrm>
-            <a:off x="905024" y="4468267"/>
+            <a:off x="905024" y="4463504"/>
             <a:ext cx="4781252" cy="285750"/>
           </a:xfrm>
           <a:prstGeom prst="rect">
@@ -6323,12 +6323,12 @@
         </p:nvSpPr>
         <p:spPr>
           <a:xfrm>
-            <a:off x="6210300" y="3793778"/>
-            <a:ext cx="5372100" cy="1986111"/>
+            <a:off x="6210300" y="3789015"/>
+            <a:ext cx="5372100" cy="1990874"/>
           </a:xfrm>
           <a:prstGeom prst="roundRect">
             <a:avLst>
-              <a:gd name="adj" fmla="val 11510"/>
+              <a:gd name="adj" fmla="val 11482"/>
             </a:avLst>
           </a:prstGeom>
           <a:solidFill>
@@ -6354,7 +6354,7 @@
         </p:nvSpPr>
         <p:spPr>
           <a:xfrm>
-            <a:off x="6505724" y="4089202"/>
+            <a:off x="6505724" y="4084439"/>
             <a:ext cx="4781252" cy="321915"/>
           </a:xfrm>
           <a:prstGeom prst="rect">
@@ -6397,7 +6397,7 @@
         </p:nvSpPr>
         <p:spPr>
           <a:xfrm>
-            <a:off x="6505724" y="4468267"/>
+            <a:off x="6505724" y="4463504"/>
             <a:ext cx="4781252" cy="285750"/>
           </a:xfrm>
           <a:prstGeom prst="rect">

--- a/examples/showcase/decks/incident-postmortem/inc-2431-장애-회고.pptx
+++ b/examples/showcase/decks/incident-postmortem/inc-2431-장애-회고.pptx
@@ -1166,7 +1166,7 @@
         </p:nvSpPr>
         <p:spPr>
           <a:xfrm>
-            <a:off x="4924574" y="609600"/>
+            <a:off x="4924574" y="1460302"/>
             <a:ext cx="2342704" cy="239911"/>
           </a:xfrm>
           <a:prstGeom prst="rect">
@@ -1211,7 +1211,7 @@
         </p:nvSpPr>
         <p:spPr>
           <a:xfrm>
-            <a:off x="2893963" y="1078111"/>
+            <a:off x="2893963" y="1928813"/>
             <a:ext cx="6403925" cy="914400"/>
           </a:xfrm>
           <a:prstGeom prst="rect">
@@ -1256,7 +1256,7 @@
         </p:nvSpPr>
         <p:spPr>
           <a:xfrm>
-            <a:off x="3064073" y="2221111"/>
+            <a:off x="3064073" y="3071813"/>
             <a:ext cx="6063704" cy="371475"/>
           </a:xfrm>
           <a:prstGeom prst="rect">
@@ -1301,7 +1301,7 @@
         </p:nvSpPr>
         <p:spPr>
           <a:xfrm>
-            <a:off x="5308699" y="5436989"/>
+            <a:off x="5308699" y="4586288"/>
             <a:ext cx="1574602" cy="342900"/>
           </a:xfrm>
           <a:prstGeom prst="rect">
@@ -1346,7 +1346,7 @@
         </p:nvSpPr>
         <p:spPr>
           <a:xfrm>
-            <a:off x="5648474" y="6008489"/>
+            <a:off x="5648474" y="5157788"/>
             <a:ext cx="895052" cy="239911"/>
           </a:xfrm>
           <a:prstGeom prst="rect">

--- a/examples/showcase/decks/incident-postmortem/inc-2431-장애-회고.pptx
+++ b/examples/showcase/decks/incident-postmortem/inc-2431-장애-회고.pptx
@@ -8403,4 +8403,116 @@
     </a:fmtScheme>
   </a:themeElements>
 </a:theme>
+</file>
+
+<file path=ppt/theme/theme2.xml><?xml version="1.0" encoding="utf-8"?>
+<a:theme xmlns:a="http://schemas.openxmlformats.org/drawingml/2006/main" name="minimal">
+  <a:themeElements>
+    <a:clrScheme name="minimal">
+      <a:dk1>
+        <a:srgbClr val="1A1A1A"/>
+      </a:dk1>
+      <a:lt1>
+        <a:srgbClr val="FFFFFF"/>
+      </a:lt1>
+      <a:dk2>
+        <a:srgbClr val="6B7280"/>
+      </a:dk2>
+      <a:lt2>
+        <a:srgbClr val="F3F4F6"/>
+      </a:lt2>
+      <a:accent1>
+        <a:srgbClr val="0F65F9"/>
+      </a:accent1>
+      <a:accent2>
+        <a:srgbClr val="0E8174"/>
+      </a:accent2>
+      <a:accent3>
+        <a:srgbClr val="15803D"/>
+      </a:accent3>
+      <a:accent4>
+        <a:srgbClr val="B45309"/>
+      </a:accent4>
+      <a:accent5>
+        <a:srgbClr val="DC2626"/>
+      </a:accent5>
+      <a:accent6>
+        <a:srgbClr val="9333EA"/>
+      </a:accent6>
+      <a:hlink>
+        <a:srgbClr val="0F65F9"/>
+      </a:hlink>
+      <a:folHlink>
+        <a:srgbClr val="0F65F9"/>
+      </a:folHlink>
+    </a:clrScheme>
+    <a:fontScheme name="minimal">
+      <a:majorFont>
+        <a:latin typeface="Noto Sans"/>
+        <a:ea typeface="Noto Sans CJK KR"/>
+        <a:cs typeface=""/>
+      </a:majorFont>
+      <a:minorFont>
+        <a:latin typeface="Noto Sans"/>
+        <a:ea typeface="Noto Sans CJK KR"/>
+        <a:cs typeface=""/>
+      </a:minorFont>
+    </a:fontScheme>
+    <a:fmtScheme name="minimal">
+      <a:fillStyleLst>
+        <a:solidFill>
+          <a:schemeClr val="phClr"/>
+        </a:solidFill>
+        <a:solidFill>
+          <a:schemeClr val="phClr"/>
+        </a:solidFill>
+        <a:solidFill>
+          <a:schemeClr val="phClr"/>
+        </a:solidFill>
+      </a:fillStyleLst>
+      <a:lnStyleLst>
+        <a:ln w="9525" cap="flat" cmpd="sng" algn="ctr">
+          <a:solidFill>
+            <a:schemeClr val="phClr"/>
+          </a:solidFill>
+          <a:prstDash val="solid"/>
+        </a:ln>
+        <a:ln w="19050" cap="flat" cmpd="sng" algn="ctr">
+          <a:solidFill>
+            <a:schemeClr val="phClr"/>
+          </a:solidFill>
+          <a:prstDash val="solid"/>
+        </a:ln>
+        <a:ln w="28575" cap="flat" cmpd="sng" algn="ctr">
+          <a:solidFill>
+            <a:schemeClr val="phClr"/>
+          </a:solidFill>
+          <a:prstDash val="solid"/>
+        </a:ln>
+      </a:lnStyleLst>
+      <a:effectStyleLst>
+        <a:effectStyle>
+          <a:effectLst/>
+        </a:effectStyle>
+        <a:effectStyle>
+          <a:effectLst/>
+        </a:effectStyle>
+        <a:effectStyle>
+          <a:effectLst/>
+        </a:effectStyle>
+      </a:effectStyleLst>
+      <a:bgFillStyleLst>
+        <a:solidFill>
+          <a:schemeClr val="phClr"/>
+        </a:solidFill>
+        <a:solidFill>
+          <a:schemeClr val="phClr"/>
+        </a:solidFill>
+        <a:solidFill>
+          <a:schemeClr val="phClr"/>
+        </a:solidFill>
+      </a:bgFillStyleLst>
+    </a:fmtScheme>
+  </a:themeElements>
+</a:theme>
 </file>
--- a/examples/showcase/decks/incident-postmortem/inc-2431-장애-회고.pptx
+++ b/examples/showcase/decks/incident-postmortem/inc-2431-장애-회고.pptx
@@ -7409,13 +7409,13 @@
       </p:sp>
       <p:sp>
         <p:nvSpPr>
-          <p:cNvPr id="4" name="text s7.1.0.0.0.0"/>
-          <p:cNvSpPr txBox="1"/>
-          <p:nvPr/>
-        </p:nvSpPr>
-        <p:spPr>
-          <a:xfrm>
-            <a:off x="609600" y="1381125"/>
+          <p:cNvPr id="4" name="text s7.1.0.0.0.0.1"/>
+          <p:cNvSpPr txBox="1"/>
+          <p:nvPr/>
+        </p:nvSpPr>
+        <p:spPr>
+          <a:xfrm>
+            <a:off x="609600" y="1699766"/>
             <a:ext cx="2194471" cy="239911"/>
           </a:xfrm>
           <a:prstGeom prst="rect">
@@ -7452,14 +7452,14 @@
       </p:sp>
       <p:sp>
         <p:nvSpPr>
-          <p:cNvPr id="5" name="shape s7.1.0.0.0.1"/>
+          <p:cNvPr id="5" name="shape s7.1.0.0.0.0.2"/>
           <p:cNvSpPr/>
           <p:nvPr/>
         </p:nvSpPr>
         <p:spPr>
           <a:xfrm>
-            <a:off x="938808" y="1678186"/>
-            <a:ext cx="1536055" cy="3547318"/>
+            <a:off x="938808" y="1996827"/>
+            <a:ext cx="1536055" cy="3228677"/>
           </a:xfrm>
           <a:prstGeom prst="rect">
             <a:avLst/>
@@ -7481,7 +7481,7 @@
       </p:sp>
       <p:sp>
         <p:nvSpPr>
-          <p:cNvPr id="6" name="shape s7.1.0.0.1"/>
+          <p:cNvPr id="6" name="shape s7.1.0.0.0.1"/>
           <p:cNvSpPr/>
           <p:nvPr/>
         </p:nvSpPr>
@@ -7510,14 +7510,14 @@
       </p:sp>
       <p:sp>
         <p:nvSpPr>
-          <p:cNvPr id="7" name="text s7.1.0.0.2"/>
-          <p:cNvSpPr txBox="1"/>
-          <p:nvPr/>
-        </p:nvSpPr>
-        <p:spPr>
-          <a:xfrm>
-            <a:off x="609600" y="5235029"/>
-            <a:ext cx="2194471" cy="239911"/>
+          <p:cNvPr id="7" name="text s7.1.0.0.1.0.1"/>
+          <p:cNvSpPr txBox="1"/>
+          <p:nvPr/>
+        </p:nvSpPr>
+        <p:spPr>
+          <a:xfrm>
+            <a:off x="2804071" y="2139851"/>
+            <a:ext cx="2194620" cy="239911"/>
           </a:xfrm>
           <a:prstGeom prst="rect">
             <a:avLst/>
@@ -7546,49 +7546,6 @@
                 <a:latin typeface="+mn-lt"/>
                 <a:ea typeface="+mn-ea"/>
               </a:rPr>
-              <a:t>5월</a:t>
-            </a:r>
-          </a:p>
-        </p:txBody>
-      </p:sp>
-      <p:sp>
-        <p:nvSpPr>
-          <p:cNvPr id="8" name="text s7.1.0.1.0.0"/>
-          <p:cNvSpPr txBox="1"/>
-          <p:nvPr/>
-        </p:nvSpPr>
-        <p:spPr>
-          <a:xfrm>
-            <a:off x="2804071" y="1864668"/>
-            <a:ext cx="2194620" cy="239911"/>
-          </a:xfrm>
-          <a:prstGeom prst="rect">
-            <a:avLst/>
-          </a:prstGeom>
-          <a:noFill/>
-          <a:ln>
-            <a:noFill/>
-          </a:ln>
-        </p:spPr>
-        <p:txBody>
-          <a:bodyPr wrap="square" lIns="0" tIns="0" rIns="0" bIns="0" anchor="t">
-            <a:normAutofit/>
-          </a:bodyPr>
-          <a:lstStyle/>
-          <a:p>
-            <a:pPr algn="ctr">
-              <a:lnSpc>
-                <a:spcPts val="1890"/>
-              </a:lnSpc>
-            </a:pPr>
-            <a:r>
-              <a:rPr sz="1350" b="0">
-                <a:solidFill>
-                  <a:schemeClr val="tx2"/>
-                </a:solidFill>
-                <a:latin typeface="+mn-lt"/>
-                <a:ea typeface="+mn-ea"/>
-              </a:rPr>
               <a:t>19분</a:t>
             </a:r>
           </a:p>
@@ -7596,14 +7553,14 @@
       </p:sp>
       <p:sp>
         <p:nvSpPr>
-          <p:cNvPr id="9" name="shape s7.1.0.1.0.1"/>
+          <p:cNvPr id="8" name="shape s7.1.0.0.1.0.2"/>
           <p:cNvSpPr/>
           <p:nvPr/>
         </p:nvSpPr>
         <p:spPr>
           <a:xfrm>
-            <a:off x="3133279" y="2161729"/>
-            <a:ext cx="1536204" cy="3063776"/>
+            <a:off x="3133279" y="2436912"/>
+            <a:ext cx="1536204" cy="2788593"/>
           </a:xfrm>
           <a:prstGeom prst="rect">
             <a:avLst/>
@@ -7625,7 +7582,7 @@
       </p:sp>
       <p:sp>
         <p:nvSpPr>
-          <p:cNvPr id="10" name="shape s7.1.0.1.1"/>
+          <p:cNvPr id="9" name="shape s7.1.0.0.1.1"/>
           <p:cNvSpPr/>
           <p:nvPr/>
         </p:nvSpPr>
@@ -7654,14 +7611,14 @@
       </p:sp>
       <p:sp>
         <p:nvSpPr>
-          <p:cNvPr id="11" name="text s7.1.0.1.2"/>
-          <p:cNvSpPr txBox="1"/>
-          <p:nvPr/>
-        </p:nvSpPr>
-        <p:spPr>
-          <a:xfrm>
-            <a:off x="2804071" y="5235029"/>
-            <a:ext cx="2194620" cy="239911"/>
+          <p:cNvPr id="10" name="text s7.1.0.0.2.0.1"/>
+          <p:cNvSpPr txBox="1"/>
+          <p:nvPr/>
+        </p:nvSpPr>
+        <p:spPr>
+          <a:xfrm>
+            <a:off x="4998690" y="2727275"/>
+            <a:ext cx="2194471" cy="239911"/>
           </a:xfrm>
           <a:prstGeom prst="rect">
             <a:avLst/>
@@ -7690,49 +7647,6 @@
                 <a:latin typeface="+mn-lt"/>
                 <a:ea typeface="+mn-ea"/>
               </a:rPr>
-              <a:t>6월</a:t>
-            </a:r>
-          </a:p>
-        </p:txBody>
-      </p:sp>
-      <p:sp>
-        <p:nvSpPr>
-          <p:cNvPr id="12" name="text s7.1.0.2.0.0"/>
-          <p:cNvSpPr txBox="1"/>
-          <p:nvPr/>
-        </p:nvSpPr>
-        <p:spPr>
-          <a:xfrm>
-            <a:off x="4998690" y="2509986"/>
-            <a:ext cx="2194471" cy="239911"/>
-          </a:xfrm>
-          <a:prstGeom prst="rect">
-            <a:avLst/>
-          </a:prstGeom>
-          <a:noFill/>
-          <a:ln>
-            <a:noFill/>
-          </a:ln>
-        </p:spPr>
-        <p:txBody>
-          <a:bodyPr wrap="square" lIns="0" tIns="0" rIns="0" bIns="0" anchor="t">
-            <a:normAutofit/>
-          </a:bodyPr>
-          <a:lstStyle/>
-          <a:p>
-            <a:pPr algn="ctr">
-              <a:lnSpc>
-                <a:spcPts val="1890"/>
-              </a:lnSpc>
-            </a:pPr>
-            <a:r>
-              <a:rPr sz="1350" b="0">
-                <a:solidFill>
-                  <a:schemeClr val="tx2"/>
-                </a:solidFill>
-                <a:latin typeface="+mn-lt"/>
-                <a:ea typeface="+mn-ea"/>
-              </a:rPr>
               <a:t>15분</a:t>
             </a:r>
           </a:p>
@@ -7740,14 +7654,14 @@
       </p:sp>
       <p:sp>
         <p:nvSpPr>
-          <p:cNvPr id="13" name="shape s7.1.0.2.0.1"/>
+          <p:cNvPr id="11" name="shape s7.1.0.0.2.0.2"/>
           <p:cNvSpPr/>
           <p:nvPr/>
         </p:nvSpPr>
         <p:spPr>
           <a:xfrm>
-            <a:off x="5327898" y="2807047"/>
-            <a:ext cx="1536055" cy="2418457"/>
+            <a:off x="5327898" y="3024336"/>
+            <a:ext cx="1536055" cy="2201168"/>
           </a:xfrm>
           <a:prstGeom prst="rect">
             <a:avLst/>
@@ -7769,7 +7683,7 @@
       </p:sp>
       <p:sp>
         <p:nvSpPr>
-          <p:cNvPr id="14" name="shape s7.1.0.2.1"/>
+          <p:cNvPr id="12" name="shape s7.1.0.0.2.1"/>
           <p:cNvSpPr/>
           <p:nvPr/>
         </p:nvSpPr>
@@ -7798,14 +7712,14 @@
       </p:sp>
       <p:sp>
         <p:nvSpPr>
-          <p:cNvPr id="15" name="text s7.1.0.2.2"/>
-          <p:cNvSpPr txBox="1"/>
-          <p:nvPr/>
-        </p:nvSpPr>
-        <p:spPr>
-          <a:xfrm>
-            <a:off x="4998690" y="5235029"/>
-            <a:ext cx="2194471" cy="239911"/>
+          <p:cNvPr id="13" name="text s7.1.0.0.3.0.1"/>
+          <p:cNvSpPr txBox="1"/>
+          <p:nvPr/>
+        </p:nvSpPr>
+        <p:spPr>
+          <a:xfrm>
+            <a:off x="7193161" y="3020616"/>
+            <a:ext cx="2194620" cy="239911"/>
           </a:xfrm>
           <a:prstGeom prst="rect">
             <a:avLst/>
@@ -7834,49 +7748,6 @@
                 <a:latin typeface="+mn-lt"/>
                 <a:ea typeface="+mn-ea"/>
               </a:rPr>
-              <a:t>7월</a:t>
-            </a:r>
-          </a:p>
-        </p:txBody>
-      </p:sp>
-      <p:sp>
-        <p:nvSpPr>
-          <p:cNvPr id="16" name="text s7.1.0.3.0.0"/>
-          <p:cNvSpPr txBox="1"/>
-          <p:nvPr/>
-        </p:nvSpPr>
-        <p:spPr>
-          <a:xfrm>
-            <a:off x="7193161" y="2832348"/>
-            <a:ext cx="2194620" cy="239911"/>
-          </a:xfrm>
-          <a:prstGeom prst="rect">
-            <a:avLst/>
-          </a:prstGeom>
-          <a:noFill/>
-          <a:ln>
-            <a:noFill/>
-          </a:ln>
-        </p:spPr>
-        <p:txBody>
-          <a:bodyPr wrap="square" lIns="0" tIns="0" rIns="0" bIns="0" anchor="t">
-            <a:normAutofit/>
-          </a:bodyPr>
-          <a:lstStyle/>
-          <a:p>
-            <a:pPr algn="ctr">
-              <a:lnSpc>
-                <a:spcPts val="1890"/>
-              </a:lnSpc>
-            </a:pPr>
-            <a:r>
-              <a:rPr sz="1350" b="0">
-                <a:solidFill>
-                  <a:schemeClr val="tx2"/>
-                </a:solidFill>
-                <a:latin typeface="+mn-lt"/>
-                <a:ea typeface="+mn-ea"/>
-              </a:rPr>
               <a:t>13분</a:t>
             </a:r>
           </a:p>
@@ -7884,14 +7755,14 @@
       </p:sp>
       <p:sp>
         <p:nvSpPr>
-          <p:cNvPr id="17" name="shape s7.1.0.3.0.1"/>
+          <p:cNvPr id="14" name="shape s7.1.0.0.3.0.2"/>
           <p:cNvSpPr/>
           <p:nvPr/>
         </p:nvSpPr>
         <p:spPr>
           <a:xfrm>
-            <a:off x="7522369" y="3129409"/>
-            <a:ext cx="1536204" cy="2096095"/>
+            <a:off x="7522369" y="3317677"/>
+            <a:ext cx="1536204" cy="1907828"/>
           </a:xfrm>
           <a:prstGeom prst="rect">
             <a:avLst/>
@@ -7913,7 +7784,7 @@
       </p:sp>
       <p:sp>
         <p:nvSpPr>
-          <p:cNvPr id="18" name="shape s7.1.0.3.1"/>
+          <p:cNvPr id="15" name="shape s7.1.0.0.3.1"/>
           <p:cNvSpPr/>
           <p:nvPr/>
         </p:nvSpPr>
@@ -7942,13 +7813,13 @@
       </p:sp>
       <p:sp>
         <p:nvSpPr>
-          <p:cNvPr id="19" name="text s7.1.0.3.2"/>
-          <p:cNvSpPr txBox="1"/>
-          <p:nvPr/>
-        </p:nvSpPr>
-        <p:spPr>
-          <a:xfrm>
-            <a:off x="7193161" y="5235029"/>
+          <p:cNvPr id="16" name="text s7.1.0.0.4.0.1"/>
+          <p:cNvSpPr txBox="1"/>
+          <p:nvPr/>
+        </p:nvSpPr>
+        <p:spPr>
+          <a:xfrm>
+            <a:off x="9387780" y="3167509"/>
             <a:ext cx="2194620" cy="239911"/>
           </a:xfrm>
           <a:prstGeom prst="rect">
@@ -7973,54 +7844,11 @@
             <a:r>
               <a:rPr sz="1350" b="0">
                 <a:solidFill>
-                  <a:schemeClr val="tx2"/>
+                  <a:schemeClr val="accent4"/>
                 </a:solidFill>
                 <a:latin typeface="+mn-lt"/>
                 <a:ea typeface="+mn-ea"/>
               </a:rPr>
-              <a:t>8월</a:t>
-            </a:r>
-          </a:p>
-        </p:txBody>
-      </p:sp>
-      <p:sp>
-        <p:nvSpPr>
-          <p:cNvPr id="20" name="text s7.1.0.4.0.0"/>
-          <p:cNvSpPr txBox="1"/>
-          <p:nvPr/>
-        </p:nvSpPr>
-        <p:spPr>
-          <a:xfrm>
-            <a:off x="9387780" y="2993678"/>
-            <a:ext cx="2194620" cy="239911"/>
-          </a:xfrm>
-          <a:prstGeom prst="rect">
-            <a:avLst/>
-          </a:prstGeom>
-          <a:noFill/>
-          <a:ln>
-            <a:noFill/>
-          </a:ln>
-        </p:spPr>
-        <p:txBody>
-          <a:bodyPr wrap="square" lIns="0" tIns="0" rIns="0" bIns="0" anchor="t">
-            <a:normAutofit/>
-          </a:bodyPr>
-          <a:lstStyle/>
-          <a:p>
-            <a:pPr algn="ctr">
-              <a:lnSpc>
-                <a:spcPts val="1890"/>
-              </a:lnSpc>
-            </a:pPr>
-            <a:r>
-              <a:rPr sz="1350" b="0">
-                <a:solidFill>
-                  <a:schemeClr val="accent4"/>
-                </a:solidFill>
-                <a:latin typeface="+mn-lt"/>
-                <a:ea typeface="+mn-ea"/>
-              </a:rPr>
               <a:t>12분</a:t>
             </a:r>
           </a:p>
@@ -8028,14 +7856,14 @@
       </p:sp>
       <p:sp>
         <p:nvSpPr>
-          <p:cNvPr id="21" name="shape s7.1.0.4.0.1"/>
+          <p:cNvPr id="17" name="shape s7.1.0.0.4.0.2"/>
           <p:cNvSpPr/>
           <p:nvPr/>
         </p:nvSpPr>
         <p:spPr>
           <a:xfrm>
-            <a:off x="9716988" y="3290739"/>
-            <a:ext cx="1536204" cy="1934766"/>
+            <a:off x="9716988" y="3464570"/>
+            <a:ext cx="1536204" cy="1760934"/>
           </a:xfrm>
           <a:prstGeom prst="rect">
             <a:avLst/>
@@ -8057,7 +7885,7 @@
       </p:sp>
       <p:sp>
         <p:nvSpPr>
-          <p:cNvPr id="22" name="shape s7.1.0.4.1"/>
+          <p:cNvPr id="18" name="shape s7.1.0.0.4.1"/>
           <p:cNvSpPr/>
           <p:nvPr/>
         </p:nvSpPr>
@@ -8086,7 +7914,179 @@
       </p:sp>
       <p:sp>
         <p:nvSpPr>
-          <p:cNvPr id="23" name="text s7.1.0.4.2"/>
+          <p:cNvPr id="19" name="text s7.1.0.1.0"/>
+          <p:cNvSpPr txBox="1"/>
+          <p:nvPr/>
+        </p:nvSpPr>
+        <p:spPr>
+          <a:xfrm>
+            <a:off x="609600" y="5235029"/>
+            <a:ext cx="2194471" cy="239911"/>
+          </a:xfrm>
+          <a:prstGeom prst="rect">
+            <a:avLst/>
+          </a:prstGeom>
+          <a:noFill/>
+          <a:ln>
+            <a:noFill/>
+          </a:ln>
+        </p:spPr>
+        <p:txBody>
+          <a:bodyPr wrap="square" lIns="0" tIns="0" rIns="0" bIns="0" anchor="t">
+            <a:normAutofit/>
+          </a:bodyPr>
+          <a:lstStyle/>
+          <a:p>
+            <a:pPr algn="ctr">
+              <a:lnSpc>
+                <a:spcPts val="1890"/>
+              </a:lnSpc>
+            </a:pPr>
+            <a:r>
+              <a:rPr sz="1350" b="0">
+                <a:solidFill>
+                  <a:schemeClr val="tx2"/>
+                </a:solidFill>
+                <a:latin typeface="+mn-lt"/>
+                <a:ea typeface="+mn-ea"/>
+              </a:rPr>
+              <a:t>5월</a:t>
+            </a:r>
+          </a:p>
+        </p:txBody>
+      </p:sp>
+      <p:sp>
+        <p:nvSpPr>
+          <p:cNvPr id="20" name="text s7.1.0.1.1"/>
+          <p:cNvSpPr txBox="1"/>
+          <p:nvPr/>
+        </p:nvSpPr>
+        <p:spPr>
+          <a:xfrm>
+            <a:off x="2804071" y="5235029"/>
+            <a:ext cx="2194620" cy="239911"/>
+          </a:xfrm>
+          <a:prstGeom prst="rect">
+            <a:avLst/>
+          </a:prstGeom>
+          <a:noFill/>
+          <a:ln>
+            <a:noFill/>
+          </a:ln>
+        </p:spPr>
+        <p:txBody>
+          <a:bodyPr wrap="square" lIns="0" tIns="0" rIns="0" bIns="0" anchor="t">
+            <a:normAutofit/>
+          </a:bodyPr>
+          <a:lstStyle/>
+          <a:p>
+            <a:pPr algn="ctr">
+              <a:lnSpc>
+                <a:spcPts val="1890"/>
+              </a:lnSpc>
+            </a:pPr>
+            <a:r>
+              <a:rPr sz="1350" b="0">
+                <a:solidFill>
+                  <a:schemeClr val="tx2"/>
+                </a:solidFill>
+                <a:latin typeface="+mn-lt"/>
+                <a:ea typeface="+mn-ea"/>
+              </a:rPr>
+              <a:t>6월</a:t>
+            </a:r>
+          </a:p>
+        </p:txBody>
+      </p:sp>
+      <p:sp>
+        <p:nvSpPr>
+          <p:cNvPr id="21" name="text s7.1.0.1.2"/>
+          <p:cNvSpPr txBox="1"/>
+          <p:nvPr/>
+        </p:nvSpPr>
+        <p:spPr>
+          <a:xfrm>
+            <a:off x="4998690" y="5235029"/>
+            <a:ext cx="2194471" cy="239911"/>
+          </a:xfrm>
+          <a:prstGeom prst="rect">
+            <a:avLst/>
+          </a:prstGeom>
+          <a:noFill/>
+          <a:ln>
+            <a:noFill/>
+          </a:ln>
+        </p:spPr>
+        <p:txBody>
+          <a:bodyPr wrap="square" lIns="0" tIns="0" rIns="0" bIns="0" anchor="t">
+            <a:normAutofit/>
+          </a:bodyPr>
+          <a:lstStyle/>
+          <a:p>
+            <a:pPr algn="ctr">
+              <a:lnSpc>
+                <a:spcPts val="1890"/>
+              </a:lnSpc>
+            </a:pPr>
+            <a:r>
+              <a:rPr sz="1350" b="0">
+                <a:solidFill>
+                  <a:schemeClr val="tx2"/>
+                </a:solidFill>
+                <a:latin typeface="+mn-lt"/>
+                <a:ea typeface="+mn-ea"/>
+              </a:rPr>
+              <a:t>7월</a:t>
+            </a:r>
+          </a:p>
+        </p:txBody>
+      </p:sp>
+      <p:sp>
+        <p:nvSpPr>
+          <p:cNvPr id="22" name="text s7.1.0.1.3"/>
+          <p:cNvSpPr txBox="1"/>
+          <p:nvPr/>
+        </p:nvSpPr>
+        <p:spPr>
+          <a:xfrm>
+            <a:off x="7193161" y="5235029"/>
+            <a:ext cx="2194620" cy="239911"/>
+          </a:xfrm>
+          <a:prstGeom prst="rect">
+            <a:avLst/>
+          </a:prstGeom>
+          <a:noFill/>
+          <a:ln>
+            <a:noFill/>
+          </a:ln>
+        </p:spPr>
+        <p:txBody>
+          <a:bodyPr wrap="square" lIns="0" tIns="0" rIns="0" bIns="0" anchor="t">
+            <a:normAutofit/>
+          </a:bodyPr>
+          <a:lstStyle/>
+          <a:p>
+            <a:pPr algn="ctr">
+              <a:lnSpc>
+                <a:spcPts val="1890"/>
+              </a:lnSpc>
+            </a:pPr>
+            <a:r>
+              <a:rPr sz="1350" b="0">
+                <a:solidFill>
+                  <a:schemeClr val="tx2"/>
+                </a:solidFill>
+                <a:latin typeface="+mn-lt"/>
+                <a:ea typeface="+mn-ea"/>
+              </a:rPr>
+              <a:t>8월</a:t>
+            </a:r>
+          </a:p>
+        </p:txBody>
+      </p:sp>
+      <p:sp>
+        <p:nvSpPr>
+          <p:cNvPr id="23" name="text s7.1.0.1.4"/>
           <p:cNvSpPr txBox="1"/>
           <p:nvPr/>
         </p:nvSpPr>

--- a/examples/showcase/decks/incident-postmortem/inc-2431-장애-회고.pptx
+++ b/examples/showcase/decks/incident-postmortem/inc-2431-장애-회고.pptx
@@ -2359,7 +2359,7 @@
           </a:xfrm>
           <a:prstGeom prst="chevron">
             <a:avLst>
-              <a:gd name="adj" fmla="val 172499"/>
+              <a:gd name="adj" fmla="val 68999"/>
             </a:avLst>
           </a:prstGeom>
           <a:solidFill>
@@ -2553,7 +2553,7 @@
           </a:xfrm>
           <a:prstGeom prst="chevron">
             <a:avLst>
-              <a:gd name="adj" fmla="val 172499"/>
+              <a:gd name="adj" fmla="val 68999"/>
             </a:avLst>
           </a:prstGeom>
           <a:solidFill>
@@ -2747,7 +2747,7 @@
           </a:xfrm>
           <a:prstGeom prst="chevron">
             <a:avLst>
-              <a:gd name="adj" fmla="val 172499"/>
+              <a:gd name="adj" fmla="val 68999"/>
             </a:avLst>
           </a:prstGeom>
           <a:solidFill>
@@ -2941,7 +2941,7 @@
           </a:xfrm>
           <a:prstGeom prst="chevron">
             <a:avLst>
-              <a:gd name="adj" fmla="val 172499"/>
+              <a:gd name="adj" fmla="val 68999"/>
             </a:avLst>
           </a:prstGeom>
           <a:solidFill>
@@ -3135,7 +3135,7 @@
           </a:xfrm>
           <a:prstGeom prst="chevron">
             <a:avLst>
-              <a:gd name="adj" fmla="val 172511"/>
+              <a:gd name="adj" fmla="val 69004"/>
             </a:avLst>
           </a:prstGeom>
           <a:solidFill>
